--- a/submissions/PayGuardAI_Slides.pptx
+++ b/submissions/PayGuardAI_Slides.pptx
@@ -4,6 +4,9 @@
   <p:sldMasterIdLst>
     <p:sldMasterId id="2147483648" r:id="rId1"/>
   </p:sldMasterIdLst>
+  <p:notesMasterIdLst>
+    <p:notesMasterId r:id="rId12"/>
+  </p:notesMasterIdLst>
   <p:sldIdLst>
     <p:sldId id="256" r:id="rId2"/>
     <p:sldId id="257" r:id="rId3"/>
@@ -16,10 +19,7 @@
     <p:sldId id="264" r:id="rId10"/>
     <p:sldId id="265" r:id="rId11"/>
   </p:sldIdLst>
-  <p:notesMasterIdLst>
-    <p:notesMasterId r:id="rId12"/>
-  </p:notesMasterIdLst>
-  <p:sldSz cx="9144000" cy="5143500"/>
+  <p:sldSz cx="9144000" cy="5143500" type="screen16x9"/>
   <p:notesSz cx="5143500" cy="9144000"/>
   <p:defaultTextStyle>
     <a:lvl1pPr marL="0" algn="l" defTabSz="914400" rtl="0" eaLnBrk="1" latinLnBrk="0" hangingPunct="1">
@@ -113,6 +113,11 @@
       </a:defRPr>
     </a:lvl9pPr>
   </p:defaultTextStyle>
+  <p:extLst>
+    <p:ext uri="{EFAFB233-063F-42B5-8137-9DF3F51BA10A}">
+      <p15:sldGuideLst xmlns:p15="http://schemas.microsoft.com/office/powerpoint/2012/main"/>
+    </p:ext>
+  </p:extLst>
 </p:presentation>
 </file>
 
@@ -138,234 +143,10 @@
           <a:chExt cx="0" cy="0"/>
         </a:xfrm>
       </p:grpSpPr>
-      <p:sp>
-        <p:nvSpPr>
-          <p:cNvPr id="2" name="Header Placeholder 1"/>
-          <p:cNvSpPr>
-            <a:spLocks noGrp="1"/>
-          </p:cNvSpPr>
-          <p:nvPr>
-            <p:ph type="hdr" sz="quarter"/>
-          </p:nvPr>
-        </p:nvSpPr>
-        <p:spPr>
-          <a:xfrm>
-            <a:off x="0" y="0"/>
-            <a:ext cx="2971800" cy="458788"/>
-          </a:xfrm>
-          <a:prstGeom prst="rect">
-            <a:avLst/>
-          </a:prstGeom>
-        </p:spPr>
-        <p:txBody>
-          <a:bodyPr vert="horz" lIns="91440" tIns="45720" rIns="91440" bIns="45720" rtlCol="0"/>
-          <a:lstStyle>
-            <a:lvl1pPr algn="l">
-              <a:defRPr sz="1200"/>
-            </a:lvl1pPr>
-          </a:lstStyle>
-          <a:p>
-            <a:endParaRPr lang="en-US"/>
-          </a:p>
-        </p:txBody>
-      </p:sp>
-      <p:sp>
-        <p:nvSpPr>
-          <p:cNvPr id="3" name="Date Placeholder 2"/>
-          <p:cNvSpPr>
-            <a:spLocks noGrp="1"/>
-          </p:cNvSpPr>
-          <p:nvPr>
-            <p:ph type="dt" idx="1"/>
-          </p:nvPr>
-        </p:nvSpPr>
-        <p:spPr>
-          <a:xfrm>
-            <a:off x="3884613" y="0"/>
-            <a:ext cx="2971800" cy="458788"/>
-          </a:xfrm>
-          <a:prstGeom prst="rect">
-            <a:avLst/>
-          </a:prstGeom>
-        </p:spPr>
-        <p:txBody>
-          <a:bodyPr vert="horz" lIns="91440" tIns="45720" rIns="91440" bIns="45720" rtlCol="0"/>
-          <a:lstStyle>
-            <a:lvl1pPr algn="r">
-              <a:defRPr sz="1200"/>
-            </a:lvl1pPr>
-          </a:lstStyle>
-          <a:p>
-            <a:fld id="{5282F153-3F37-0F45-9E97-73ACFA13230C}" type="datetimeFigureOut">
-              <a:rPr lang="en-US"/>
-              <a:t>7/23/19</a:t>
-            </a:fld>
-            <a:endParaRPr lang="en-US"/>
-          </a:p>
-        </p:txBody>
-      </p:sp>
-      <p:sp>
-        <p:nvSpPr>
-          <p:cNvPr id="4" name="Slide Image Placeholder 3"/>
-          <p:cNvSpPr>
-            <a:spLocks noGrp="1" noRot="1" noChangeAspect="1"/>
-          </p:cNvSpPr>
-          <p:nvPr>
-            <p:ph type="sldImg" idx="2"/>
-          </p:nvPr>
-        </p:nvSpPr>
-        <p:spPr>
-          <a:xfrm>
-            <a:off x="685800" y="1143000"/>
-            <a:ext cx="5486400" cy="3086100"/>
-          </a:xfrm>
-          <a:prstGeom prst="rect">
-            <a:avLst/>
-          </a:prstGeom>
-          <a:noFill/>
-          <a:ln w="12700">
-            <a:solidFill>
-              <a:prstClr val="black"/>
-            </a:solidFill>
-          </a:ln>
-        </p:spPr>
-        <p:txBody>
-          <a:bodyPr vert="horz" lIns="91440" tIns="45720" rIns="91440" bIns="45720" rtlCol="0" anchor="ctr"/>
-          <a:lstStyle/>
-          <a:p>
-            <a:endParaRPr lang="en-US"/>
-          </a:p>
-        </p:txBody>
-      </p:sp>
-      <p:sp>
-        <p:nvSpPr>
-          <p:cNvPr id="5" name="Notes Placeholder 4"/>
-          <p:cNvSpPr>
-            <a:spLocks noGrp="1"/>
-          </p:cNvSpPr>
-          <p:nvPr>
-            <p:ph type="body" sz="quarter" idx="3"/>
-          </p:nvPr>
-        </p:nvSpPr>
-        <p:spPr>
-          <a:xfrm>
-            <a:off x="685800" y="4400550"/>
-            <a:ext cx="5486400" cy="3600450"/>
-          </a:xfrm>
-          <a:prstGeom prst="rect">
-            <a:avLst/>
-          </a:prstGeom>
-        </p:spPr>
-        <p:txBody>
-          <a:bodyPr vert="horz" lIns="91440" tIns="45720" rIns="91440" bIns="45720" rtlCol="0"/>
-          <a:lstStyle/>
-          <a:p>
-            <a:pPr lvl="0"/>
-            <a:r>
-              <a:rPr lang="en-US"/>
-              <a:t>Click to edit Master text styles</a:t>
-            </a:r>
-          </a:p>
-          <a:p>
-            <a:pPr lvl="1"/>
-            <a:r>
-              <a:rPr lang="en-US"/>
-              <a:t>Second level</a:t>
-            </a:r>
-          </a:p>
-          <a:p>
-            <a:pPr lvl="2"/>
-            <a:r>
-              <a:rPr lang="en-US"/>
-              <a:t>Third level</a:t>
-            </a:r>
-          </a:p>
-          <a:p>
-            <a:pPr lvl="3"/>
-            <a:r>
-              <a:rPr lang="en-US"/>
-              <a:t>Fourth level</a:t>
-            </a:r>
-          </a:p>
-          <a:p>
-            <a:pPr lvl="4"/>
-            <a:r>
-              <a:rPr lang="en-US"/>
-              <a:t>Fifth level</a:t>
-            </a:r>
-          </a:p>
-        </p:txBody>
-      </p:sp>
-      <p:sp>
-        <p:nvSpPr>
-          <p:cNvPr id="6" name="Footer Placeholder 5"/>
-          <p:cNvSpPr>
-            <a:spLocks noGrp="1"/>
-          </p:cNvSpPr>
-          <p:nvPr>
-            <p:ph type="ftr" sz="quarter" idx="4"/>
-          </p:nvPr>
-        </p:nvSpPr>
-        <p:spPr>
-          <a:xfrm>
-            <a:off x="0" y="8685213"/>
-            <a:ext cx="2971800" cy="458787"/>
-          </a:xfrm>
-          <a:prstGeom prst="rect">
-            <a:avLst/>
-          </a:prstGeom>
-        </p:spPr>
-        <p:txBody>
-          <a:bodyPr vert="horz" lIns="91440" tIns="45720" rIns="91440" bIns="45720" rtlCol="0" anchor="b"/>
-          <a:lstStyle>
-            <a:lvl1pPr algn="l">
-              <a:defRPr sz="1200"/>
-            </a:lvl1pPr>
-          </a:lstStyle>
-          <a:p>
-            <a:endParaRPr lang="en-US"/>
-          </a:p>
-        </p:txBody>
-      </p:sp>
-      <p:sp>
-        <p:nvSpPr>
-          <p:cNvPr id="7" name="Slide Number Placeholder 6"/>
-          <p:cNvSpPr>
-            <a:spLocks noGrp="1"/>
-          </p:cNvSpPr>
-          <p:nvPr>
-            <p:ph type="sldNum" sz="quarter" idx="5"/>
-          </p:nvPr>
-        </p:nvSpPr>
-        <p:spPr>
-          <a:xfrm>
-            <a:off x="3884613" y="8685213"/>
-            <a:ext cx="2971800" cy="458787"/>
-          </a:xfrm>
-          <a:prstGeom prst="rect">
-            <a:avLst/>
-          </a:prstGeom>
-        </p:spPr>
-        <p:txBody>
-          <a:bodyPr vert="horz" lIns="91440" tIns="45720" rIns="91440" bIns="45720" rtlCol="0" anchor="b"/>
-          <a:lstStyle>
-            <a:lvl1pPr algn="r">
-              <a:defRPr sz="1200"/>
-            </a:lvl1pPr>
-          </a:lstStyle>
-          <a:p>
-            <a:fld id="{CE5E9CC1-C706-0F49-92D6-E571CC5EEA8F}" type="slidenum">
-              <a:rPr lang="en-US"/>
-              <a:t>‹#›</a:t>
-            </a:fld>
-            <a:endParaRPr lang="en-US"/>
-          </a:p>
-        </p:txBody>
-      </p:sp>
     </p:spTree>
     <p:extLst>
       <p:ext uri="{BB962C8B-B14F-4D97-AF65-F5344CB8AC3E}">
-        <p14:creationId xmlns:p14="http://schemas.microsoft.com/office/powerpoint/2010/main" val="1024086991"/>
+        <p14:creationId xmlns:p14="http://schemas.microsoft.com/office/powerpoint/2010/main" val="2076934849"/>
       </p:ext>
     </p:extLst>
   </p:cSld>
@@ -513,7 +294,6 @@
               <a:rPr lang="en-US" dirty="0"/>
               <a:t>Introduce PayGuard AI: the problem, the solution, and the three headline numbers. Built as a working proof of concept, not just a concept.</a:t>
             </a:r>
-            <a:endParaRPr lang="en-US" dirty="0"/>
           </a:p>
         </p:txBody>
       </p:sp>
@@ -601,7 +381,6 @@
               <a:rPr lang="en-US" dirty="0"/>
               <a:t>Closing slide. Big problem, working system, governance-first posture, clear path for Cotiviti. Invite questions.</a:t>
             </a:r>
-            <a:endParaRPr lang="en-US" dirty="0"/>
           </a:p>
         </p:txBody>
       </p:sp>
@@ -689,7 +468,6 @@
               <a:rPr lang="en-US" dirty="0"/>
               <a:t>Three problems: the scale ($16.6B), the tool gap (static rules), and the explainability gap. Each maps to one of the three agents in PayGuard AI.</a:t>
             </a:r>
-            <a:endParaRPr lang="en-US" dirty="0"/>
           </a:p>
         </p:txBody>
       </p:sp>
@@ -777,7 +555,6 @@
               <a:rPr lang="en-US" dirty="0"/>
               <a:t>Walk through the architecture: claim goes in, deterministic rules pre-screen, then 3 LLM agents each specialize. Live CMS API grounds every output. Four outputs at the bottom.</a:t>
             </a:r>
-            <a:endParaRPr lang="en-US" dirty="0"/>
           </a:p>
         </p:txBody>
       </p:sp>
@@ -865,7 +642,6 @@
               <a:rPr lang="en-US" dirty="0"/>
               <a:t>Each agent does one job. The key: context passing. Agent 2 knows what Agent 1 found; Agent 3 synthesizes both. Chain-of-thought, not three separate classifiers.</a:t>
             </a:r>
-            <a:endParaRPr lang="en-US" dirty="0"/>
           </a:p>
         </p:txBody>
       </p:sp>
@@ -953,7 +729,6 @@
               <a:rPr lang="en-US" dirty="0"/>
               <a:t>The deterministic layer. Plain English CMS policy in, executable JSON rule out via GPT-4o-mini. That rule pre-screens every future claim instantly before any LLM agent runs.</a:t>
             </a:r>
-            <a:endParaRPr lang="en-US" dirty="0"/>
           </a:p>
         </p:txBody>
       </p:sp>
@@ -1041,7 +816,6 @@
               <a:rPr lang="en-US" dirty="0"/>
               <a:t>Show each case: what was submitted, which rule fired, what the agents determined. Behavioral correctness on ground-truth scenarios, not a statistical performance claim.</a:t>
             </a:r>
-            <a:endParaRPr lang="en-US" dirty="0"/>
           </a:p>
         </p:txBody>
       </p:sp>
@@ -1129,7 +903,6 @@
               <a:rPr lang="en-US" dirty="0"/>
               <a:t>Four opportunities and four threats. Core principle across all threats: human-in-the-loop, always. PayGuard AI is decision support, not autonomous adjudication.</a:t>
             </a:r>
-            <a:endParaRPr lang="en-US" dirty="0"/>
           </a:p>
         </p:txBody>
       </p:sp>
@@ -1217,7 +990,6 @@
               <a:rPr lang="en-US" dirty="0"/>
               <a:t>Three options, each tied directly to what PayGuard AI already demonstrates. Recommendation: start with A and C together on de-identified data, expand to B once the rule library proves value.</a:t>
             </a:r>
-            <a:endParaRPr lang="en-US" dirty="0"/>
           </a:p>
         </p:txBody>
       </p:sp>
@@ -1305,7 +1077,6 @@
               <a:rPr lang="en-US" dirty="0"/>
               <a:t>Governance controls built in from day one, not added as an afterthought. GOVERNANCE.md, evaluation harness, and human-in-the-loop framing are all in the submitted code.</a:t>
             </a:r>
-            <a:endParaRPr lang="en-US" dirty="0"/>
           </a:p>
         </p:txBody>
       </p:sp>
@@ -1378,6 +1149,11 @@
 <file path=ppt/slideMasters/slideMaster1.xml><?xml version="1.0" encoding="utf-8"?>
 <p:sldMaster xmlns:a="http://schemas.openxmlformats.org/drawingml/2006/main" xmlns:r="http://schemas.openxmlformats.org/officeDocument/2006/relationships" xmlns:p="http://schemas.openxmlformats.org/presentationml/2006/main">
   <p:cSld>
+    <p:bg>
+      <p:bgRef idx="1001">
+        <a:schemeClr val="bg1"/>
+      </p:bgRef>
+    </p:bg>
     <p:spTree>
       <p:nvGrpSpPr>
         <p:cNvPr id="1" name=""/>
@@ -1660,6 +1436,7 @@
         <a:solidFill>
           <a:srgbClr val="1A0533"/>
         </a:solidFill>
+        <a:effectLst/>
       </p:bgPr>
     </p:bg>
     <p:spTree>
@@ -1695,17 +1472,24 @@
           </a:solidFill>
           <a:ln/>
         </p:spPr>
+        <p:txBody>
+          <a:bodyPr/>
+          <a:lstStyle/>
+          <a:p>
+            <a:endParaRPr lang="en-US"/>
+          </a:p>
+        </p:txBody>
       </p:sp>
       <p:pic>
         <p:nvPicPr>
-          <p:cNvPr id="3" name="Image 0" descr="preencoded.png">    </p:cNvPr>
+          <p:cNvPr id="3" name="Image 0" descr="preencoded.png"/>
           <p:cNvPicPr>
             <a:picLocks noChangeAspect="1"/>
           </p:cNvPicPr>
           <p:nvPr/>
         </p:nvPicPr>
         <p:blipFill>
-          <a:blip r:embed="rId1"/>
+          <a:blip r:embed="rId3"/>
           <a:stretch>
             <a:fillRect/>
           </a:stretch>
@@ -1741,7 +1525,7 @@
           <a:bodyPr wrap="square" lIns="0" tIns="0" rIns="0" bIns="0" rtlCol="0" anchor="ctr"/>
           <a:lstStyle/>
           <a:p>
-            <a:pPr indent="0" marL="0">
+            <a:pPr marL="0" indent="0">
               <a:buNone/>
             </a:pPr>
             <a:r>
@@ -1780,7 +1564,7 @@
           <a:bodyPr wrap="square" lIns="0" tIns="0" rIns="0" bIns="0" rtlCol="0" anchor="ctr"/>
           <a:lstStyle/>
           <a:p>
-            <a:pPr indent="0" marL="0">
+            <a:pPr marL="0" indent="0">
               <a:lnSpc>
                 <a:spcPct val="130000"/>
               </a:lnSpc>
@@ -1800,7 +1584,7 @@
             <a:endParaRPr lang="en-US" sz="1700" dirty="0"/>
           </a:p>
           <a:p>
-            <a:pPr indent="0" marL="0">
+            <a:pPr marL="0" indent="0">
               <a:lnSpc>
                 <a:spcPct val="130000"/>
               </a:lnSpc>
@@ -1820,7 +1604,7 @@
             <a:endParaRPr lang="en-US" sz="1700" dirty="0"/>
           </a:p>
           <a:p>
-            <a:pPr indent="0" marL="0">
+            <a:pPr marL="0" indent="0">
               <a:lnSpc>
                 <a:spcPct val="130000"/>
               </a:lnSpc>
@@ -1862,7 +1646,7 @@
           <a:bodyPr wrap="square" lIns="0" tIns="0" rIns="0" bIns="0" rtlCol="0" anchor="ctr"/>
           <a:lstStyle/>
           <a:p>
-            <a:pPr indent="0" marL="0">
+            <a:pPr marL="0" indent="0">
               <a:buNone/>
             </a:pPr>
             <a:r>
@@ -1901,20 +1685,9 @@
           <a:bodyPr wrap="square" lIns="0" tIns="0" rIns="0" bIns="0" rtlCol="0" anchor="ctr"/>
           <a:lstStyle/>
           <a:p>
-            <a:pPr indent="0" marL="0">
-              <a:buNone/>
-            </a:pPr>
-            <a:r>
-              <a:rPr lang="en-US" sz="1200" dirty="0">
-                <a:solidFill>
-                  <a:srgbClr val="A78BFA"/>
-                </a:solidFill>
-                <a:latin typeface="Calibri" pitchFamily="34" charset="0"/>
-                <a:ea typeface="Calibri" pitchFamily="34" charset="-122"/>
-                <a:cs typeface="Calibri" pitchFamily="34" charset="-120"/>
-              </a:rPr>
-              <a:t>AI/ML Engineer, DeepThink Health</a:t>
-            </a:r>
+            <a:pPr marL="0" indent="0">
+              <a:buNone/>
+            </a:pPr>
             <a:endParaRPr lang="en-US" sz="1200" dirty="0"/>
           </a:p>
         </p:txBody>
@@ -1942,6 +1715,13 @@
           </a:solidFill>
           <a:ln/>
         </p:spPr>
+        <p:txBody>
+          <a:bodyPr/>
+          <a:lstStyle/>
+          <a:p>
+            <a:endParaRPr lang="en-US"/>
+          </a:p>
+        </p:txBody>
       </p:sp>
       <p:sp>
         <p:nvSpPr>
@@ -1964,7 +1744,7 @@
           <a:bodyPr wrap="square" lIns="0" tIns="0" rIns="0" bIns="0" rtlCol="0" anchor="ctr"/>
           <a:lstStyle/>
           <a:p>
-            <a:pPr algn="ctr" indent="0" marL="0">
+            <a:pPr marL="0" indent="0" algn="ctr">
               <a:buNone/>
             </a:pPr>
             <a:r>
@@ -2003,7 +1783,7 @@
           <a:bodyPr wrap="square" lIns="0" tIns="0" rIns="0" bIns="0" rtlCol="0" anchor="ctr"/>
           <a:lstStyle/>
           <a:p>
-            <a:pPr algn="ctr" indent="0" marL="0">
+            <a:pPr marL="0" indent="0" algn="ctr">
               <a:lnSpc>
                 <a:spcPct val="120000"/>
               </a:lnSpc>
@@ -2023,7 +1803,7 @@
             <a:endParaRPr lang="en-US" sz="1100" dirty="0"/>
           </a:p>
           <a:p>
-            <a:pPr algn="ctr" indent="0" marL="0">
+            <a:pPr marL="0" indent="0" algn="ctr">
               <a:lnSpc>
                 <a:spcPct val="120000"/>
               </a:lnSpc>
@@ -2067,6 +1847,13 @@
           </a:solidFill>
           <a:ln/>
         </p:spPr>
+        <p:txBody>
+          <a:bodyPr/>
+          <a:lstStyle/>
+          <a:p>
+            <a:endParaRPr lang="en-US"/>
+          </a:p>
+        </p:txBody>
       </p:sp>
       <p:sp>
         <p:nvSpPr>
@@ -2089,7 +1876,7 @@
           <a:bodyPr wrap="square" lIns="0" tIns="0" rIns="0" bIns="0" rtlCol="0" anchor="ctr"/>
           <a:lstStyle/>
           <a:p>
-            <a:pPr algn="ctr" indent="0" marL="0">
+            <a:pPr marL="0" indent="0" algn="ctr">
               <a:buNone/>
             </a:pPr>
             <a:r>
@@ -2128,7 +1915,7 @@
           <a:bodyPr wrap="square" lIns="0" tIns="0" rIns="0" bIns="0" rtlCol="0" anchor="ctr"/>
           <a:lstStyle/>
           <a:p>
-            <a:pPr algn="ctr" indent="0" marL="0">
+            <a:pPr marL="0" indent="0" algn="ctr">
               <a:lnSpc>
                 <a:spcPct val="120000"/>
               </a:lnSpc>
@@ -2148,7 +1935,7 @@
             <a:endParaRPr lang="en-US" sz="1100" dirty="0"/>
           </a:p>
           <a:p>
-            <a:pPr algn="ctr" indent="0" marL="0">
+            <a:pPr marL="0" indent="0" algn="ctr">
               <a:lnSpc>
                 <a:spcPct val="120000"/>
               </a:lnSpc>
@@ -2192,6 +1979,13 @@
           </a:solidFill>
           <a:ln/>
         </p:spPr>
+        <p:txBody>
+          <a:bodyPr/>
+          <a:lstStyle/>
+          <a:p>
+            <a:endParaRPr lang="en-US"/>
+          </a:p>
+        </p:txBody>
       </p:sp>
       <p:sp>
         <p:nvSpPr>
@@ -2214,7 +2008,7 @@
           <a:bodyPr wrap="square" lIns="0" tIns="0" rIns="0" bIns="0" rtlCol="0" anchor="ctr"/>
           <a:lstStyle/>
           <a:p>
-            <a:pPr algn="ctr" indent="0" marL="0">
+            <a:pPr marL="0" indent="0" algn="ctr">
               <a:buNone/>
             </a:pPr>
             <a:r>
@@ -2253,7 +2047,7 @@
           <a:bodyPr wrap="square" lIns="0" tIns="0" rIns="0" bIns="0" rtlCol="0" anchor="ctr"/>
           <a:lstStyle/>
           <a:p>
-            <a:pPr algn="ctr" indent="0" marL="0">
+            <a:pPr marL="0" indent="0" algn="ctr">
               <a:lnSpc>
                 <a:spcPct val="120000"/>
               </a:lnSpc>
@@ -2273,7 +2067,7 @@
             <a:endParaRPr lang="en-US" sz="1100" dirty="0"/>
           </a:p>
           <a:p>
-            <a:pPr algn="ctr" indent="0" marL="0">
+            <a:pPr marL="0" indent="0" algn="ctr">
               <a:lnSpc>
                 <a:spcPct val="120000"/>
               </a:lnSpc>
@@ -2310,6 +2104,7 @@
         <a:solidFill>
           <a:srgbClr val="1A0533"/>
         </a:solidFill>
+        <a:effectLst/>
       </p:bgPr>
     </p:bg>
     <p:spTree>
@@ -2345,386 +2140,17 @@
           </a:solidFill>
           <a:ln/>
         </p:spPr>
+        <p:txBody>
+          <a:bodyPr/>
+          <a:lstStyle/>
+          <a:p>
+            <a:endParaRPr lang="en-US" dirty="0"/>
+          </a:p>
+        </p:txBody>
       </p:sp>
       <p:pic>
         <p:nvPicPr>
-          <p:cNvPr id="3" name="Image 0" descr="preencoded.png">    </p:cNvPr>
-          <p:cNvPicPr>
-            <a:picLocks noChangeAspect="1"/>
-          </p:cNvPicPr>
-          <p:nvPr/>
-        </p:nvPicPr>
-        <p:blipFill>
-          <a:blip r:embed="rId1"/>
-          <a:stretch>
-            <a:fillRect/>
-          </a:stretch>
-        </p:blipFill>
-        <p:spPr>
-          <a:xfrm>
-            <a:off x="411480" y="365760"/>
-            <a:ext cx="868680" cy="868680"/>
-          </a:xfrm>
-          <a:prstGeom prst="rect">
-            <a:avLst/>
-          </a:prstGeom>
-        </p:spPr>
-      </p:pic>
-      <p:sp>
-        <p:nvSpPr>
-          <p:cNvPr id="4" name="Text 1"/>
-          <p:cNvSpPr/>
-          <p:nvPr/>
-        </p:nvSpPr>
-        <p:spPr>
-          <a:xfrm>
-            <a:off x="411480" y="1325880"/>
-            <a:ext cx="4937760" cy="777240"/>
-          </a:xfrm>
-          <a:prstGeom prst="rect">
-            <a:avLst/>
-          </a:prstGeom>
-          <a:noFill/>
-          <a:ln/>
-        </p:spPr>
-        <p:txBody>
-          <a:bodyPr wrap="square" lIns="0" tIns="0" rIns="0" bIns="0" rtlCol="0" anchor="ctr"/>
-          <a:lstStyle/>
-          <a:p>
-            <a:pPr indent="0" marL="0">
-              <a:buNone/>
-            </a:pPr>
-            <a:r>
-              <a:rPr lang="en-US" sz="4400" b="1" dirty="0">
-                <a:solidFill>
-                  <a:srgbClr val="FFFFFF"/>
-                </a:solidFill>
-                <a:latin typeface="Cambria" pitchFamily="34" charset="0"/>
-                <a:ea typeface="Cambria" pitchFamily="34" charset="-122"/>
-                <a:cs typeface="Cambria" pitchFamily="34" charset="-120"/>
-              </a:rPr>
-              <a:t>PayGuard AI</a:t>
-            </a:r>
-            <a:endParaRPr lang="en-US" sz="4400" dirty="0"/>
-          </a:p>
-        </p:txBody>
-      </p:sp>
-      <p:sp>
-        <p:nvSpPr>
-          <p:cNvPr id="5" name="Text 2"/>
-          <p:cNvSpPr/>
-          <p:nvPr/>
-        </p:nvSpPr>
-        <p:spPr>
-          <a:xfrm>
-            <a:off x="411480" y="2176272"/>
-            <a:ext cx="4937760" cy="1051560"/>
-          </a:xfrm>
-          <a:prstGeom prst="rect">
-            <a:avLst/>
-          </a:prstGeom>
-          <a:noFill/>
-          <a:ln/>
-        </p:spPr>
-        <p:txBody>
-          <a:bodyPr wrap="square" lIns="0" tIns="0" rIns="0" bIns="0" rtlCol="0" anchor="ctr"/>
-          <a:lstStyle/>
-          <a:p>
-            <a:pPr indent="0" marL="0">
-              <a:lnSpc>
-                <a:spcPct val="140000"/>
-              </a:lnSpc>
-              <a:buNone/>
-            </a:pPr>
-            <a:r>
-              <a:rPr lang="en-US" sz="1500" dirty="0">
-                <a:solidFill>
-                  <a:srgbClr val="D8B4FE"/>
-                </a:solidFill>
-                <a:latin typeface="Calibri" pitchFamily="34" charset="0"/>
-                <a:ea typeface="Calibri" pitchFamily="34" charset="-122"/>
-                <a:cs typeface="Calibri" pitchFamily="34" charset="-120"/>
-              </a:rPr>
-              <a:t>The case for explainable agentic FWA detection is clear.</a:t>
-            </a:r>
-            <a:endParaRPr lang="en-US" sz="1500" dirty="0"/>
-          </a:p>
-          <a:p>
-            <a:pPr indent="0" marL="0">
-              <a:lnSpc>
-                <a:spcPct val="140000"/>
-              </a:lnSpc>
-              <a:buNone/>
-            </a:pPr>
-            <a:r>
-              <a:rPr lang="en-US" sz="1500" dirty="0">
-                <a:solidFill>
-                  <a:srgbClr val="D8B4FE"/>
-                </a:solidFill>
-                <a:latin typeface="Calibri" pitchFamily="34" charset="0"/>
-                <a:ea typeface="Calibri" pitchFamily="34" charset="-122"/>
-                <a:cs typeface="Calibri" pitchFamily="34" charset="-120"/>
-              </a:rPr>
-              <a:t>The architecture is proven.</a:t>
-            </a:r>
-            <a:endParaRPr lang="en-US" sz="1500" dirty="0"/>
-          </a:p>
-          <a:p>
-            <a:pPr indent="0" marL="0">
-              <a:lnSpc>
-                <a:spcPct val="140000"/>
-              </a:lnSpc>
-              <a:buNone/>
-            </a:pPr>
-            <a:r>
-              <a:rPr lang="en-US" sz="1500" dirty="0">
-                <a:solidFill>
-                  <a:srgbClr val="D8B4FE"/>
-                </a:solidFill>
-                <a:latin typeface="Calibri" pitchFamily="34" charset="0"/>
-                <a:ea typeface="Calibri" pitchFamily="34" charset="-122"/>
-                <a:cs typeface="Calibri" pitchFamily="34" charset="-120"/>
-              </a:rPr>
-              <a:t>The governance controls are in place.</a:t>
-            </a:r>
-            <a:endParaRPr lang="en-US" sz="1500" dirty="0"/>
-          </a:p>
-        </p:txBody>
-      </p:sp>
-      <p:sp>
-        <p:nvSpPr>
-          <p:cNvPr id="6" name="Text 3"/>
-          <p:cNvSpPr/>
-          <p:nvPr/>
-        </p:nvSpPr>
-        <p:spPr>
-          <a:xfrm>
-            <a:off x="411480" y="3337560"/>
-            <a:ext cx="4937760" cy="310896"/>
-          </a:xfrm>
-          <a:prstGeom prst="rect">
-            <a:avLst/>
-          </a:prstGeom>
-          <a:noFill/>
-          <a:ln/>
-        </p:spPr>
-        <p:txBody>
-          <a:bodyPr wrap="square" lIns="0" tIns="0" rIns="0" bIns="0" rtlCol="0" anchor="ctr"/>
-          <a:lstStyle/>
-          <a:p>
-            <a:pPr indent="0" marL="0">
-              <a:buNone/>
-            </a:pPr>
-            <a:r>
-              <a:rPr lang="en-US" sz="1200" dirty="0">
-                <a:solidFill>
-                  <a:srgbClr val="A78BFA"/>
-                </a:solidFill>
-                <a:latin typeface="Calibri" pitchFamily="34" charset="0"/>
-                <a:ea typeface="Calibri" pitchFamily="34" charset="-122"/>
-                <a:cs typeface="Calibri" pitchFamily="34" charset="-120"/>
-              </a:rPr>
-              <a:t>Built with synthetic data only. No real PHI used.</a:t>
-            </a:r>
-            <a:endParaRPr lang="en-US" sz="1200" dirty="0"/>
-          </a:p>
-        </p:txBody>
-      </p:sp>
-      <p:sp>
-        <p:nvSpPr>
-          <p:cNvPr id="7" name="Text 4"/>
-          <p:cNvSpPr/>
-          <p:nvPr/>
-        </p:nvSpPr>
-        <p:spPr>
-          <a:xfrm>
-            <a:off x="411480" y="4160520"/>
-            <a:ext cx="4937760" cy="292608"/>
-          </a:xfrm>
-          <a:prstGeom prst="rect">
-            <a:avLst/>
-          </a:prstGeom>
-          <a:noFill/>
-          <a:ln/>
-        </p:spPr>
-        <p:txBody>
-          <a:bodyPr wrap="square" lIns="0" tIns="0" rIns="0" bIns="0" rtlCol="0" anchor="ctr"/>
-          <a:lstStyle/>
-          <a:p>
-            <a:pPr indent="0" marL="0">
-              <a:buNone/>
-            </a:pPr>
-            <a:r>
-              <a:rPr lang="en-US" sz="1200" dirty="0">
-                <a:solidFill>
-                  <a:srgbClr val="A78BFA"/>
-                </a:solidFill>
-                <a:latin typeface="Calibri" pitchFamily="34" charset="0"/>
-                <a:ea typeface="Calibri" pitchFamily="34" charset="-122"/>
-                <a:cs typeface="Calibri" pitchFamily="34" charset="-120"/>
-              </a:rPr>
-              <a:t>Neha Save  |  MS Analytics, Northeastern University</a:t>
-            </a:r>
-            <a:endParaRPr lang="en-US" sz="1200" dirty="0"/>
-          </a:p>
-        </p:txBody>
-      </p:sp>
-      <p:sp>
-        <p:nvSpPr>
-          <p:cNvPr id="8" name="Text 5"/>
-          <p:cNvSpPr/>
-          <p:nvPr/>
-        </p:nvSpPr>
-        <p:spPr>
-          <a:xfrm>
-            <a:off x="411480" y="4462272"/>
-            <a:ext cx="4937760" cy="274320"/>
-          </a:xfrm>
-          <a:prstGeom prst="rect">
-            <a:avLst/>
-          </a:prstGeom>
-          <a:noFill/>
-          <a:ln/>
-        </p:spPr>
-        <p:txBody>
-          <a:bodyPr wrap="square" lIns="0" tIns="0" rIns="0" bIns="0" rtlCol="0" anchor="ctr"/>
-          <a:lstStyle/>
-          <a:p>
-            <a:pPr indent="0" marL="0">
-              <a:buNone/>
-            </a:pPr>
-            <a:r>
-              <a:rPr lang="en-US" sz="1200" dirty="0">
-                <a:solidFill>
-                  <a:srgbClr val="A78BFA"/>
-                </a:solidFill>
-                <a:latin typeface="Calibri" pitchFamily="34" charset="0"/>
-                <a:ea typeface="Calibri" pitchFamily="34" charset="-122"/>
-                <a:cs typeface="Calibri" pitchFamily="34" charset="-120"/>
-              </a:rPr>
-              <a:t>AI/ML Engineer, DeepThink Health</a:t>
-            </a:r>
-            <a:endParaRPr lang="en-US" sz="1200" dirty="0"/>
-          </a:p>
-        </p:txBody>
-      </p:sp>
-      <p:sp>
-        <p:nvSpPr>
-          <p:cNvPr id="9" name="Shape 6"/>
-          <p:cNvSpPr/>
-          <p:nvPr/>
-        </p:nvSpPr>
-        <p:spPr>
-          <a:xfrm>
-            <a:off x="6035040" y="658368"/>
-            <a:ext cx="2834640" cy="713232"/>
-          </a:xfrm>
-          <a:prstGeom prst="roundRect">
-            <a:avLst>
-              <a:gd name="adj" fmla="val 12821"/>
-            </a:avLst>
-          </a:prstGeom>
-          <a:solidFill>
-            <a:srgbClr val="FFFFFF">
-              <a:alpha val="10000"/>
-            </a:srgbClr>
-          </a:solidFill>
-          <a:ln/>
-        </p:spPr>
-      </p:sp>
-      <p:pic>
-        <p:nvPicPr>
-          <p:cNvPr id="10" name="Image 1" descr="preencoded.png">    </p:cNvPr>
-          <p:cNvPicPr>
-            <a:picLocks noChangeAspect="1"/>
-          </p:cNvPicPr>
-          <p:nvPr/>
-        </p:nvPicPr>
-        <p:blipFill>
-          <a:blip r:embed="rId2"/>
-          <a:stretch>
-            <a:fillRect/>
-          </a:stretch>
-        </p:blipFill>
-        <p:spPr>
-          <a:xfrm>
-            <a:off x="6144768" y="813816"/>
-            <a:ext cx="365760" cy="365760"/>
-          </a:xfrm>
-          <a:prstGeom prst="rect">
-            <a:avLst/>
-          </a:prstGeom>
-        </p:spPr>
-      </p:pic>
-      <p:sp>
-        <p:nvSpPr>
-          <p:cNvPr id="11" name="Text 7"/>
-          <p:cNvSpPr/>
-          <p:nvPr/>
-        </p:nvSpPr>
-        <p:spPr>
-          <a:xfrm>
-            <a:off x="6601968" y="822960"/>
-            <a:ext cx="2157984" cy="384048"/>
-          </a:xfrm>
-          <a:prstGeom prst="rect">
-            <a:avLst/>
-          </a:prstGeom>
-          <a:noFill/>
-          <a:ln/>
-        </p:spPr>
-        <p:txBody>
-          <a:bodyPr wrap="square" lIns="0" tIns="0" rIns="0" bIns="0" rtlCol="0" anchor="ctr"/>
-          <a:lstStyle/>
-          <a:p>
-            <a:pPr indent="0" marL="0">
-              <a:lnSpc>
-                <a:spcPct val="115000"/>
-              </a:lnSpc>
-              <a:buNone/>
-            </a:pPr>
-            <a:r>
-              <a:rPr lang="en-US" sz="1200" dirty="0">
-                <a:solidFill>
-                  <a:srgbClr val="FFFFFF"/>
-                </a:solidFill>
-                <a:latin typeface="Calibri" pitchFamily="34" charset="0"/>
-                <a:ea typeface="Calibri" pitchFamily="34" charset="-122"/>
-                <a:cs typeface="Calibri" pitchFamily="34" charset="-120"/>
-              </a:rPr>
-              <a:t>$16.6B problem — HHS OIG 2025</a:t>
-            </a:r>
-            <a:endParaRPr lang="en-US" sz="1200" dirty="0"/>
-          </a:p>
-        </p:txBody>
-      </p:sp>
-      <p:sp>
-        <p:nvSpPr>
-          <p:cNvPr id="12" name="Shape 8"/>
-          <p:cNvSpPr/>
-          <p:nvPr/>
-        </p:nvSpPr>
-        <p:spPr>
-          <a:xfrm>
-            <a:off x="6035040" y="1545336"/>
-            <a:ext cx="2834640" cy="713232"/>
-          </a:xfrm>
-          <a:prstGeom prst="roundRect">
-            <a:avLst>
-              <a:gd name="adj" fmla="val 12821"/>
-            </a:avLst>
-          </a:prstGeom>
-          <a:solidFill>
-            <a:srgbClr val="FFFFFF">
-              <a:alpha val="10000"/>
-            </a:srgbClr>
-          </a:solidFill>
-          <a:ln/>
-        </p:spPr>
-      </p:sp>
-      <p:pic>
-        <p:nvPicPr>
-          <p:cNvPr id="13" name="Image 2" descr="preencoded.png">    </p:cNvPr>
+          <p:cNvPr id="3" name="Image 0" descr="preencoded.png"/>
           <p:cNvPicPr>
             <a:picLocks noChangeAspect="1"/>
           </p:cNvPicPr>
@@ -2738,8 +2164,8 @@
         </p:blipFill>
         <p:spPr>
           <a:xfrm>
-            <a:off x="6144768" y="1700784"/>
-            <a:ext cx="365760" cy="365760"/>
+            <a:off x="411480" y="365760"/>
+            <a:ext cx="868680" cy="868680"/>
           </a:xfrm>
           <a:prstGeom prst="rect">
             <a:avLst/>
@@ -2748,41 +2174,159 @@
       </p:pic>
       <p:sp>
         <p:nvSpPr>
-          <p:cNvPr id="14" name="Text 9"/>
-          <p:cNvSpPr/>
-          <p:nvPr/>
-        </p:nvSpPr>
-        <p:spPr>
-          <a:xfrm>
-            <a:off x="6601968" y="1709928"/>
-            <a:ext cx="2157984" cy="384048"/>
-          </a:xfrm>
-          <a:prstGeom prst="rect">
-            <a:avLst/>
-          </a:prstGeom>
-          <a:noFill/>
-          <a:ln/>
-        </p:spPr>
-        <p:txBody>
-          <a:bodyPr wrap="square" lIns="0" tIns="0" rIns="0" bIns="0" rtlCol="0" anchor="ctr"/>
-          <a:lstStyle/>
-          <a:p>
-            <a:pPr indent="0" marL="0">
+          <p:cNvPr id="4" name="Text 1"/>
+          <p:cNvSpPr/>
+          <p:nvPr/>
+        </p:nvSpPr>
+        <p:spPr>
+          <a:xfrm>
+            <a:off x="411480" y="1325880"/>
+            <a:ext cx="4937760" cy="777240"/>
+          </a:xfrm>
+          <a:prstGeom prst="rect">
+            <a:avLst/>
+          </a:prstGeom>
+          <a:noFill/>
+          <a:ln/>
+        </p:spPr>
+        <p:txBody>
+          <a:bodyPr wrap="square" lIns="0" tIns="0" rIns="0" bIns="0" rtlCol="0" anchor="ctr"/>
+          <a:lstStyle/>
+          <a:p>
+            <a:pPr marL="0" indent="0">
+              <a:buNone/>
+            </a:pPr>
+            <a:r>
+              <a:rPr lang="en-US" sz="4400" b="1" dirty="0">
+                <a:solidFill>
+                  <a:srgbClr val="FFFFFF"/>
+                </a:solidFill>
+                <a:latin typeface="Cambria" pitchFamily="34" charset="0"/>
+                <a:ea typeface="Cambria" pitchFamily="34" charset="-122"/>
+                <a:cs typeface="Cambria" pitchFamily="34" charset="-120"/>
+              </a:rPr>
+              <a:t>PayGuard AI</a:t>
+            </a:r>
+            <a:endParaRPr lang="en-US" sz="4400" dirty="0"/>
+          </a:p>
+        </p:txBody>
+      </p:sp>
+      <p:sp>
+        <p:nvSpPr>
+          <p:cNvPr id="5" name="Text 2"/>
+          <p:cNvSpPr/>
+          <p:nvPr/>
+        </p:nvSpPr>
+        <p:spPr>
+          <a:xfrm>
+            <a:off x="411480" y="2176272"/>
+            <a:ext cx="4937760" cy="1051560"/>
+          </a:xfrm>
+          <a:prstGeom prst="rect">
+            <a:avLst/>
+          </a:prstGeom>
+          <a:noFill/>
+          <a:ln/>
+        </p:spPr>
+        <p:txBody>
+          <a:bodyPr wrap="square" lIns="0" tIns="0" rIns="0" bIns="0" rtlCol="0" anchor="ctr"/>
+          <a:lstStyle/>
+          <a:p>
+            <a:pPr marL="0" indent="0">
               <a:lnSpc>
-                <a:spcPct val="115000"/>
+                <a:spcPct val="140000"/>
               </a:lnSpc>
               <a:buNone/>
             </a:pPr>
             <a:r>
+              <a:rPr lang="en-US" sz="1500" dirty="0">
+                <a:solidFill>
+                  <a:srgbClr val="D8B4FE"/>
+                </a:solidFill>
+                <a:latin typeface="Calibri" pitchFamily="34" charset="0"/>
+                <a:ea typeface="Calibri" pitchFamily="34" charset="-122"/>
+                <a:cs typeface="Calibri" pitchFamily="34" charset="-120"/>
+              </a:rPr>
+              <a:t>The case for explainable agentic FWA detection is clear.</a:t>
+            </a:r>
+            <a:endParaRPr lang="en-US" sz="1500" dirty="0"/>
+          </a:p>
+          <a:p>
+            <a:pPr marL="0" indent="0">
+              <a:lnSpc>
+                <a:spcPct val="140000"/>
+              </a:lnSpc>
+              <a:buNone/>
+            </a:pPr>
+            <a:r>
+              <a:rPr lang="en-US" sz="1500" dirty="0">
+                <a:solidFill>
+                  <a:srgbClr val="D8B4FE"/>
+                </a:solidFill>
+                <a:latin typeface="Calibri" pitchFamily="34" charset="0"/>
+                <a:ea typeface="Calibri" pitchFamily="34" charset="-122"/>
+                <a:cs typeface="Calibri" pitchFamily="34" charset="-120"/>
+              </a:rPr>
+              <a:t>The architecture is proven.</a:t>
+            </a:r>
+            <a:endParaRPr lang="en-US" sz="1500" dirty="0"/>
+          </a:p>
+          <a:p>
+            <a:pPr marL="0" indent="0">
+              <a:lnSpc>
+                <a:spcPct val="140000"/>
+              </a:lnSpc>
+              <a:buNone/>
+            </a:pPr>
+            <a:r>
+              <a:rPr lang="en-US" sz="1500" dirty="0">
+                <a:solidFill>
+                  <a:srgbClr val="D8B4FE"/>
+                </a:solidFill>
+                <a:latin typeface="Calibri" pitchFamily="34" charset="0"/>
+                <a:ea typeface="Calibri" pitchFamily="34" charset="-122"/>
+                <a:cs typeface="Calibri" pitchFamily="34" charset="-120"/>
+              </a:rPr>
+              <a:t>The governance controls are in place.</a:t>
+            </a:r>
+            <a:endParaRPr lang="en-US" sz="1500" dirty="0"/>
+          </a:p>
+        </p:txBody>
+      </p:sp>
+      <p:sp>
+        <p:nvSpPr>
+          <p:cNvPr id="6" name="Text 3"/>
+          <p:cNvSpPr/>
+          <p:nvPr/>
+        </p:nvSpPr>
+        <p:spPr>
+          <a:xfrm>
+            <a:off x="411480" y="3337560"/>
+            <a:ext cx="4937760" cy="310896"/>
+          </a:xfrm>
+          <a:prstGeom prst="rect">
+            <a:avLst/>
+          </a:prstGeom>
+          <a:noFill/>
+          <a:ln/>
+        </p:spPr>
+        <p:txBody>
+          <a:bodyPr wrap="square" lIns="0" tIns="0" rIns="0" bIns="0" rtlCol="0" anchor="ctr"/>
+          <a:lstStyle/>
+          <a:p>
+            <a:pPr marL="0" indent="0">
+              <a:buNone/>
+            </a:pPr>
+            <a:r>
               <a:rPr lang="en-US" sz="1200" dirty="0">
                 <a:solidFill>
-                  <a:srgbClr val="FFFFFF"/>
-                </a:solidFill>
-                <a:latin typeface="Calibri" pitchFamily="34" charset="0"/>
-                <a:ea typeface="Calibri" pitchFamily="34" charset="-122"/>
-                <a:cs typeface="Calibri" pitchFamily="34" charset="-120"/>
-              </a:rPr>
-              <a:t>3-agent LLM + deterministic hybrid</a:t>
+                  <a:srgbClr val="A78BFA"/>
+                </a:solidFill>
+                <a:latin typeface="Calibri" pitchFamily="34" charset="0"/>
+                <a:ea typeface="Calibri" pitchFamily="34" charset="-122"/>
+                <a:cs typeface="Calibri" pitchFamily="34" charset="-120"/>
+              </a:rPr>
+              <a:t>Built with synthetic data only. No real PHI used.</a:t>
             </a:r>
             <a:endParaRPr lang="en-US" sz="1200" dirty="0"/>
           </a:p>
@@ -2790,13 +2334,120 @@
       </p:sp>
       <p:sp>
         <p:nvSpPr>
-          <p:cNvPr id="15" name="Shape 10"/>
-          <p:cNvSpPr/>
-          <p:nvPr/>
-        </p:nvSpPr>
-        <p:spPr>
-          <a:xfrm>
-            <a:off x="6035040" y="2432304"/>
+          <p:cNvPr id="7" name="Text 4"/>
+          <p:cNvSpPr/>
+          <p:nvPr/>
+        </p:nvSpPr>
+        <p:spPr>
+          <a:xfrm>
+            <a:off x="411480" y="3648456"/>
+            <a:ext cx="4937760" cy="804672"/>
+          </a:xfrm>
+          <a:prstGeom prst="rect">
+            <a:avLst/>
+          </a:prstGeom>
+          <a:noFill/>
+          <a:ln/>
+        </p:spPr>
+        <p:txBody>
+          <a:bodyPr wrap="square" lIns="0" tIns="0" rIns="0" bIns="0" rtlCol="0" anchor="ctr"/>
+          <a:lstStyle/>
+          <a:p>
+            <a:r>
+              <a:rPr lang="en-US" sz="1200" b="1" dirty="0">
+                <a:solidFill>
+                  <a:schemeClr val="bg1"/>
+                </a:solidFill>
+              </a:rPr>
+              <a:t>Live App: </a:t>
+            </a:r>
+            <a:r>
+              <a:rPr lang="en-US" sz="1200" b="1" dirty="0">
+                <a:solidFill>
+                  <a:schemeClr val="bg1"/>
+                </a:solidFill>
+                <a:hlinkClick r:id="rId4"/>
+              </a:rPr>
+              <a:t>https://payguard-ai-jv5rvuxekszih7ewdxrlcr.streamlit.app</a:t>
+            </a:r>
+            <a:endParaRPr lang="en-US" sz="1200" b="1" dirty="0">
+              <a:solidFill>
+                <a:schemeClr val="bg1"/>
+              </a:solidFill>
+              <a:latin typeface="Calibri" pitchFamily="34" charset="0"/>
+              <a:ea typeface="Calibri" pitchFamily="34" charset="-122"/>
+              <a:cs typeface="Calibri" pitchFamily="34" charset="-120"/>
+            </a:endParaRPr>
+          </a:p>
+          <a:p>
+            <a:pPr marL="0" indent="0">
+              <a:buNone/>
+            </a:pPr>
+            <a:endParaRPr lang="en-US" sz="1200" dirty="0">
+              <a:solidFill>
+                <a:srgbClr val="A78BFA"/>
+              </a:solidFill>
+              <a:latin typeface="Calibri" pitchFamily="34" charset="0"/>
+              <a:ea typeface="Calibri" pitchFamily="34" charset="-122"/>
+              <a:cs typeface="Calibri" pitchFamily="34" charset="-120"/>
+            </a:endParaRPr>
+          </a:p>
+          <a:p>
+            <a:pPr marL="0" indent="0">
+              <a:buNone/>
+            </a:pPr>
+            <a:r>
+              <a:rPr lang="en-US" sz="1200" dirty="0">
+                <a:solidFill>
+                  <a:srgbClr val="A78BFA"/>
+                </a:solidFill>
+                <a:latin typeface="Calibri" pitchFamily="34" charset="0"/>
+                <a:ea typeface="Calibri" pitchFamily="34" charset="-122"/>
+                <a:cs typeface="Calibri" pitchFamily="34" charset="-120"/>
+              </a:rPr>
+              <a:t>Neha Save  |  MS Analytics, Northeastern University</a:t>
+            </a:r>
+            <a:endParaRPr lang="en-US" sz="1200" dirty="0"/>
+          </a:p>
+        </p:txBody>
+      </p:sp>
+      <p:sp>
+        <p:nvSpPr>
+          <p:cNvPr id="8" name="Text 5"/>
+          <p:cNvSpPr/>
+          <p:nvPr/>
+        </p:nvSpPr>
+        <p:spPr>
+          <a:xfrm>
+            <a:off x="411480" y="4462272"/>
+            <a:ext cx="4937760" cy="274320"/>
+          </a:xfrm>
+          <a:prstGeom prst="rect">
+            <a:avLst/>
+          </a:prstGeom>
+          <a:noFill/>
+          <a:ln/>
+        </p:spPr>
+        <p:txBody>
+          <a:bodyPr wrap="square" lIns="0" tIns="0" rIns="0" bIns="0" rtlCol="0" anchor="ctr"/>
+          <a:lstStyle/>
+          <a:p>
+            <a:pPr marL="0" indent="0">
+              <a:buNone/>
+            </a:pPr>
+            <a:endParaRPr lang="en-US" sz="1200" dirty="0"/>
+          </a:p>
+        </p:txBody>
+      </p:sp>
+      <p:sp>
+        <p:nvSpPr>
+          <p:cNvPr id="9" name="Shape 6"/>
+          <p:cNvSpPr/>
+          <p:nvPr/>
+        </p:nvSpPr>
+        <p:spPr>
+          <a:xfrm>
+            <a:off x="6035040" y="658368"/>
             <a:ext cx="2834640" cy="713232"/>
           </a:xfrm>
           <a:prstGeom prst="roundRect">
@@ -2811,100 +2462,17 @@
           </a:solidFill>
           <a:ln/>
         </p:spPr>
+        <p:txBody>
+          <a:bodyPr/>
+          <a:lstStyle/>
+          <a:p>
+            <a:endParaRPr lang="en-US"/>
+          </a:p>
+        </p:txBody>
       </p:sp>
       <p:pic>
         <p:nvPicPr>
-          <p:cNvPr id="16" name="Image 3" descr="preencoded.png">    </p:cNvPr>
-          <p:cNvPicPr>
-            <a:picLocks noChangeAspect="1"/>
-          </p:cNvPicPr>
-          <p:nvPr/>
-        </p:nvPicPr>
-        <p:blipFill>
-          <a:blip r:embed="rId4"/>
-          <a:stretch>
-            <a:fillRect/>
-          </a:stretch>
-        </p:blipFill>
-        <p:spPr>
-          <a:xfrm>
-            <a:off x="6144768" y="2587752"/>
-            <a:ext cx="365760" cy="365760"/>
-          </a:xfrm>
-          <a:prstGeom prst="rect">
-            <a:avLst/>
-          </a:prstGeom>
-        </p:spPr>
-      </p:pic>
-      <p:sp>
-        <p:nvSpPr>
-          <p:cNvPr id="17" name="Text 11"/>
-          <p:cNvSpPr/>
-          <p:nvPr/>
-        </p:nvSpPr>
-        <p:spPr>
-          <a:xfrm>
-            <a:off x="6601968" y="2596896"/>
-            <a:ext cx="2157984" cy="384048"/>
-          </a:xfrm>
-          <a:prstGeom prst="rect">
-            <a:avLst/>
-          </a:prstGeom>
-          <a:noFill/>
-          <a:ln/>
-        </p:spPr>
-        <p:txBody>
-          <a:bodyPr wrap="square" lIns="0" tIns="0" rIns="0" bIns="0" rtlCol="0" anchor="ctr"/>
-          <a:lstStyle/>
-          <a:p>
-            <a:pPr indent="0" marL="0">
-              <a:lnSpc>
-                <a:spcPct val="115000"/>
-              </a:lnSpc>
-              <a:buNone/>
-            </a:pPr>
-            <a:r>
-              <a:rPr lang="en-US" sz="1200" dirty="0">
-                <a:solidFill>
-                  <a:srgbClr val="FFFFFF"/>
-                </a:solidFill>
-                <a:latin typeface="Calibri" pitchFamily="34" charset="0"/>
-                <a:ea typeface="Calibri" pitchFamily="34" charset="-122"/>
-                <a:cs typeface="Calibri" pitchFamily="34" charset="-120"/>
-              </a:rPr>
-              <a:t>Policy-to-rule engine for CMS NCD/LCD</a:t>
-            </a:r>
-            <a:endParaRPr lang="en-US" sz="1200" dirty="0"/>
-          </a:p>
-        </p:txBody>
-      </p:sp>
-      <p:sp>
-        <p:nvSpPr>
-          <p:cNvPr id="18" name="Shape 12"/>
-          <p:cNvSpPr/>
-          <p:nvPr/>
-        </p:nvSpPr>
-        <p:spPr>
-          <a:xfrm>
-            <a:off x="6035040" y="3319272"/>
-            <a:ext cx="2834640" cy="713232"/>
-          </a:xfrm>
-          <a:prstGeom prst="roundRect">
-            <a:avLst>
-              <a:gd name="adj" fmla="val 12821"/>
-            </a:avLst>
-          </a:prstGeom>
-          <a:solidFill>
-            <a:srgbClr val="FFFFFF">
-              <a:alpha val="10000"/>
-            </a:srgbClr>
-          </a:solidFill>
-          <a:ln/>
-        </p:spPr>
-      </p:sp>
-      <p:pic>
-        <p:nvPicPr>
-          <p:cNvPr id="19" name="Image 4" descr="preencoded.png">    </p:cNvPr>
+          <p:cNvPr id="10" name="Image 1" descr="preencoded.png"/>
           <p:cNvPicPr>
             <a:picLocks noChangeAspect="1"/>
           </p:cNvPicPr>
@@ -2918,7 +2486,7 @@
         </p:blipFill>
         <p:spPr>
           <a:xfrm>
-            <a:off x="6144768" y="3474720"/>
+            <a:off x="6144768" y="813816"/>
             <a:ext cx="365760" cy="365760"/>
           </a:xfrm>
           <a:prstGeom prst="rect">
@@ -2928,13 +2496,13 @@
       </p:pic>
       <p:sp>
         <p:nvSpPr>
-          <p:cNvPr id="20" name="Text 13"/>
-          <p:cNvSpPr/>
-          <p:nvPr/>
-        </p:nvSpPr>
-        <p:spPr>
-          <a:xfrm>
-            <a:off x="6601968" y="3483864"/>
+          <p:cNvPr id="11" name="Text 7"/>
+          <p:cNvSpPr/>
+          <p:nvPr/>
+        </p:nvSpPr>
+        <p:spPr>
+          <a:xfrm>
+            <a:off x="6601968" y="822960"/>
             <a:ext cx="2157984" cy="384048"/>
           </a:xfrm>
           <a:prstGeom prst="rect">
@@ -2947,7 +2515,7 @@
           <a:bodyPr wrap="square" lIns="0" tIns="0" rIns="0" bIns="0" rtlCol="0" anchor="ctr"/>
           <a:lstStyle/>
           <a:p>
-            <a:pPr indent="0" marL="0">
+            <a:pPr marL="0" indent="0">
               <a:lnSpc>
                 <a:spcPct val="115000"/>
               </a:lnSpc>
@@ -2962,7 +2530,7 @@
                 <a:ea typeface="Calibri" pitchFamily="34" charset="-122"/>
                 <a:cs typeface="Calibri" pitchFamily="34" charset="-120"/>
               </a:rPr>
-              <a:t>Human-in-the-loop governance built in</a:t>
+              <a:t>$16.6B problem — HHS OIG 2025</a:t>
             </a:r>
             <a:endParaRPr lang="en-US" sz="1200" dirty="0"/>
           </a:p>
@@ -2970,13 +2538,13 @@
       </p:sp>
       <p:sp>
         <p:nvSpPr>
-          <p:cNvPr id="21" name="Shape 14"/>
-          <p:cNvSpPr/>
-          <p:nvPr/>
-        </p:nvSpPr>
-        <p:spPr>
-          <a:xfrm>
-            <a:off x="6035040" y="4206240"/>
+          <p:cNvPr id="12" name="Shape 8"/>
+          <p:cNvSpPr/>
+          <p:nvPr/>
+        </p:nvSpPr>
+        <p:spPr>
+          <a:xfrm>
+            <a:off x="6035040" y="1545336"/>
             <a:ext cx="2834640" cy="713232"/>
           </a:xfrm>
           <a:prstGeom prst="roundRect">
@@ -2991,10 +2559,17 @@
           </a:solidFill>
           <a:ln/>
         </p:spPr>
+        <p:txBody>
+          <a:bodyPr/>
+          <a:lstStyle/>
+          <a:p>
+            <a:endParaRPr lang="en-US"/>
+          </a:p>
+        </p:txBody>
       </p:sp>
       <p:pic>
         <p:nvPicPr>
-          <p:cNvPr id="22" name="Image 5" descr="preencoded.png">    </p:cNvPr>
+          <p:cNvPr id="13" name="Image 2" descr="preencoded.png"/>
           <p:cNvPicPr>
             <a:picLocks noChangeAspect="1"/>
           </p:cNvPicPr>
@@ -3008,6 +2583,297 @@
         </p:blipFill>
         <p:spPr>
           <a:xfrm>
+            <a:off x="6144768" y="1700784"/>
+            <a:ext cx="365760" cy="365760"/>
+          </a:xfrm>
+          <a:prstGeom prst="rect">
+            <a:avLst/>
+          </a:prstGeom>
+        </p:spPr>
+      </p:pic>
+      <p:sp>
+        <p:nvSpPr>
+          <p:cNvPr id="14" name="Text 9"/>
+          <p:cNvSpPr/>
+          <p:nvPr/>
+        </p:nvSpPr>
+        <p:spPr>
+          <a:xfrm>
+            <a:off x="6601968" y="1709928"/>
+            <a:ext cx="2157984" cy="384048"/>
+          </a:xfrm>
+          <a:prstGeom prst="rect">
+            <a:avLst/>
+          </a:prstGeom>
+          <a:noFill/>
+          <a:ln/>
+        </p:spPr>
+        <p:txBody>
+          <a:bodyPr wrap="square" lIns="0" tIns="0" rIns="0" bIns="0" rtlCol="0" anchor="ctr"/>
+          <a:lstStyle/>
+          <a:p>
+            <a:pPr marL="0" indent="0">
+              <a:lnSpc>
+                <a:spcPct val="115000"/>
+              </a:lnSpc>
+              <a:buNone/>
+            </a:pPr>
+            <a:r>
+              <a:rPr lang="en-US" sz="1200" dirty="0">
+                <a:solidFill>
+                  <a:srgbClr val="FFFFFF"/>
+                </a:solidFill>
+                <a:latin typeface="Calibri" pitchFamily="34" charset="0"/>
+                <a:ea typeface="Calibri" pitchFamily="34" charset="-122"/>
+                <a:cs typeface="Calibri" pitchFamily="34" charset="-120"/>
+              </a:rPr>
+              <a:t>3-agent LLM + deterministic hybrid</a:t>
+            </a:r>
+            <a:endParaRPr lang="en-US" sz="1200" dirty="0"/>
+          </a:p>
+        </p:txBody>
+      </p:sp>
+      <p:sp>
+        <p:nvSpPr>
+          <p:cNvPr id="15" name="Shape 10"/>
+          <p:cNvSpPr/>
+          <p:nvPr/>
+        </p:nvSpPr>
+        <p:spPr>
+          <a:xfrm>
+            <a:off x="6035040" y="2432304"/>
+            <a:ext cx="2834640" cy="713232"/>
+          </a:xfrm>
+          <a:prstGeom prst="roundRect">
+            <a:avLst>
+              <a:gd name="adj" fmla="val 12821"/>
+            </a:avLst>
+          </a:prstGeom>
+          <a:solidFill>
+            <a:srgbClr val="FFFFFF">
+              <a:alpha val="10000"/>
+            </a:srgbClr>
+          </a:solidFill>
+          <a:ln/>
+        </p:spPr>
+        <p:txBody>
+          <a:bodyPr/>
+          <a:lstStyle/>
+          <a:p>
+            <a:endParaRPr lang="en-US"/>
+          </a:p>
+        </p:txBody>
+      </p:sp>
+      <p:pic>
+        <p:nvPicPr>
+          <p:cNvPr id="16" name="Image 3" descr="preencoded.png"/>
+          <p:cNvPicPr>
+            <a:picLocks noChangeAspect="1"/>
+          </p:cNvPicPr>
+          <p:nvPr/>
+        </p:nvPicPr>
+        <p:blipFill>
+          <a:blip r:embed="rId7"/>
+          <a:stretch>
+            <a:fillRect/>
+          </a:stretch>
+        </p:blipFill>
+        <p:spPr>
+          <a:xfrm>
+            <a:off x="6144768" y="2587752"/>
+            <a:ext cx="365760" cy="365760"/>
+          </a:xfrm>
+          <a:prstGeom prst="rect">
+            <a:avLst/>
+          </a:prstGeom>
+        </p:spPr>
+      </p:pic>
+      <p:sp>
+        <p:nvSpPr>
+          <p:cNvPr id="17" name="Text 11"/>
+          <p:cNvSpPr/>
+          <p:nvPr/>
+        </p:nvSpPr>
+        <p:spPr>
+          <a:xfrm>
+            <a:off x="6601968" y="2596896"/>
+            <a:ext cx="2157984" cy="384048"/>
+          </a:xfrm>
+          <a:prstGeom prst="rect">
+            <a:avLst/>
+          </a:prstGeom>
+          <a:noFill/>
+          <a:ln/>
+        </p:spPr>
+        <p:txBody>
+          <a:bodyPr wrap="square" lIns="0" tIns="0" rIns="0" bIns="0" rtlCol="0" anchor="ctr"/>
+          <a:lstStyle/>
+          <a:p>
+            <a:pPr marL="0" indent="0">
+              <a:lnSpc>
+                <a:spcPct val="115000"/>
+              </a:lnSpc>
+              <a:buNone/>
+            </a:pPr>
+            <a:r>
+              <a:rPr lang="en-US" sz="1200" dirty="0">
+                <a:solidFill>
+                  <a:srgbClr val="FFFFFF"/>
+                </a:solidFill>
+                <a:latin typeface="Calibri" pitchFamily="34" charset="0"/>
+                <a:ea typeface="Calibri" pitchFamily="34" charset="-122"/>
+                <a:cs typeface="Calibri" pitchFamily="34" charset="-120"/>
+              </a:rPr>
+              <a:t>Policy-to-rule engine for CMS NCD/LCD</a:t>
+            </a:r>
+            <a:endParaRPr lang="en-US" sz="1200" dirty="0"/>
+          </a:p>
+        </p:txBody>
+      </p:sp>
+      <p:sp>
+        <p:nvSpPr>
+          <p:cNvPr id="18" name="Shape 12"/>
+          <p:cNvSpPr/>
+          <p:nvPr/>
+        </p:nvSpPr>
+        <p:spPr>
+          <a:xfrm>
+            <a:off x="6035040" y="3319272"/>
+            <a:ext cx="2834640" cy="713232"/>
+          </a:xfrm>
+          <a:prstGeom prst="roundRect">
+            <a:avLst>
+              <a:gd name="adj" fmla="val 12821"/>
+            </a:avLst>
+          </a:prstGeom>
+          <a:solidFill>
+            <a:srgbClr val="FFFFFF">
+              <a:alpha val="10000"/>
+            </a:srgbClr>
+          </a:solidFill>
+          <a:ln/>
+        </p:spPr>
+        <p:txBody>
+          <a:bodyPr/>
+          <a:lstStyle/>
+          <a:p>
+            <a:endParaRPr lang="en-US"/>
+          </a:p>
+        </p:txBody>
+      </p:sp>
+      <p:pic>
+        <p:nvPicPr>
+          <p:cNvPr id="19" name="Image 4" descr="preencoded.png"/>
+          <p:cNvPicPr>
+            <a:picLocks noChangeAspect="1"/>
+          </p:cNvPicPr>
+          <p:nvPr/>
+        </p:nvPicPr>
+        <p:blipFill>
+          <a:blip r:embed="rId8"/>
+          <a:stretch>
+            <a:fillRect/>
+          </a:stretch>
+        </p:blipFill>
+        <p:spPr>
+          <a:xfrm>
+            <a:off x="6144768" y="3474720"/>
+            <a:ext cx="365760" cy="365760"/>
+          </a:xfrm>
+          <a:prstGeom prst="rect">
+            <a:avLst/>
+          </a:prstGeom>
+        </p:spPr>
+      </p:pic>
+      <p:sp>
+        <p:nvSpPr>
+          <p:cNvPr id="20" name="Text 13"/>
+          <p:cNvSpPr/>
+          <p:nvPr/>
+        </p:nvSpPr>
+        <p:spPr>
+          <a:xfrm>
+            <a:off x="6601968" y="3483864"/>
+            <a:ext cx="2157984" cy="384048"/>
+          </a:xfrm>
+          <a:prstGeom prst="rect">
+            <a:avLst/>
+          </a:prstGeom>
+          <a:noFill/>
+          <a:ln/>
+        </p:spPr>
+        <p:txBody>
+          <a:bodyPr wrap="square" lIns="0" tIns="0" rIns="0" bIns="0" rtlCol="0" anchor="ctr"/>
+          <a:lstStyle/>
+          <a:p>
+            <a:pPr marL="0" indent="0">
+              <a:lnSpc>
+                <a:spcPct val="115000"/>
+              </a:lnSpc>
+              <a:buNone/>
+            </a:pPr>
+            <a:r>
+              <a:rPr lang="en-US" sz="1200" dirty="0">
+                <a:solidFill>
+                  <a:srgbClr val="FFFFFF"/>
+                </a:solidFill>
+                <a:latin typeface="Calibri" pitchFamily="34" charset="0"/>
+                <a:ea typeface="Calibri" pitchFamily="34" charset="-122"/>
+                <a:cs typeface="Calibri" pitchFamily="34" charset="-120"/>
+              </a:rPr>
+              <a:t>Human-in-the-loop governance built in</a:t>
+            </a:r>
+            <a:endParaRPr lang="en-US" sz="1200" dirty="0"/>
+          </a:p>
+        </p:txBody>
+      </p:sp>
+      <p:sp>
+        <p:nvSpPr>
+          <p:cNvPr id="21" name="Shape 14"/>
+          <p:cNvSpPr/>
+          <p:nvPr/>
+        </p:nvSpPr>
+        <p:spPr>
+          <a:xfrm>
+            <a:off x="6035040" y="4206240"/>
+            <a:ext cx="2834640" cy="713232"/>
+          </a:xfrm>
+          <a:prstGeom prst="roundRect">
+            <a:avLst>
+              <a:gd name="adj" fmla="val 12821"/>
+            </a:avLst>
+          </a:prstGeom>
+          <a:solidFill>
+            <a:srgbClr val="FFFFFF">
+              <a:alpha val="10000"/>
+            </a:srgbClr>
+          </a:solidFill>
+          <a:ln/>
+        </p:spPr>
+        <p:txBody>
+          <a:bodyPr/>
+          <a:lstStyle/>
+          <a:p>
+            <a:endParaRPr lang="en-US"/>
+          </a:p>
+        </p:txBody>
+      </p:sp>
+      <p:pic>
+        <p:nvPicPr>
+          <p:cNvPr id="22" name="Image 5" descr="preencoded.png"/>
+          <p:cNvPicPr>
+            <a:picLocks noChangeAspect="1"/>
+          </p:cNvPicPr>
+          <p:nvPr/>
+        </p:nvPicPr>
+        <p:blipFill>
+          <a:blip r:embed="rId9"/>
+          <a:stretch>
+            <a:fillRect/>
+          </a:stretch>
+        </p:blipFill>
+        <p:spPr>
+          <a:xfrm>
             <a:off x="6144768" y="4361688"/>
             <a:ext cx="365760" cy="365760"/>
           </a:xfrm>
@@ -3037,7 +2903,7 @@
           <a:bodyPr wrap="square" lIns="0" tIns="0" rIns="0" bIns="0" rtlCol="0" anchor="ctr"/>
           <a:lstStyle/>
           <a:p>
-            <a:pPr indent="0" marL="0">
+            <a:pPr marL="0" indent="0">
               <a:lnSpc>
                 <a:spcPct val="115000"/>
               </a:lnSpc>
@@ -3074,6 +2940,7 @@
         <a:solidFill>
           <a:srgbClr val="F8F5FF"/>
         </a:solidFill>
+        <a:effectLst/>
       </p:bgPr>
     </p:bg>
     <p:spTree>
@@ -3111,7 +2978,7 @@
           <a:bodyPr wrap="square" lIns="0" tIns="0" rIns="0" bIns="0" rtlCol="0" anchor="ctr"/>
           <a:lstStyle/>
           <a:p>
-            <a:pPr indent="0" marL="0">
+            <a:pPr marL="0" indent="0">
               <a:buNone/>
             </a:pPr>
             <a:r>
@@ -3150,7 +3017,7 @@
           <a:bodyPr wrap="square" lIns="0" tIns="0" rIns="0" bIns="0" rtlCol="0" anchor="ctr"/>
           <a:lstStyle/>
           <a:p>
-            <a:pPr indent="0" marL="0">
+            <a:pPr marL="0" indent="0">
               <a:buNone/>
             </a:pPr>
             <a:r>
@@ -3189,13 +3056,20 @@
           </a:solidFill>
           <a:ln/>
           <a:effectLst>
-            <a:outerShdw sx="100000" sy="100000" kx="0" ky="0" algn="bl" rotWithShape="0" blurRad="101600" dist="38100" dir="2700000">
+            <a:outerShdw blurRad="101600" dist="38100" dir="2700000" algn="bl" rotWithShape="0">
               <a:srgbClr val="000000">
                 <a:alpha val="12000"/>
               </a:srgbClr>
             </a:outerShdw>
           </a:effectLst>
         </p:spPr>
+        <p:txBody>
+          <a:bodyPr/>
+          <a:lstStyle/>
+          <a:p>
+            <a:endParaRPr lang="en-US"/>
+          </a:p>
+        </p:txBody>
       </p:sp>
       <p:sp>
         <p:nvSpPr>
@@ -3216,398 +3090,17 @@
           </a:solidFill>
           <a:ln/>
         </p:spPr>
+        <p:txBody>
+          <a:bodyPr/>
+          <a:lstStyle/>
+          <a:p>
+            <a:endParaRPr lang="en-US"/>
+          </a:p>
+        </p:txBody>
       </p:sp>
       <p:pic>
         <p:nvPicPr>
-          <p:cNvPr id="6" name="Image 0" descr="preencoded.png">    </p:cNvPr>
-          <p:cNvPicPr>
-            <a:picLocks noChangeAspect="1"/>
-          </p:cNvPicPr>
-          <p:nvPr/>
-        </p:nvPicPr>
-        <p:blipFill>
-          <a:blip r:embed="rId1"/>
-          <a:stretch>
-            <a:fillRect/>
-          </a:stretch>
-        </p:blipFill>
-        <p:spPr>
-          <a:xfrm>
-            <a:off x="1444752" y="1581912"/>
-            <a:ext cx="448056" cy="448056"/>
-          </a:xfrm>
-          <a:prstGeom prst="rect">
-            <a:avLst/>
-          </a:prstGeom>
-        </p:spPr>
-      </p:pic>
-      <p:sp>
-        <p:nvSpPr>
-          <p:cNvPr id="7" name="Text 4"/>
-          <p:cNvSpPr/>
-          <p:nvPr/>
-        </p:nvSpPr>
-        <p:spPr>
-          <a:xfrm>
-            <a:off x="493776" y="2231136"/>
-            <a:ext cx="2359152" cy="457200"/>
-          </a:xfrm>
-          <a:prstGeom prst="rect">
-            <a:avLst/>
-          </a:prstGeom>
-          <a:noFill/>
-          <a:ln/>
-        </p:spPr>
-        <p:txBody>
-          <a:bodyPr wrap="square" lIns="0" tIns="0" rIns="0" bIns="0" rtlCol="0" anchor="ctr"/>
-          <a:lstStyle/>
-          <a:p>
-            <a:pPr algn="ctr" indent="0" marL="0">
-              <a:buNone/>
-            </a:pPr>
-            <a:r>
-              <a:rPr lang="en-US" sz="1400" b="1" dirty="0">
-                <a:solidFill>
-                  <a:srgbClr val="1A0533"/>
-                </a:solidFill>
-                <a:latin typeface="Calibri" pitchFamily="34" charset="0"/>
-                <a:ea typeface="Calibri" pitchFamily="34" charset="-122"/>
-                <a:cs typeface="Calibri" pitchFamily="34" charset="-120"/>
-              </a:rPr>
-              <a:t>Scale of the Problem</a:t>
-            </a:r>
-            <a:endParaRPr lang="en-US" sz="1400" dirty="0"/>
-          </a:p>
-        </p:txBody>
-      </p:sp>
-      <p:sp>
-        <p:nvSpPr>
-          <p:cNvPr id="8" name="Text 5"/>
-          <p:cNvSpPr/>
-          <p:nvPr/>
-        </p:nvSpPr>
-        <p:spPr>
-          <a:xfrm>
-            <a:off x="493776" y="2761488"/>
-            <a:ext cx="2359152" cy="1719072"/>
-          </a:xfrm>
-          <a:prstGeom prst="rect">
-            <a:avLst/>
-          </a:prstGeom>
-          <a:noFill/>
-          <a:ln/>
-        </p:spPr>
-        <p:txBody>
-          <a:bodyPr wrap="square" lIns="0" tIns="0" rIns="0" bIns="0" rtlCol="0" anchor="ctr"/>
-          <a:lstStyle/>
-          <a:p>
-            <a:pPr algn="ctr" indent="0" marL="0">
-              <a:lnSpc>
-                <a:spcPct val="130000"/>
-              </a:lnSpc>
-              <a:buNone/>
-            </a:pPr>
-            <a:r>
-              <a:rPr lang="en-US" sz="1250" dirty="0">
-                <a:solidFill>
-                  <a:srgbClr val="6B7280"/>
-                </a:solidFill>
-                <a:latin typeface="Calibri" pitchFamily="34" charset="0"/>
-                <a:ea typeface="Calibri" pitchFamily="34" charset="-122"/>
-                <a:cs typeface="Calibri" pitchFamily="34" charset="-120"/>
-              </a:rPr>
-              <a:t>$16.6B in confirmed healthcare</a:t>
-            </a:r>
-            <a:endParaRPr lang="en-US" sz="1250" dirty="0"/>
-          </a:p>
-          <a:p>
-            <a:pPr algn="ctr" indent="0" marL="0">
-              <a:lnSpc>
-                <a:spcPct val="130000"/>
-              </a:lnSpc>
-              <a:buNone/>
-            </a:pPr>
-            <a:r>
-              <a:rPr lang="en-US" sz="1250" dirty="0">
-                <a:solidFill>
-                  <a:srgbClr val="6B7280"/>
-                </a:solidFill>
-                <a:latin typeface="Calibri" pitchFamily="34" charset="0"/>
-                <a:ea typeface="Calibri" pitchFamily="34" charset="-122"/>
-                <a:cs typeface="Calibri" pitchFamily="34" charset="-120"/>
-              </a:rPr>
-              <a:t>fraud and improper payments</a:t>
-            </a:r>
-            <a:endParaRPr lang="en-US" sz="1250" dirty="0"/>
-          </a:p>
-          <a:p>
-            <a:pPr algn="ctr" indent="0" marL="0">
-              <a:lnSpc>
-                <a:spcPct val="130000"/>
-              </a:lnSpc>
-              <a:buNone/>
-            </a:pPr>
-            <a:r>
-              <a:rPr lang="en-US" sz="1250" dirty="0">
-                <a:solidFill>
-                  <a:srgbClr val="6B7280"/>
-                </a:solidFill>
-                <a:latin typeface="Calibri" pitchFamily="34" charset="0"/>
-                <a:ea typeface="Calibri" pitchFamily="34" charset="-122"/>
-                <a:cs typeface="Calibri" pitchFamily="34" charset="-120"/>
-              </a:rPr>
-              <a:t>reported by HHS OIG in 2025</a:t>
-            </a:r>
-            <a:endParaRPr lang="en-US" sz="1250" dirty="0"/>
-          </a:p>
-        </p:txBody>
-      </p:sp>
-      <p:sp>
-        <p:nvSpPr>
-          <p:cNvPr id="9" name="Shape 6"/>
-          <p:cNvSpPr/>
-          <p:nvPr/>
-        </p:nvSpPr>
-        <p:spPr>
-          <a:xfrm>
-            <a:off x="3218688" y="1325880"/>
-            <a:ext cx="2578608" cy="3401568"/>
-          </a:xfrm>
-          <a:prstGeom prst="roundRect">
-            <a:avLst>
-              <a:gd name="adj" fmla="val 4965"/>
-            </a:avLst>
-          </a:prstGeom>
-          <a:solidFill>
-            <a:srgbClr val="FFFFFF"/>
-          </a:solidFill>
-          <a:ln/>
-          <a:effectLst>
-            <a:outerShdw sx="100000" sy="100000" kx="0" ky="0" algn="bl" rotWithShape="0" blurRad="101600" dist="38100" dir="2700000">
-              <a:srgbClr val="000000">
-                <a:alpha val="12000"/>
-              </a:srgbClr>
-            </a:outerShdw>
-          </a:effectLst>
-        </p:spPr>
-      </p:sp>
-      <p:sp>
-        <p:nvSpPr>
-          <p:cNvPr id="10" name="Shape 7"/>
-          <p:cNvSpPr/>
-          <p:nvPr/>
-        </p:nvSpPr>
-        <p:spPr>
-          <a:xfrm>
-            <a:off x="4206240" y="1508760"/>
-            <a:ext cx="594360" cy="594360"/>
-          </a:xfrm>
-          <a:prstGeom prst="ellipse">
-            <a:avLst/>
-          </a:prstGeom>
-          <a:solidFill>
-            <a:srgbClr val="F59E0B"/>
-          </a:solidFill>
-          <a:ln/>
-        </p:spPr>
-      </p:sp>
-      <p:pic>
-        <p:nvPicPr>
-          <p:cNvPr id="11" name="Image 1" descr="preencoded.png">    </p:cNvPr>
-          <p:cNvPicPr>
-            <a:picLocks noChangeAspect="1"/>
-          </p:cNvPicPr>
-          <p:nvPr/>
-        </p:nvPicPr>
-        <p:blipFill>
-          <a:blip r:embed="rId2"/>
-          <a:stretch>
-            <a:fillRect/>
-          </a:stretch>
-        </p:blipFill>
-        <p:spPr>
-          <a:xfrm>
-            <a:off x="4279392" y="1581912"/>
-            <a:ext cx="448056" cy="448056"/>
-          </a:xfrm>
-          <a:prstGeom prst="rect">
-            <a:avLst/>
-          </a:prstGeom>
-        </p:spPr>
-      </p:pic>
-      <p:sp>
-        <p:nvSpPr>
-          <p:cNvPr id="12" name="Text 8"/>
-          <p:cNvSpPr/>
-          <p:nvPr/>
-        </p:nvSpPr>
-        <p:spPr>
-          <a:xfrm>
-            <a:off x="3328416" y="2231136"/>
-            <a:ext cx="2359152" cy="457200"/>
-          </a:xfrm>
-          <a:prstGeom prst="rect">
-            <a:avLst/>
-          </a:prstGeom>
-          <a:noFill/>
-          <a:ln/>
-        </p:spPr>
-        <p:txBody>
-          <a:bodyPr wrap="square" lIns="0" tIns="0" rIns="0" bIns="0" rtlCol="0" anchor="ctr"/>
-          <a:lstStyle/>
-          <a:p>
-            <a:pPr algn="ctr" indent="0" marL="0">
-              <a:buNone/>
-            </a:pPr>
-            <a:r>
-              <a:rPr lang="en-US" sz="1400" b="1" dirty="0">
-                <a:solidFill>
-                  <a:srgbClr val="1A0533"/>
-                </a:solidFill>
-                <a:latin typeface="Calibri" pitchFamily="34" charset="0"/>
-                <a:ea typeface="Calibri" pitchFamily="34" charset="-122"/>
-                <a:cs typeface="Calibri" pitchFamily="34" charset="-120"/>
-              </a:rPr>
-              <a:t>Traditional Tools Fail</a:t>
-            </a:r>
-            <a:endParaRPr lang="en-US" sz="1400" dirty="0"/>
-          </a:p>
-        </p:txBody>
-      </p:sp>
-      <p:sp>
-        <p:nvSpPr>
-          <p:cNvPr id="13" name="Text 9"/>
-          <p:cNvSpPr/>
-          <p:nvPr/>
-        </p:nvSpPr>
-        <p:spPr>
-          <a:xfrm>
-            <a:off x="3328416" y="2761488"/>
-            <a:ext cx="2359152" cy="1719072"/>
-          </a:xfrm>
-          <a:prstGeom prst="rect">
-            <a:avLst/>
-          </a:prstGeom>
-          <a:noFill/>
-          <a:ln/>
-        </p:spPr>
-        <p:txBody>
-          <a:bodyPr wrap="square" lIns="0" tIns="0" rIns="0" bIns="0" rtlCol="0" anchor="ctr"/>
-          <a:lstStyle/>
-          <a:p>
-            <a:pPr algn="ctr" indent="0" marL="0">
-              <a:lnSpc>
-                <a:spcPct val="130000"/>
-              </a:lnSpc>
-              <a:buNone/>
-            </a:pPr>
-            <a:r>
-              <a:rPr lang="en-US" sz="1250" dirty="0">
-                <a:solidFill>
-                  <a:srgbClr val="6B7280"/>
-                </a:solidFill>
-                <a:latin typeface="Calibri" pitchFamily="34" charset="0"/>
-                <a:ea typeface="Calibri" pitchFamily="34" charset="-122"/>
-                <a:cs typeface="Calibri" pitchFamily="34" charset="-120"/>
-              </a:rPr>
-              <a:t>Static rule engines catch only</a:t>
-            </a:r>
-            <a:endParaRPr lang="en-US" sz="1250" dirty="0"/>
-          </a:p>
-          <a:p>
-            <a:pPr algn="ctr" indent="0" marL="0">
-              <a:lnSpc>
-                <a:spcPct val="130000"/>
-              </a:lnSpc>
-              <a:buNone/>
-            </a:pPr>
-            <a:r>
-              <a:rPr lang="en-US" sz="1250" dirty="0">
-                <a:solidFill>
-                  <a:srgbClr val="6B7280"/>
-                </a:solidFill>
-                <a:latin typeface="Calibri" pitchFamily="34" charset="0"/>
-                <a:ea typeface="Calibri" pitchFamily="34" charset="-122"/>
-                <a:cs typeface="Calibri" pitchFamily="34" charset="-120"/>
-              </a:rPr>
-              <a:t>known billing patterns. Novel</a:t>
-            </a:r>
-            <a:endParaRPr lang="en-US" sz="1250" dirty="0"/>
-          </a:p>
-          <a:p>
-            <a:pPr algn="ctr" indent="0" marL="0">
-              <a:lnSpc>
-                <a:spcPct val="130000"/>
-              </a:lnSpc>
-              <a:buNone/>
-            </a:pPr>
-            <a:r>
-              <a:rPr lang="en-US" sz="1250" dirty="0">
-                <a:solidFill>
-                  <a:srgbClr val="6B7280"/>
-                </a:solidFill>
-                <a:latin typeface="Calibri" pitchFamily="34" charset="0"/>
-                <a:ea typeface="Calibri" pitchFamily="34" charset="-122"/>
-                <a:cs typeface="Calibri" pitchFamily="34" charset="-120"/>
-              </a:rPr>
-              <a:t>schemes evolve faster than rules.</a:t>
-            </a:r>
-            <a:endParaRPr lang="en-US" sz="1250" dirty="0"/>
-          </a:p>
-        </p:txBody>
-      </p:sp>
-      <p:sp>
-        <p:nvSpPr>
-          <p:cNvPr id="14" name="Shape 10"/>
-          <p:cNvSpPr/>
-          <p:nvPr/>
-        </p:nvSpPr>
-        <p:spPr>
-          <a:xfrm>
-            <a:off x="6053328" y="1325880"/>
-            <a:ext cx="2578608" cy="3401568"/>
-          </a:xfrm>
-          <a:prstGeom prst="roundRect">
-            <a:avLst>
-              <a:gd name="adj" fmla="val 4965"/>
-            </a:avLst>
-          </a:prstGeom>
-          <a:solidFill>
-            <a:srgbClr val="FFFFFF"/>
-          </a:solidFill>
-          <a:ln/>
-          <a:effectLst>
-            <a:outerShdw sx="100000" sy="100000" kx="0" ky="0" algn="bl" rotWithShape="0" blurRad="101600" dist="38100" dir="2700000">
-              <a:srgbClr val="000000">
-                <a:alpha val="12000"/>
-              </a:srgbClr>
-            </a:outerShdw>
-          </a:effectLst>
-        </p:spPr>
-      </p:sp>
-      <p:sp>
-        <p:nvSpPr>
-          <p:cNvPr id="15" name="Shape 11"/>
-          <p:cNvSpPr/>
-          <p:nvPr/>
-        </p:nvSpPr>
-        <p:spPr>
-          <a:xfrm>
-            <a:off x="7040880" y="1508760"/>
-            <a:ext cx="594360" cy="594360"/>
-          </a:xfrm>
-          <a:prstGeom prst="ellipse">
-            <a:avLst/>
-          </a:prstGeom>
-          <a:solidFill>
-            <a:srgbClr val="4A0080"/>
-          </a:solidFill>
-          <a:ln/>
-        </p:spPr>
-      </p:sp>
-      <p:pic>
-        <p:nvPicPr>
-          <p:cNvPr id="16" name="Image 2" descr="preencoded.png">    </p:cNvPr>
+          <p:cNvPr id="6" name="Image 0" descr="preencoded.png"/>
           <p:cNvPicPr>
             <a:picLocks noChangeAspect="1"/>
           </p:cNvPicPr>
@@ -3621,7 +3114,7 @@
         </p:blipFill>
         <p:spPr>
           <a:xfrm>
-            <a:off x="7114032" y="1581912"/>
+            <a:off x="1444752" y="1581912"/>
             <a:ext cx="448056" cy="448056"/>
           </a:xfrm>
           <a:prstGeom prst="rect">
@@ -3631,13 +3124,13 @@
       </p:pic>
       <p:sp>
         <p:nvSpPr>
-          <p:cNvPr id="17" name="Text 12"/>
-          <p:cNvSpPr/>
-          <p:nvPr/>
-        </p:nvSpPr>
-        <p:spPr>
-          <a:xfrm>
-            <a:off x="6163056" y="2231136"/>
+          <p:cNvPr id="7" name="Text 4"/>
+          <p:cNvSpPr/>
+          <p:nvPr/>
+        </p:nvSpPr>
+        <p:spPr>
+          <a:xfrm>
+            <a:off x="493776" y="2231136"/>
             <a:ext cx="2359152" cy="457200"/>
           </a:xfrm>
           <a:prstGeom prst="rect">
@@ -3650,7 +3143,7 @@
           <a:bodyPr wrap="square" lIns="0" tIns="0" rIns="0" bIns="0" rtlCol="0" anchor="ctr"/>
           <a:lstStyle/>
           <a:p>
-            <a:pPr algn="ctr" indent="0" marL="0">
+            <a:pPr marL="0" indent="0" algn="ctr">
               <a:buNone/>
             </a:pPr>
             <a:r>
@@ -3662,7 +3155,7 @@
                 <a:ea typeface="Calibri" pitchFamily="34" charset="-122"/>
                 <a:cs typeface="Calibri" pitchFamily="34" charset="-120"/>
               </a:rPr>
-              <a:t>No Explainable Rationale</a:t>
+              <a:t>Scale of the Problem</a:t>
             </a:r>
             <a:endParaRPr lang="en-US" sz="1400" dirty="0"/>
           </a:p>
@@ -3670,13 +3163,13 @@
       </p:sp>
       <p:sp>
         <p:nvSpPr>
-          <p:cNvPr id="18" name="Text 13"/>
-          <p:cNvSpPr/>
-          <p:nvPr/>
-        </p:nvSpPr>
-        <p:spPr>
-          <a:xfrm>
-            <a:off x="6163056" y="2761488"/>
+          <p:cNvPr id="8" name="Text 5"/>
+          <p:cNvSpPr/>
+          <p:nvPr/>
+        </p:nvSpPr>
+        <p:spPr>
+          <a:xfrm>
+            <a:off x="493776" y="2761488"/>
             <a:ext cx="2359152" cy="1719072"/>
           </a:xfrm>
           <a:prstGeom prst="rect">
@@ -3689,7 +3182,7 @@
           <a:bodyPr wrap="square" lIns="0" tIns="0" rIns="0" bIns="0" rtlCol="0" anchor="ctr"/>
           <a:lstStyle/>
           <a:p>
-            <a:pPr algn="ctr" indent="0" marL="0">
+            <a:pPr marL="0" indent="0" algn="ctr">
               <a:lnSpc>
                 <a:spcPct val="130000"/>
               </a:lnSpc>
@@ -3704,12 +3197,12 @@
                 <a:ea typeface="Calibri" pitchFamily="34" charset="-122"/>
                 <a:cs typeface="Calibri" pitchFamily="34" charset="-120"/>
               </a:rPr>
-              <a:t>Black-box risk scores cannot</a:t>
+              <a:t>$16.6B in confirmed healthcare</a:t>
             </a:r>
             <a:endParaRPr lang="en-US" sz="1250" dirty="0"/>
           </a:p>
           <a:p>
-            <a:pPr algn="ctr" indent="0" marL="0">
+            <a:pPr marL="0" indent="0" algn="ctr">
               <a:lnSpc>
                 <a:spcPct val="130000"/>
               </a:lnSpc>
@@ -3724,12 +3217,12 @@
                 <a:ea typeface="Calibri" pitchFamily="34" charset="-122"/>
                 <a:cs typeface="Calibri" pitchFamily="34" charset="-120"/>
               </a:rPr>
-              <a:t>support provider disputes or</a:t>
+              <a:t>fraud and improper payments</a:t>
             </a:r>
             <a:endParaRPr lang="en-US" sz="1250" dirty="0"/>
           </a:p>
           <a:p>
-            <a:pPr algn="ctr" indent="0" marL="0">
+            <a:pPr marL="0" indent="0" algn="ctr">
               <a:lnSpc>
                 <a:spcPct val="130000"/>
               </a:lnSpc>
@@ -3744,12 +3237,428 @@
                 <a:ea typeface="Calibri" pitchFamily="34" charset="-122"/>
                 <a:cs typeface="Calibri" pitchFamily="34" charset="-120"/>
               </a:rPr>
+              <a:t>reported by HHS OIG in 2025</a:t>
+            </a:r>
+            <a:endParaRPr lang="en-US" sz="1250" dirty="0"/>
+          </a:p>
+        </p:txBody>
+      </p:sp>
+      <p:sp>
+        <p:nvSpPr>
+          <p:cNvPr id="9" name="Shape 6"/>
+          <p:cNvSpPr/>
+          <p:nvPr/>
+        </p:nvSpPr>
+        <p:spPr>
+          <a:xfrm>
+            <a:off x="3218688" y="1325880"/>
+            <a:ext cx="2578608" cy="3401568"/>
+          </a:xfrm>
+          <a:prstGeom prst="roundRect">
+            <a:avLst>
+              <a:gd name="adj" fmla="val 4965"/>
+            </a:avLst>
+          </a:prstGeom>
+          <a:solidFill>
+            <a:srgbClr val="FFFFFF"/>
+          </a:solidFill>
+          <a:ln/>
+          <a:effectLst>
+            <a:outerShdw blurRad="101600" dist="38100" dir="2700000" algn="bl" rotWithShape="0">
+              <a:srgbClr val="000000">
+                <a:alpha val="12000"/>
+              </a:srgbClr>
+            </a:outerShdw>
+          </a:effectLst>
+        </p:spPr>
+        <p:txBody>
+          <a:bodyPr/>
+          <a:lstStyle/>
+          <a:p>
+            <a:endParaRPr lang="en-US"/>
+          </a:p>
+        </p:txBody>
+      </p:sp>
+      <p:sp>
+        <p:nvSpPr>
+          <p:cNvPr id="10" name="Shape 7"/>
+          <p:cNvSpPr/>
+          <p:nvPr/>
+        </p:nvSpPr>
+        <p:spPr>
+          <a:xfrm>
+            <a:off x="4206240" y="1508760"/>
+            <a:ext cx="594360" cy="594360"/>
+          </a:xfrm>
+          <a:prstGeom prst="ellipse">
+            <a:avLst/>
+          </a:prstGeom>
+          <a:solidFill>
+            <a:srgbClr val="F59E0B"/>
+          </a:solidFill>
+          <a:ln/>
+        </p:spPr>
+        <p:txBody>
+          <a:bodyPr/>
+          <a:lstStyle/>
+          <a:p>
+            <a:endParaRPr lang="en-US"/>
+          </a:p>
+        </p:txBody>
+      </p:sp>
+      <p:pic>
+        <p:nvPicPr>
+          <p:cNvPr id="11" name="Image 1" descr="preencoded.png"/>
+          <p:cNvPicPr>
+            <a:picLocks noChangeAspect="1"/>
+          </p:cNvPicPr>
+          <p:nvPr/>
+        </p:nvPicPr>
+        <p:blipFill>
+          <a:blip r:embed="rId4"/>
+          <a:stretch>
+            <a:fillRect/>
+          </a:stretch>
+        </p:blipFill>
+        <p:spPr>
+          <a:xfrm>
+            <a:off x="4279392" y="1581912"/>
+            <a:ext cx="448056" cy="448056"/>
+          </a:xfrm>
+          <a:prstGeom prst="rect">
+            <a:avLst/>
+          </a:prstGeom>
+        </p:spPr>
+      </p:pic>
+      <p:sp>
+        <p:nvSpPr>
+          <p:cNvPr id="12" name="Text 8"/>
+          <p:cNvSpPr/>
+          <p:nvPr/>
+        </p:nvSpPr>
+        <p:spPr>
+          <a:xfrm>
+            <a:off x="3328416" y="2231136"/>
+            <a:ext cx="2359152" cy="457200"/>
+          </a:xfrm>
+          <a:prstGeom prst="rect">
+            <a:avLst/>
+          </a:prstGeom>
+          <a:noFill/>
+          <a:ln/>
+        </p:spPr>
+        <p:txBody>
+          <a:bodyPr wrap="square" lIns="0" tIns="0" rIns="0" bIns="0" rtlCol="0" anchor="ctr"/>
+          <a:lstStyle/>
+          <a:p>
+            <a:pPr marL="0" indent="0" algn="ctr">
+              <a:buNone/>
+            </a:pPr>
+            <a:r>
+              <a:rPr lang="en-US" sz="1400" b="1" dirty="0">
+                <a:solidFill>
+                  <a:srgbClr val="1A0533"/>
+                </a:solidFill>
+                <a:latin typeface="Calibri" pitchFamily="34" charset="0"/>
+                <a:ea typeface="Calibri" pitchFamily="34" charset="-122"/>
+                <a:cs typeface="Calibri" pitchFamily="34" charset="-120"/>
+              </a:rPr>
+              <a:t>Traditional Tools Fail</a:t>
+            </a:r>
+            <a:endParaRPr lang="en-US" sz="1400" dirty="0"/>
+          </a:p>
+        </p:txBody>
+      </p:sp>
+      <p:sp>
+        <p:nvSpPr>
+          <p:cNvPr id="13" name="Text 9"/>
+          <p:cNvSpPr/>
+          <p:nvPr/>
+        </p:nvSpPr>
+        <p:spPr>
+          <a:xfrm>
+            <a:off x="3328416" y="2761488"/>
+            <a:ext cx="2359152" cy="1719072"/>
+          </a:xfrm>
+          <a:prstGeom prst="rect">
+            <a:avLst/>
+          </a:prstGeom>
+          <a:noFill/>
+          <a:ln/>
+        </p:spPr>
+        <p:txBody>
+          <a:bodyPr wrap="square" lIns="0" tIns="0" rIns="0" bIns="0" rtlCol="0" anchor="ctr"/>
+          <a:lstStyle/>
+          <a:p>
+            <a:pPr marL="0" indent="0" algn="ctr">
+              <a:lnSpc>
+                <a:spcPct val="130000"/>
+              </a:lnSpc>
+              <a:buNone/>
+            </a:pPr>
+            <a:r>
+              <a:rPr lang="en-US" sz="1250" dirty="0">
+                <a:solidFill>
+                  <a:srgbClr val="6B7280"/>
+                </a:solidFill>
+                <a:latin typeface="Calibri" pitchFamily="34" charset="0"/>
+                <a:ea typeface="Calibri" pitchFamily="34" charset="-122"/>
+                <a:cs typeface="Calibri" pitchFamily="34" charset="-120"/>
+              </a:rPr>
+              <a:t>Static rule engines catch only</a:t>
+            </a:r>
+            <a:endParaRPr lang="en-US" sz="1250" dirty="0"/>
+          </a:p>
+          <a:p>
+            <a:pPr marL="0" indent="0" algn="ctr">
+              <a:lnSpc>
+                <a:spcPct val="130000"/>
+              </a:lnSpc>
+              <a:buNone/>
+            </a:pPr>
+            <a:r>
+              <a:rPr lang="en-US" sz="1250" dirty="0">
+                <a:solidFill>
+                  <a:srgbClr val="6B7280"/>
+                </a:solidFill>
+                <a:latin typeface="Calibri" pitchFamily="34" charset="0"/>
+                <a:ea typeface="Calibri" pitchFamily="34" charset="-122"/>
+                <a:cs typeface="Calibri" pitchFamily="34" charset="-120"/>
+              </a:rPr>
+              <a:t>known billing patterns. Novel</a:t>
+            </a:r>
+            <a:endParaRPr lang="en-US" sz="1250" dirty="0"/>
+          </a:p>
+          <a:p>
+            <a:pPr marL="0" indent="0" algn="ctr">
+              <a:lnSpc>
+                <a:spcPct val="130000"/>
+              </a:lnSpc>
+              <a:buNone/>
+            </a:pPr>
+            <a:r>
+              <a:rPr lang="en-US" sz="1250" dirty="0">
+                <a:solidFill>
+                  <a:srgbClr val="6B7280"/>
+                </a:solidFill>
+                <a:latin typeface="Calibri" pitchFamily="34" charset="0"/>
+                <a:ea typeface="Calibri" pitchFamily="34" charset="-122"/>
+                <a:cs typeface="Calibri" pitchFamily="34" charset="-120"/>
+              </a:rPr>
+              <a:t>schemes evolve faster than rules.</a:t>
+            </a:r>
+            <a:endParaRPr lang="en-US" sz="1250" dirty="0"/>
+          </a:p>
+        </p:txBody>
+      </p:sp>
+      <p:sp>
+        <p:nvSpPr>
+          <p:cNvPr id="14" name="Shape 10"/>
+          <p:cNvSpPr/>
+          <p:nvPr/>
+        </p:nvSpPr>
+        <p:spPr>
+          <a:xfrm>
+            <a:off x="6053328" y="1325880"/>
+            <a:ext cx="2578608" cy="3401568"/>
+          </a:xfrm>
+          <a:prstGeom prst="roundRect">
+            <a:avLst>
+              <a:gd name="adj" fmla="val 4965"/>
+            </a:avLst>
+          </a:prstGeom>
+          <a:solidFill>
+            <a:srgbClr val="FFFFFF"/>
+          </a:solidFill>
+          <a:ln/>
+          <a:effectLst>
+            <a:outerShdw blurRad="101600" dist="38100" dir="2700000" algn="bl" rotWithShape="0">
+              <a:srgbClr val="000000">
+                <a:alpha val="12000"/>
+              </a:srgbClr>
+            </a:outerShdw>
+          </a:effectLst>
+        </p:spPr>
+        <p:txBody>
+          <a:bodyPr/>
+          <a:lstStyle/>
+          <a:p>
+            <a:endParaRPr lang="en-US"/>
+          </a:p>
+        </p:txBody>
+      </p:sp>
+      <p:sp>
+        <p:nvSpPr>
+          <p:cNvPr id="15" name="Shape 11"/>
+          <p:cNvSpPr/>
+          <p:nvPr/>
+        </p:nvSpPr>
+        <p:spPr>
+          <a:xfrm>
+            <a:off x="7040880" y="1508760"/>
+            <a:ext cx="594360" cy="594360"/>
+          </a:xfrm>
+          <a:prstGeom prst="ellipse">
+            <a:avLst/>
+          </a:prstGeom>
+          <a:solidFill>
+            <a:srgbClr val="4A0080"/>
+          </a:solidFill>
+          <a:ln/>
+        </p:spPr>
+        <p:txBody>
+          <a:bodyPr/>
+          <a:lstStyle/>
+          <a:p>
+            <a:endParaRPr lang="en-US"/>
+          </a:p>
+        </p:txBody>
+      </p:sp>
+      <p:pic>
+        <p:nvPicPr>
+          <p:cNvPr id="16" name="Image 2" descr="preencoded.png"/>
+          <p:cNvPicPr>
+            <a:picLocks noChangeAspect="1"/>
+          </p:cNvPicPr>
+          <p:nvPr/>
+        </p:nvPicPr>
+        <p:blipFill>
+          <a:blip r:embed="rId5"/>
+          <a:stretch>
+            <a:fillRect/>
+          </a:stretch>
+        </p:blipFill>
+        <p:spPr>
+          <a:xfrm>
+            <a:off x="7114032" y="1581912"/>
+            <a:ext cx="448056" cy="448056"/>
+          </a:xfrm>
+          <a:prstGeom prst="rect">
+            <a:avLst/>
+          </a:prstGeom>
+        </p:spPr>
+      </p:pic>
+      <p:sp>
+        <p:nvSpPr>
+          <p:cNvPr id="17" name="Text 12"/>
+          <p:cNvSpPr/>
+          <p:nvPr/>
+        </p:nvSpPr>
+        <p:spPr>
+          <a:xfrm>
+            <a:off x="6163056" y="2231136"/>
+            <a:ext cx="2359152" cy="457200"/>
+          </a:xfrm>
+          <a:prstGeom prst="rect">
+            <a:avLst/>
+          </a:prstGeom>
+          <a:noFill/>
+          <a:ln/>
+        </p:spPr>
+        <p:txBody>
+          <a:bodyPr wrap="square" lIns="0" tIns="0" rIns="0" bIns="0" rtlCol="0" anchor="ctr"/>
+          <a:lstStyle/>
+          <a:p>
+            <a:pPr marL="0" indent="0" algn="ctr">
+              <a:buNone/>
+            </a:pPr>
+            <a:r>
+              <a:rPr lang="en-US" sz="1400" b="1" dirty="0">
+                <a:solidFill>
+                  <a:srgbClr val="1A0533"/>
+                </a:solidFill>
+                <a:latin typeface="Calibri" pitchFamily="34" charset="0"/>
+                <a:ea typeface="Calibri" pitchFamily="34" charset="-122"/>
+                <a:cs typeface="Calibri" pitchFamily="34" charset="-120"/>
+              </a:rPr>
+              <a:t>No Explainable Rationale</a:t>
+            </a:r>
+            <a:endParaRPr lang="en-US" sz="1400" dirty="0"/>
+          </a:p>
+        </p:txBody>
+      </p:sp>
+      <p:sp>
+        <p:nvSpPr>
+          <p:cNvPr id="18" name="Text 13"/>
+          <p:cNvSpPr/>
+          <p:nvPr/>
+        </p:nvSpPr>
+        <p:spPr>
+          <a:xfrm>
+            <a:off x="6163056" y="2761488"/>
+            <a:ext cx="2359152" cy="1719072"/>
+          </a:xfrm>
+          <a:prstGeom prst="rect">
+            <a:avLst/>
+          </a:prstGeom>
+          <a:noFill/>
+          <a:ln/>
+        </p:spPr>
+        <p:txBody>
+          <a:bodyPr wrap="square" lIns="0" tIns="0" rIns="0" bIns="0" rtlCol="0" anchor="ctr"/>
+          <a:lstStyle/>
+          <a:p>
+            <a:pPr marL="0" indent="0" algn="ctr">
+              <a:lnSpc>
+                <a:spcPct val="130000"/>
+              </a:lnSpc>
+              <a:buNone/>
+            </a:pPr>
+            <a:r>
+              <a:rPr lang="en-US" sz="1250" dirty="0">
+                <a:solidFill>
+                  <a:srgbClr val="6B7280"/>
+                </a:solidFill>
+                <a:latin typeface="Calibri" pitchFamily="34" charset="0"/>
+                <a:ea typeface="Calibri" pitchFamily="34" charset="-122"/>
+                <a:cs typeface="Calibri" pitchFamily="34" charset="-120"/>
+              </a:rPr>
+              <a:t>Black-box risk scores cannot</a:t>
+            </a:r>
+            <a:endParaRPr lang="en-US" sz="1250" dirty="0"/>
+          </a:p>
+          <a:p>
+            <a:pPr marL="0" indent="0" algn="ctr">
+              <a:lnSpc>
+                <a:spcPct val="130000"/>
+              </a:lnSpc>
+              <a:buNone/>
+            </a:pPr>
+            <a:r>
+              <a:rPr lang="en-US" sz="1250" dirty="0">
+                <a:solidFill>
+                  <a:srgbClr val="6B7280"/>
+                </a:solidFill>
+                <a:latin typeface="Calibri" pitchFamily="34" charset="0"/>
+                <a:ea typeface="Calibri" pitchFamily="34" charset="-122"/>
+                <a:cs typeface="Calibri" pitchFamily="34" charset="-120"/>
+              </a:rPr>
+              <a:t>support provider disputes or</a:t>
+            </a:r>
+            <a:endParaRPr lang="en-US" sz="1250" dirty="0"/>
+          </a:p>
+          <a:p>
+            <a:pPr marL="0" indent="0" algn="ctr">
+              <a:lnSpc>
+                <a:spcPct val="130000"/>
+              </a:lnSpc>
+              <a:buNone/>
+            </a:pPr>
+            <a:r>
+              <a:rPr lang="en-US" sz="1250" dirty="0">
+                <a:solidFill>
+                  <a:srgbClr val="6B7280"/>
+                </a:solidFill>
+                <a:latin typeface="Calibri" pitchFamily="34" charset="0"/>
+                <a:ea typeface="Calibri" pitchFamily="34" charset="-122"/>
+                <a:cs typeface="Calibri" pitchFamily="34" charset="-120"/>
+              </a:rPr>
               <a:t>regulatory audits requiring</a:t>
             </a:r>
             <a:endParaRPr lang="en-US" sz="1250" dirty="0"/>
           </a:p>
           <a:p>
-            <a:pPr algn="ctr" indent="0" marL="0">
+            <a:pPr marL="0" indent="0" algn="ctr">
               <a:lnSpc>
                 <a:spcPct val="130000"/>
               </a:lnSpc>
@@ -3786,6 +3695,7 @@
         <a:solidFill>
           <a:srgbClr val="1A0533"/>
         </a:solidFill>
+        <a:effectLst/>
       </p:bgPr>
     </p:bg>
     <p:spTree>
@@ -3823,7 +3733,7 @@
           <a:bodyPr wrap="square" lIns="0" tIns="0" rIns="0" bIns="0" rtlCol="0" anchor="ctr"/>
           <a:lstStyle/>
           <a:p>
-            <a:pPr indent="0" marL="0">
+            <a:pPr marL="0" indent="0">
               <a:buNone/>
             </a:pPr>
             <a:r>
@@ -3862,7 +3772,7 @@
           <a:bodyPr wrap="square" lIns="0" tIns="0" rIns="0" bIns="0" rtlCol="0" anchor="ctr"/>
           <a:lstStyle/>
           <a:p>
-            <a:pPr indent="0" marL="0">
+            <a:pPr marL="0" indent="0">
               <a:buNone/>
             </a:pPr>
             <a:r>
@@ -3903,6 +3813,13 @@
           </a:solidFill>
           <a:ln/>
         </p:spPr>
+        <p:txBody>
+          <a:bodyPr/>
+          <a:lstStyle/>
+          <a:p>
+            <a:endParaRPr lang="en-US"/>
+          </a:p>
+        </p:txBody>
       </p:sp>
       <p:sp>
         <p:nvSpPr>
@@ -3925,7 +3842,7 @@
           <a:bodyPr wrap="square" lIns="0" tIns="0" rIns="0" bIns="0" rtlCol="0" anchor="ctr"/>
           <a:lstStyle/>
           <a:p>
-            <a:pPr algn="ctr" indent="0" marL="0">
+            <a:pPr marL="0" indent="0" algn="ctr">
               <a:buNone/>
             </a:pPr>
             <a:r>
@@ -3964,7 +3881,7 @@
           <a:bodyPr wrap="square" lIns="0" tIns="0" rIns="0" bIns="0" rtlCol="0" anchor="ctr"/>
           <a:lstStyle/>
           <a:p>
-            <a:pPr algn="ctr" indent="0" marL="0">
+            <a:pPr marL="0" indent="0" algn="ctr">
               <a:lnSpc>
                 <a:spcPct val="120000"/>
               </a:lnSpc>
@@ -3984,7 +3901,7 @@
             <a:endParaRPr lang="en-US" sz="1100" dirty="0"/>
           </a:p>
           <a:p>
-            <a:pPr algn="ctr" indent="0" marL="0">
+            <a:pPr marL="0" indent="0" algn="ctr">
               <a:lnSpc>
                 <a:spcPct val="120000"/>
               </a:lnSpc>
@@ -4027,6 +3944,13 @@
             <a:prstDash val="solid"/>
           </a:ln>
         </p:spPr>
+        <p:txBody>
+          <a:bodyPr/>
+          <a:lstStyle/>
+          <a:p>
+            <a:endParaRPr lang="en-US"/>
+          </a:p>
+        </p:txBody>
       </p:sp>
       <p:sp>
         <p:nvSpPr>
@@ -4049,6 +3973,13 @@
           </a:solidFill>
           <a:ln/>
         </p:spPr>
+        <p:txBody>
+          <a:bodyPr/>
+          <a:lstStyle/>
+          <a:p>
+            <a:endParaRPr lang="en-US"/>
+          </a:p>
+        </p:txBody>
       </p:sp>
       <p:sp>
         <p:nvSpPr>
@@ -4071,7 +4002,7 @@
           <a:bodyPr wrap="square" lIns="0" tIns="0" rIns="0" bIns="0" rtlCol="0" anchor="ctr"/>
           <a:lstStyle/>
           <a:p>
-            <a:pPr algn="ctr" indent="0" marL="0">
+            <a:pPr marL="0" indent="0" algn="ctr">
               <a:buNone/>
             </a:pPr>
             <a:r>
@@ -4110,7 +4041,7 @@
           <a:bodyPr wrap="square" lIns="0" tIns="0" rIns="0" bIns="0" rtlCol="0" anchor="ctr"/>
           <a:lstStyle/>
           <a:p>
-            <a:pPr algn="ctr" indent="0" marL="0">
+            <a:pPr marL="0" indent="0" algn="ctr">
               <a:lnSpc>
                 <a:spcPct val="120000"/>
               </a:lnSpc>
@@ -4130,7 +4061,7 @@
             <a:endParaRPr lang="en-US" sz="1050" dirty="0"/>
           </a:p>
           <a:p>
-            <a:pPr algn="ctr" indent="0" marL="0">
+            <a:pPr marL="0" indent="0" algn="ctr">
               <a:lnSpc>
                 <a:spcPct val="120000"/>
               </a:lnSpc>
@@ -4150,7 +4081,7 @@
             <a:endParaRPr lang="en-US" sz="1050" dirty="0"/>
           </a:p>
           <a:p>
-            <a:pPr algn="ctr" indent="0" marL="0">
+            <a:pPr marL="0" indent="0" algn="ctr">
               <a:lnSpc>
                 <a:spcPct val="120000"/>
               </a:lnSpc>
@@ -4193,6 +4124,13 @@
             <a:prstDash val="solid"/>
           </a:ln>
         </p:spPr>
+        <p:txBody>
+          <a:bodyPr/>
+          <a:lstStyle/>
+          <a:p>
+            <a:endParaRPr lang="en-US"/>
+          </a:p>
+        </p:txBody>
       </p:sp>
       <p:sp>
         <p:nvSpPr>
@@ -4215,6 +4153,13 @@
           </a:solidFill>
           <a:ln/>
         </p:spPr>
+        <p:txBody>
+          <a:bodyPr/>
+          <a:lstStyle/>
+          <a:p>
+            <a:endParaRPr lang="en-US"/>
+          </a:p>
+        </p:txBody>
       </p:sp>
       <p:sp>
         <p:nvSpPr>
@@ -4237,7 +4182,7 @@
           <a:bodyPr wrap="square" lIns="0" tIns="0" rIns="0" bIns="0" rtlCol="0" anchor="ctr"/>
           <a:lstStyle/>
           <a:p>
-            <a:pPr algn="ctr" indent="0" marL="0">
+            <a:pPr marL="0" indent="0" algn="ctr">
               <a:buNone/>
             </a:pPr>
             <a:r>
@@ -4276,7 +4221,7 @@
           <a:bodyPr wrap="square" lIns="0" tIns="0" rIns="0" bIns="0" rtlCol="0" anchor="ctr"/>
           <a:lstStyle/>
           <a:p>
-            <a:pPr algn="ctr" indent="0" marL="0">
+            <a:pPr marL="0" indent="0" algn="ctr">
               <a:buNone/>
             </a:pPr>
             <a:r>
@@ -4315,7 +4260,7 @@
           <a:bodyPr wrap="square" lIns="0" tIns="0" rIns="0" bIns="0" rtlCol="0" anchor="ctr"/>
           <a:lstStyle/>
           <a:p>
-            <a:pPr algn="ctr" indent="0" marL="0">
+            <a:pPr marL="0" indent="0" algn="ctr">
               <a:lnSpc>
                 <a:spcPct val="115000"/>
               </a:lnSpc>
@@ -4335,7 +4280,7 @@
             <a:endParaRPr lang="en-US" sz="900" dirty="0"/>
           </a:p>
           <a:p>
-            <a:pPr algn="ctr" indent="0" marL="0">
+            <a:pPr marL="0" indent="0" algn="ctr">
               <a:lnSpc>
                 <a:spcPct val="115000"/>
               </a:lnSpc>
@@ -4355,7 +4300,7 @@
             <a:endParaRPr lang="en-US" sz="900" dirty="0"/>
           </a:p>
           <a:p>
-            <a:pPr algn="ctr" indent="0" marL="0">
+            <a:pPr marL="0" indent="0" algn="ctr">
               <a:lnSpc>
                 <a:spcPct val="115000"/>
               </a:lnSpc>
@@ -4398,6 +4343,13 @@
             <a:prstDash val="solid"/>
           </a:ln>
         </p:spPr>
+        <p:txBody>
+          <a:bodyPr/>
+          <a:lstStyle/>
+          <a:p>
+            <a:endParaRPr lang="en-US"/>
+          </a:p>
+        </p:txBody>
       </p:sp>
       <p:sp>
         <p:nvSpPr>
@@ -4420,6 +4372,13 @@
           </a:solidFill>
           <a:ln/>
         </p:spPr>
+        <p:txBody>
+          <a:bodyPr/>
+          <a:lstStyle/>
+          <a:p>
+            <a:endParaRPr lang="en-US"/>
+          </a:p>
+        </p:txBody>
       </p:sp>
       <p:sp>
         <p:nvSpPr>
@@ -4442,7 +4401,7 @@
           <a:bodyPr wrap="square" lIns="0" tIns="0" rIns="0" bIns="0" rtlCol="0" anchor="ctr"/>
           <a:lstStyle/>
           <a:p>
-            <a:pPr algn="ctr" indent="0" marL="0">
+            <a:pPr marL="0" indent="0" algn="ctr">
               <a:buNone/>
             </a:pPr>
             <a:r>
@@ -4481,7 +4440,7 @@
           <a:bodyPr wrap="square" lIns="0" tIns="0" rIns="0" bIns="0" rtlCol="0" anchor="ctr"/>
           <a:lstStyle/>
           <a:p>
-            <a:pPr algn="ctr" indent="0" marL="0">
+            <a:pPr marL="0" indent="0" algn="ctr">
               <a:buNone/>
             </a:pPr>
             <a:r>
@@ -4520,7 +4479,7 @@
           <a:bodyPr wrap="square" lIns="0" tIns="0" rIns="0" bIns="0" rtlCol="0" anchor="ctr"/>
           <a:lstStyle/>
           <a:p>
-            <a:pPr algn="ctr" indent="0" marL="0">
+            <a:pPr marL="0" indent="0" algn="ctr">
               <a:lnSpc>
                 <a:spcPct val="115000"/>
               </a:lnSpc>
@@ -4540,7 +4499,7 @@
             <a:endParaRPr lang="en-US" sz="900" dirty="0"/>
           </a:p>
           <a:p>
-            <a:pPr algn="ctr" indent="0" marL="0">
+            <a:pPr marL="0" indent="0" algn="ctr">
               <a:lnSpc>
                 <a:spcPct val="115000"/>
               </a:lnSpc>
@@ -4560,7 +4519,7 @@
             <a:endParaRPr lang="en-US" sz="900" dirty="0"/>
           </a:p>
           <a:p>
-            <a:pPr algn="ctr" indent="0" marL="0">
+            <a:pPr marL="0" indent="0" algn="ctr">
               <a:lnSpc>
                 <a:spcPct val="115000"/>
               </a:lnSpc>
@@ -4603,6 +4562,13 @@
             <a:prstDash val="solid"/>
           </a:ln>
         </p:spPr>
+        <p:txBody>
+          <a:bodyPr/>
+          <a:lstStyle/>
+          <a:p>
+            <a:endParaRPr lang="en-US"/>
+          </a:p>
+        </p:txBody>
       </p:sp>
       <p:sp>
         <p:nvSpPr>
@@ -4625,6 +4591,13 @@
           </a:solidFill>
           <a:ln/>
         </p:spPr>
+        <p:txBody>
+          <a:bodyPr/>
+          <a:lstStyle/>
+          <a:p>
+            <a:endParaRPr lang="en-US"/>
+          </a:p>
+        </p:txBody>
       </p:sp>
       <p:sp>
         <p:nvSpPr>
@@ -4647,7 +4620,7 @@
           <a:bodyPr wrap="square" lIns="0" tIns="0" rIns="0" bIns="0" rtlCol="0" anchor="ctr"/>
           <a:lstStyle/>
           <a:p>
-            <a:pPr algn="ctr" indent="0" marL="0">
+            <a:pPr marL="0" indent="0" algn="ctr">
               <a:buNone/>
             </a:pPr>
             <a:r>
@@ -4686,7 +4659,7 @@
           <a:bodyPr wrap="square" lIns="0" tIns="0" rIns="0" bIns="0" rtlCol="0" anchor="ctr"/>
           <a:lstStyle/>
           <a:p>
-            <a:pPr algn="ctr" indent="0" marL="0">
+            <a:pPr marL="0" indent="0" algn="ctr">
               <a:buNone/>
             </a:pPr>
             <a:r>
@@ -4725,7 +4698,7 @@
           <a:bodyPr wrap="square" lIns="0" tIns="0" rIns="0" bIns="0" rtlCol="0" anchor="ctr"/>
           <a:lstStyle/>
           <a:p>
-            <a:pPr algn="ctr" indent="0" marL="0">
+            <a:pPr marL="0" indent="0" algn="ctr">
               <a:lnSpc>
                 <a:spcPct val="115000"/>
               </a:lnSpc>
@@ -4745,7 +4718,7 @@
             <a:endParaRPr lang="en-US" sz="900" dirty="0"/>
           </a:p>
           <a:p>
-            <a:pPr algn="ctr" indent="0" marL="0">
+            <a:pPr marL="0" indent="0" algn="ctr">
               <a:lnSpc>
                 <a:spcPct val="115000"/>
               </a:lnSpc>
@@ -4765,7 +4738,7 @@
             <a:endParaRPr lang="en-US" sz="900" dirty="0"/>
           </a:p>
           <a:p>
-            <a:pPr algn="ctr" indent="0" marL="0">
+            <a:pPr marL="0" indent="0" algn="ctr">
               <a:lnSpc>
                 <a:spcPct val="115000"/>
               </a:lnSpc>
@@ -4809,6 +4782,13 @@
           </a:solidFill>
           <a:ln/>
         </p:spPr>
+        <p:txBody>
+          <a:bodyPr/>
+          <a:lstStyle/>
+          <a:p>
+            <a:endParaRPr lang="en-US"/>
+          </a:p>
+        </p:txBody>
       </p:sp>
       <p:sp>
         <p:nvSpPr>
@@ -4831,7 +4811,7 @@
           <a:bodyPr wrap="square" lIns="0" tIns="0" rIns="0" bIns="0" rtlCol="0" anchor="ctr"/>
           <a:lstStyle/>
           <a:p>
-            <a:pPr algn="ctr" indent="0" marL="0">
+            <a:pPr marL="0" indent="0" algn="ctr">
               <a:buNone/>
             </a:pPr>
             <a:r>
@@ -4872,6 +4852,13 @@
           </a:solidFill>
           <a:ln/>
         </p:spPr>
+        <p:txBody>
+          <a:bodyPr/>
+          <a:lstStyle/>
+          <a:p>
+            <a:endParaRPr lang="en-US"/>
+          </a:p>
+        </p:txBody>
       </p:sp>
       <p:sp>
         <p:nvSpPr>
@@ -4894,7 +4881,7 @@
           <a:bodyPr wrap="square" lIns="0" tIns="0" rIns="0" bIns="0" rtlCol="0" anchor="ctr"/>
           <a:lstStyle/>
           <a:p>
-            <a:pPr algn="ctr" indent="0" marL="0">
+            <a:pPr marL="0" indent="0" algn="ctr">
               <a:buNone/>
             </a:pPr>
             <a:r>
@@ -4933,7 +4920,7 @@
           <a:bodyPr wrap="square" lIns="0" tIns="0" rIns="0" bIns="0" rtlCol="0" anchor="ctr"/>
           <a:lstStyle/>
           <a:p>
-            <a:pPr algn="ctr" indent="0" marL="0">
+            <a:pPr marL="0" indent="0" algn="ctr">
               <a:lnSpc>
                 <a:spcPct val="125000"/>
               </a:lnSpc>
@@ -4953,7 +4940,7 @@
             <a:endParaRPr lang="en-US" sz="1050" dirty="0"/>
           </a:p>
           <a:p>
-            <a:pPr algn="ctr" indent="0" marL="0">
+            <a:pPr marL="0" indent="0" algn="ctr">
               <a:lnSpc>
                 <a:spcPct val="125000"/>
               </a:lnSpc>
@@ -4997,6 +4984,13 @@
           </a:solidFill>
           <a:ln/>
         </p:spPr>
+        <p:txBody>
+          <a:bodyPr/>
+          <a:lstStyle/>
+          <a:p>
+            <a:endParaRPr lang="en-US"/>
+          </a:p>
+        </p:txBody>
       </p:sp>
       <p:sp>
         <p:nvSpPr>
@@ -5019,7 +5013,7 @@
           <a:bodyPr wrap="square" lIns="0" tIns="0" rIns="0" bIns="0" rtlCol="0" anchor="ctr"/>
           <a:lstStyle/>
           <a:p>
-            <a:pPr algn="ctr" indent="0" marL="0">
+            <a:pPr marL="0" indent="0" algn="ctr">
               <a:buNone/>
             </a:pPr>
             <a:r>
@@ -5058,7 +5052,7 @@
           <a:bodyPr wrap="square" lIns="0" tIns="0" rIns="0" bIns="0" rtlCol="0" anchor="ctr"/>
           <a:lstStyle/>
           <a:p>
-            <a:pPr algn="ctr" indent="0" marL="0">
+            <a:pPr marL="0" indent="0" algn="ctr">
               <a:lnSpc>
                 <a:spcPct val="125000"/>
               </a:lnSpc>
@@ -5078,7 +5072,7 @@
             <a:endParaRPr lang="en-US" sz="1050" dirty="0"/>
           </a:p>
           <a:p>
-            <a:pPr algn="ctr" indent="0" marL="0">
+            <a:pPr marL="0" indent="0" algn="ctr">
               <a:lnSpc>
                 <a:spcPct val="125000"/>
               </a:lnSpc>
@@ -5122,6 +5116,13 @@
           </a:solidFill>
           <a:ln/>
         </p:spPr>
+        <p:txBody>
+          <a:bodyPr/>
+          <a:lstStyle/>
+          <a:p>
+            <a:endParaRPr lang="en-US"/>
+          </a:p>
+        </p:txBody>
       </p:sp>
       <p:sp>
         <p:nvSpPr>
@@ -5144,7 +5145,7 @@
           <a:bodyPr wrap="square" lIns="0" tIns="0" rIns="0" bIns="0" rtlCol="0" anchor="ctr"/>
           <a:lstStyle/>
           <a:p>
-            <a:pPr algn="ctr" indent="0" marL="0">
+            <a:pPr marL="0" indent="0" algn="ctr">
               <a:buNone/>
             </a:pPr>
             <a:r>
@@ -5183,7 +5184,7 @@
           <a:bodyPr wrap="square" lIns="0" tIns="0" rIns="0" bIns="0" rtlCol="0" anchor="ctr"/>
           <a:lstStyle/>
           <a:p>
-            <a:pPr algn="ctr" indent="0" marL="0">
+            <a:pPr marL="0" indent="0" algn="ctr">
               <a:lnSpc>
                 <a:spcPct val="125000"/>
               </a:lnSpc>
@@ -5203,7 +5204,7 @@
             <a:endParaRPr lang="en-US" sz="1050" dirty="0"/>
           </a:p>
           <a:p>
-            <a:pPr algn="ctr" indent="0" marL="0">
+            <a:pPr marL="0" indent="0" algn="ctr">
               <a:lnSpc>
                 <a:spcPct val="125000"/>
               </a:lnSpc>
@@ -5247,6 +5248,13 @@
           </a:solidFill>
           <a:ln/>
         </p:spPr>
+        <p:txBody>
+          <a:bodyPr/>
+          <a:lstStyle/>
+          <a:p>
+            <a:endParaRPr lang="en-US"/>
+          </a:p>
+        </p:txBody>
       </p:sp>
       <p:sp>
         <p:nvSpPr>
@@ -5269,7 +5277,7 @@
           <a:bodyPr wrap="square" lIns="0" tIns="0" rIns="0" bIns="0" rtlCol="0" anchor="ctr"/>
           <a:lstStyle/>
           <a:p>
-            <a:pPr algn="ctr" indent="0" marL="0">
+            <a:pPr marL="0" indent="0" algn="ctr">
               <a:buNone/>
             </a:pPr>
             <a:r>
@@ -5308,7 +5316,7 @@
           <a:bodyPr wrap="square" lIns="0" tIns="0" rIns="0" bIns="0" rtlCol="0" anchor="ctr"/>
           <a:lstStyle/>
           <a:p>
-            <a:pPr algn="ctr" indent="0" marL="0">
+            <a:pPr marL="0" indent="0" algn="ctr">
               <a:lnSpc>
                 <a:spcPct val="125000"/>
               </a:lnSpc>
@@ -5328,7 +5336,7 @@
             <a:endParaRPr lang="en-US" sz="1050" dirty="0"/>
           </a:p>
           <a:p>
-            <a:pPr algn="ctr" indent="0" marL="0">
+            <a:pPr marL="0" indent="0" algn="ctr">
               <a:lnSpc>
                 <a:spcPct val="125000"/>
               </a:lnSpc>
@@ -5365,6 +5373,7 @@
         <a:solidFill>
           <a:srgbClr val="F8F5FF"/>
         </a:solidFill>
+        <a:effectLst/>
       </p:bgPr>
     </p:bg>
     <p:spTree>
@@ -5402,7 +5411,7 @@
           <a:bodyPr wrap="square" lIns="0" tIns="0" rIns="0" bIns="0" rtlCol="0" anchor="ctr"/>
           <a:lstStyle/>
           <a:p>
-            <a:pPr indent="0" marL="0">
+            <a:pPr marL="0" indent="0">
               <a:buNone/>
             </a:pPr>
             <a:r>
@@ -5441,7 +5450,7 @@
           <a:bodyPr wrap="square" lIns="0" tIns="0" rIns="0" bIns="0" rtlCol="0" anchor="ctr"/>
           <a:lstStyle/>
           <a:p>
-            <a:pPr indent="0" marL="0">
+            <a:pPr marL="0" indent="0">
               <a:buNone/>
             </a:pPr>
             <a:r>
@@ -5478,6 +5487,13 @@
           </a:solidFill>
           <a:ln/>
         </p:spPr>
+        <p:txBody>
+          <a:bodyPr/>
+          <a:lstStyle/>
+          <a:p>
+            <a:endParaRPr lang="en-US"/>
+          </a:p>
+        </p:txBody>
       </p:sp>
       <p:sp>
         <p:nvSpPr>
@@ -5500,7 +5516,7 @@
           <a:bodyPr wrap="square" lIns="0" tIns="0" rIns="0" bIns="0" rtlCol="0" anchor="ctr"/>
           <a:lstStyle/>
           <a:p>
-            <a:pPr algn="ctr" indent="0" marL="0">
+            <a:pPr marL="0" indent="0" algn="ctr">
               <a:buNone/>
             </a:pPr>
             <a:r>
@@ -5539,7 +5555,7 @@
           <a:bodyPr wrap="square" lIns="0" tIns="0" rIns="0" bIns="0" rtlCol="0" anchor="ctr"/>
           <a:lstStyle/>
           <a:p>
-            <a:pPr indent="0" marL="0">
+            <a:pPr marL="0" indent="0">
               <a:buNone/>
             </a:pPr>
             <a:r>
@@ -5578,7 +5594,7 @@
           <a:bodyPr wrap="square" lIns="0" tIns="0" rIns="0" bIns="0" rtlCol="0" anchor="ctr"/>
           <a:lstStyle/>
           <a:p>
-            <a:pPr indent="0" marL="0">
+            <a:pPr marL="0" indent="0">
               <a:lnSpc>
                 <a:spcPct val="125000"/>
               </a:lnSpc>
@@ -5620,13 +5636,20 @@
           </a:solidFill>
           <a:ln/>
           <a:effectLst>
-            <a:outerShdw sx="100000" sy="100000" kx="0" ky="0" algn="bl" rotWithShape="0" blurRad="101600" dist="38100" dir="2700000">
+            <a:outerShdw blurRad="101600" dist="38100" dir="2700000" algn="bl" rotWithShape="0">
               <a:srgbClr val="000000">
                 <a:alpha val="12000"/>
               </a:srgbClr>
             </a:outerShdw>
           </a:effectLst>
         </p:spPr>
+        <p:txBody>
+          <a:bodyPr/>
+          <a:lstStyle/>
+          <a:p>
+            <a:endParaRPr lang="en-US"/>
+          </a:p>
+        </p:txBody>
       </p:sp>
       <p:sp>
         <p:nvSpPr>
@@ -5649,7 +5672,7 @@
           <a:bodyPr wrap="square" lIns="0" tIns="0" rIns="0" bIns="0" rtlCol="0" anchor="ctr"/>
           <a:lstStyle/>
           <a:p>
-            <a:pPr indent="0" marL="0">
+            <a:pPr marL="0" indent="0">
               <a:buNone/>
             </a:pPr>
             <a:r>
@@ -5688,7 +5711,7 @@
           <a:bodyPr wrap="square" lIns="0" tIns="0" rIns="0" bIns="0" rtlCol="0" anchor="ctr"/>
           <a:lstStyle/>
           <a:p>
-            <a:pPr indent="0" marL="0">
+            <a:pPr marL="0" indent="0">
               <a:lnSpc>
                 <a:spcPct val="120000"/>
               </a:lnSpc>
@@ -5731,6 +5754,13 @@
             <a:prstDash val="dash"/>
           </a:ln>
         </p:spPr>
+        <p:txBody>
+          <a:bodyPr/>
+          <a:lstStyle/>
+          <a:p>
+            <a:endParaRPr lang="en-US"/>
+          </a:p>
+        </p:txBody>
       </p:sp>
       <p:sp>
         <p:nvSpPr>
@@ -5751,6 +5781,13 @@
           </a:solidFill>
           <a:ln/>
         </p:spPr>
+        <p:txBody>
+          <a:bodyPr/>
+          <a:lstStyle/>
+          <a:p>
+            <a:endParaRPr lang="en-US"/>
+          </a:p>
+        </p:txBody>
       </p:sp>
       <p:sp>
         <p:nvSpPr>
@@ -5773,7 +5810,7 @@
           <a:bodyPr wrap="square" lIns="0" tIns="0" rIns="0" bIns="0" rtlCol="0" anchor="ctr"/>
           <a:lstStyle/>
           <a:p>
-            <a:pPr algn="ctr" indent="0" marL="0">
+            <a:pPr marL="0" indent="0" algn="ctr">
               <a:buNone/>
             </a:pPr>
             <a:r>
@@ -5812,7 +5849,7 @@
           <a:bodyPr wrap="square" lIns="0" tIns="0" rIns="0" bIns="0" rtlCol="0" anchor="ctr"/>
           <a:lstStyle/>
           <a:p>
-            <a:pPr indent="0" marL="0">
+            <a:pPr marL="0" indent="0">
               <a:buNone/>
             </a:pPr>
             <a:r>
@@ -5851,7 +5888,7 @@
           <a:bodyPr wrap="square" lIns="0" tIns="0" rIns="0" bIns="0" rtlCol="0" anchor="ctr"/>
           <a:lstStyle/>
           <a:p>
-            <a:pPr indent="0" marL="0">
+            <a:pPr marL="0" indent="0">
               <a:lnSpc>
                 <a:spcPct val="125000"/>
               </a:lnSpc>
@@ -5893,13 +5930,20 @@
           </a:solidFill>
           <a:ln/>
           <a:effectLst>
-            <a:outerShdw sx="100000" sy="100000" kx="0" ky="0" algn="bl" rotWithShape="0" blurRad="101600" dist="38100" dir="2700000">
+            <a:outerShdw blurRad="101600" dist="38100" dir="2700000" algn="bl" rotWithShape="0">
               <a:srgbClr val="000000">
                 <a:alpha val="12000"/>
               </a:srgbClr>
             </a:outerShdw>
           </a:effectLst>
         </p:spPr>
+        <p:txBody>
+          <a:bodyPr/>
+          <a:lstStyle/>
+          <a:p>
+            <a:endParaRPr lang="en-US"/>
+          </a:p>
+        </p:txBody>
       </p:sp>
       <p:sp>
         <p:nvSpPr>
@@ -5922,7 +5966,7 @@
           <a:bodyPr wrap="square" lIns="0" tIns="0" rIns="0" bIns="0" rtlCol="0" anchor="ctr"/>
           <a:lstStyle/>
           <a:p>
-            <a:pPr indent="0" marL="0">
+            <a:pPr marL="0" indent="0">
               <a:buNone/>
             </a:pPr>
             <a:r>
@@ -5961,7 +6005,7 @@
           <a:bodyPr wrap="square" lIns="0" tIns="0" rIns="0" bIns="0" rtlCol="0" anchor="ctr"/>
           <a:lstStyle/>
           <a:p>
-            <a:pPr indent="0" marL="0">
+            <a:pPr marL="0" indent="0">
               <a:lnSpc>
                 <a:spcPct val="120000"/>
               </a:lnSpc>
@@ -6004,6 +6048,13 @@
             <a:prstDash val="dash"/>
           </a:ln>
         </p:spPr>
+        <p:txBody>
+          <a:bodyPr/>
+          <a:lstStyle/>
+          <a:p>
+            <a:endParaRPr lang="en-US"/>
+          </a:p>
+        </p:txBody>
       </p:sp>
       <p:sp>
         <p:nvSpPr>
@@ -6024,6 +6075,13 @@
           </a:solidFill>
           <a:ln/>
         </p:spPr>
+        <p:txBody>
+          <a:bodyPr/>
+          <a:lstStyle/>
+          <a:p>
+            <a:endParaRPr lang="en-US"/>
+          </a:p>
+        </p:txBody>
       </p:sp>
       <p:sp>
         <p:nvSpPr>
@@ -6046,7 +6104,7 @@
           <a:bodyPr wrap="square" lIns="0" tIns="0" rIns="0" bIns="0" rtlCol="0" anchor="ctr"/>
           <a:lstStyle/>
           <a:p>
-            <a:pPr algn="ctr" indent="0" marL="0">
+            <a:pPr marL="0" indent="0" algn="ctr">
               <a:buNone/>
             </a:pPr>
             <a:r>
@@ -6085,7 +6143,7 @@
           <a:bodyPr wrap="square" lIns="0" tIns="0" rIns="0" bIns="0" rtlCol="0" anchor="ctr"/>
           <a:lstStyle/>
           <a:p>
-            <a:pPr indent="0" marL="0">
+            <a:pPr marL="0" indent="0">
               <a:buNone/>
             </a:pPr>
             <a:r>
@@ -6124,7 +6182,7 @@
           <a:bodyPr wrap="square" lIns="0" tIns="0" rIns="0" bIns="0" rtlCol="0" anchor="ctr"/>
           <a:lstStyle/>
           <a:p>
-            <a:pPr indent="0" marL="0">
+            <a:pPr marL="0" indent="0">
               <a:lnSpc>
                 <a:spcPct val="125000"/>
               </a:lnSpc>
@@ -6166,13 +6224,20 @@
           </a:solidFill>
           <a:ln/>
           <a:effectLst>
-            <a:outerShdw sx="100000" sy="100000" kx="0" ky="0" algn="bl" rotWithShape="0" blurRad="101600" dist="38100" dir="2700000">
+            <a:outerShdw blurRad="101600" dist="38100" dir="2700000" algn="bl" rotWithShape="0">
               <a:srgbClr val="000000">
                 <a:alpha val="12000"/>
               </a:srgbClr>
             </a:outerShdw>
           </a:effectLst>
         </p:spPr>
+        <p:txBody>
+          <a:bodyPr/>
+          <a:lstStyle/>
+          <a:p>
+            <a:endParaRPr lang="en-US"/>
+          </a:p>
+        </p:txBody>
       </p:sp>
       <p:sp>
         <p:nvSpPr>
@@ -6195,7 +6260,7 @@
           <a:bodyPr wrap="square" lIns="0" tIns="0" rIns="0" bIns="0" rtlCol="0" anchor="ctr"/>
           <a:lstStyle/>
           <a:p>
-            <a:pPr indent="0" marL="0">
+            <a:pPr marL="0" indent="0">
               <a:buNone/>
             </a:pPr>
             <a:r>
@@ -6234,7 +6299,7 @@
           <a:bodyPr wrap="square" lIns="0" tIns="0" rIns="0" bIns="0" rtlCol="0" anchor="ctr"/>
           <a:lstStyle/>
           <a:p>
-            <a:pPr indent="0" marL="0">
+            <a:pPr marL="0" indent="0">
               <a:lnSpc>
                 <a:spcPct val="120000"/>
               </a:lnSpc>
@@ -6271,6 +6336,7 @@
         <a:solidFill>
           <a:srgbClr val="F8F5FF"/>
         </a:solidFill>
+        <a:effectLst/>
       </p:bgPr>
     </p:bg>
     <p:spTree>
@@ -6308,7 +6374,7 @@
           <a:bodyPr wrap="square" lIns="0" tIns="0" rIns="0" bIns="0" rtlCol="0" anchor="ctr"/>
           <a:lstStyle/>
           <a:p>
-            <a:pPr indent="0" marL="0">
+            <a:pPr marL="0" indent="0">
               <a:buNone/>
             </a:pPr>
             <a:r>
@@ -6347,7 +6413,7 @@
           <a:bodyPr wrap="square" lIns="0" tIns="0" rIns="0" bIns="0" rtlCol="0" anchor="ctr"/>
           <a:lstStyle/>
           <a:p>
-            <a:pPr indent="0" marL="0">
+            <a:pPr marL="0" indent="0">
               <a:buNone/>
             </a:pPr>
             <a:r>
@@ -6386,13 +6452,20 @@
           </a:solidFill>
           <a:ln/>
           <a:effectLst>
-            <a:outerShdw sx="100000" sy="100000" kx="0" ky="0" algn="bl" rotWithShape="0" blurRad="101600" dist="38100" dir="2700000">
+            <a:outerShdw blurRad="101600" dist="38100" dir="2700000" algn="bl" rotWithShape="0">
               <a:srgbClr val="000000">
                 <a:alpha val="12000"/>
               </a:srgbClr>
             </a:outerShdw>
           </a:effectLst>
         </p:spPr>
+        <p:txBody>
+          <a:bodyPr/>
+          <a:lstStyle/>
+          <a:p>
+            <a:endParaRPr lang="en-US"/>
+          </a:p>
+        </p:txBody>
       </p:sp>
       <p:sp>
         <p:nvSpPr>
@@ -6415,6 +6488,13 @@
           </a:solidFill>
           <a:ln/>
         </p:spPr>
+        <p:txBody>
+          <a:bodyPr/>
+          <a:lstStyle/>
+          <a:p>
+            <a:endParaRPr lang="en-US"/>
+          </a:p>
+        </p:txBody>
       </p:sp>
       <p:sp>
         <p:nvSpPr>
@@ -6437,7 +6517,7 @@
           <a:bodyPr wrap="square" lIns="0" tIns="0" rIns="0" bIns="0" rtlCol="0" anchor="ctr"/>
           <a:lstStyle/>
           <a:p>
-            <a:pPr algn="ctr" indent="0" marL="0">
+            <a:pPr marL="0" indent="0" algn="ctr">
               <a:buNone/>
             </a:pPr>
             <a:r>
@@ -6476,7 +6556,7 @@
           <a:bodyPr wrap="square" lIns="0" tIns="0" rIns="0" bIns="0" rtlCol="0" anchor="ctr"/>
           <a:lstStyle/>
           <a:p>
-            <a:pPr algn="ctr" indent="0" marL="0">
+            <a:pPr marL="0" indent="0" algn="ctr">
               <a:lnSpc>
                 <a:spcPct val="130000"/>
               </a:lnSpc>
@@ -6496,7 +6576,7 @@
             <a:endParaRPr lang="en-US" sz="1100" dirty="0"/>
           </a:p>
           <a:p>
-            <a:pPr algn="ctr" indent="0" marL="0">
+            <a:pPr marL="0" indent="0" algn="ctr">
               <a:lnSpc>
                 <a:spcPct val="130000"/>
               </a:lnSpc>
@@ -6516,7 +6596,7 @@
             <a:endParaRPr lang="en-US" sz="1100" dirty="0"/>
           </a:p>
           <a:p>
-            <a:pPr algn="ctr" indent="0" marL="0">
+            <a:pPr marL="0" indent="0" algn="ctr">
               <a:lnSpc>
                 <a:spcPct val="130000"/>
               </a:lnSpc>
@@ -6536,7 +6616,7 @@
             <a:endParaRPr lang="en-US" sz="1100" dirty="0"/>
           </a:p>
           <a:p>
-            <a:pPr algn="ctr" indent="0" marL="0">
+            <a:pPr marL="0" indent="0" algn="ctr">
               <a:lnSpc>
                 <a:spcPct val="130000"/>
               </a:lnSpc>
@@ -6579,6 +6659,13 @@
             <a:prstDash val="solid"/>
           </a:ln>
         </p:spPr>
+        <p:txBody>
+          <a:bodyPr/>
+          <a:lstStyle/>
+          <a:p>
+            <a:endParaRPr lang="en-US"/>
+          </a:p>
+        </p:txBody>
       </p:sp>
       <p:sp>
         <p:nvSpPr>
@@ -6601,13 +6688,20 @@
           </a:solidFill>
           <a:ln/>
           <a:effectLst>
-            <a:outerShdw sx="100000" sy="100000" kx="0" ky="0" algn="bl" rotWithShape="0" blurRad="101600" dist="38100" dir="2700000">
+            <a:outerShdw blurRad="101600" dist="38100" dir="2700000" algn="bl" rotWithShape="0">
               <a:srgbClr val="000000">
                 <a:alpha val="12000"/>
               </a:srgbClr>
             </a:outerShdw>
           </a:effectLst>
         </p:spPr>
+        <p:txBody>
+          <a:bodyPr/>
+          <a:lstStyle/>
+          <a:p>
+            <a:endParaRPr lang="en-US"/>
+          </a:p>
+        </p:txBody>
       </p:sp>
       <p:sp>
         <p:nvSpPr>
@@ -6630,6 +6724,13 @@
           </a:solidFill>
           <a:ln/>
         </p:spPr>
+        <p:txBody>
+          <a:bodyPr/>
+          <a:lstStyle/>
+          <a:p>
+            <a:endParaRPr lang="en-US"/>
+          </a:p>
+        </p:txBody>
       </p:sp>
       <p:sp>
         <p:nvSpPr>
@@ -6652,7 +6753,7 @@
           <a:bodyPr wrap="square" lIns="0" tIns="0" rIns="0" bIns="0" rtlCol="0" anchor="ctr"/>
           <a:lstStyle/>
           <a:p>
-            <a:pPr algn="ctr" indent="0" marL="0">
+            <a:pPr marL="0" indent="0" algn="ctr">
               <a:buNone/>
             </a:pPr>
             <a:r>
@@ -6691,7 +6792,7 @@
           <a:bodyPr wrap="square" lIns="0" tIns="0" rIns="0" bIns="0" rtlCol="0" anchor="ctr"/>
           <a:lstStyle/>
           <a:p>
-            <a:pPr algn="ctr" indent="0" marL="0">
+            <a:pPr marL="0" indent="0" algn="ctr">
               <a:lnSpc>
                 <a:spcPct val="130000"/>
               </a:lnSpc>
@@ -6711,7 +6812,7 @@
             <a:endParaRPr lang="en-US" sz="1100" dirty="0"/>
           </a:p>
           <a:p>
-            <a:pPr algn="ctr" indent="0" marL="0">
+            <a:pPr marL="0" indent="0" algn="ctr">
               <a:lnSpc>
                 <a:spcPct val="130000"/>
               </a:lnSpc>
@@ -6731,7 +6832,7 @@
             <a:endParaRPr lang="en-US" sz="1100" dirty="0"/>
           </a:p>
           <a:p>
-            <a:pPr algn="ctr" indent="0" marL="0">
+            <a:pPr marL="0" indent="0" algn="ctr">
               <a:lnSpc>
                 <a:spcPct val="130000"/>
               </a:lnSpc>
@@ -6774,6 +6875,13 @@
             <a:prstDash val="solid"/>
           </a:ln>
         </p:spPr>
+        <p:txBody>
+          <a:bodyPr/>
+          <a:lstStyle/>
+          <a:p>
+            <a:endParaRPr lang="en-US"/>
+          </a:p>
+        </p:txBody>
       </p:sp>
       <p:sp>
         <p:nvSpPr>
@@ -6796,13 +6904,20 @@
           </a:solidFill>
           <a:ln/>
           <a:effectLst>
-            <a:outerShdw sx="100000" sy="100000" kx="0" ky="0" algn="bl" rotWithShape="0" blurRad="101600" dist="38100" dir="2700000">
+            <a:outerShdw blurRad="101600" dist="38100" dir="2700000" algn="bl" rotWithShape="0">
               <a:srgbClr val="000000">
                 <a:alpha val="12000"/>
               </a:srgbClr>
             </a:outerShdw>
           </a:effectLst>
         </p:spPr>
+        <p:txBody>
+          <a:bodyPr/>
+          <a:lstStyle/>
+          <a:p>
+            <a:endParaRPr lang="en-US"/>
+          </a:p>
+        </p:txBody>
       </p:sp>
       <p:sp>
         <p:nvSpPr>
@@ -6825,6 +6940,13 @@
           </a:solidFill>
           <a:ln/>
         </p:spPr>
+        <p:txBody>
+          <a:bodyPr/>
+          <a:lstStyle/>
+          <a:p>
+            <a:endParaRPr lang="en-US"/>
+          </a:p>
+        </p:txBody>
       </p:sp>
       <p:sp>
         <p:nvSpPr>
@@ -6847,7 +6969,7 @@
           <a:bodyPr wrap="square" lIns="0" tIns="0" rIns="0" bIns="0" rtlCol="0" anchor="ctr"/>
           <a:lstStyle/>
           <a:p>
-            <a:pPr algn="ctr" indent="0" marL="0">
+            <a:pPr marL="0" indent="0" algn="ctr">
               <a:buNone/>
             </a:pPr>
             <a:r>
@@ -6886,7 +7008,7 @@
           <a:bodyPr wrap="square" lIns="0" tIns="0" rIns="0" bIns="0" rtlCol="0" anchor="ctr"/>
           <a:lstStyle/>
           <a:p>
-            <a:pPr algn="ctr" indent="0" marL="0">
+            <a:pPr marL="0" indent="0" algn="ctr">
               <a:lnSpc>
                 <a:spcPct val="130000"/>
               </a:lnSpc>
@@ -6906,7 +7028,7 @@
             <a:endParaRPr lang="en-US" sz="1100" dirty="0"/>
           </a:p>
           <a:p>
-            <a:pPr algn="ctr" indent="0" marL="0">
+            <a:pPr marL="0" indent="0" algn="ctr">
               <a:lnSpc>
                 <a:spcPct val="130000"/>
               </a:lnSpc>
@@ -6926,7 +7048,7 @@
             <a:endParaRPr lang="en-US" sz="1100" dirty="0"/>
           </a:p>
           <a:p>
-            <a:pPr algn="ctr" indent="0" marL="0">
+            <a:pPr marL="0" indent="0" algn="ctr">
               <a:lnSpc>
                 <a:spcPct val="130000"/>
               </a:lnSpc>
@@ -6969,6 +7091,13 @@
             <a:prstDash val="solid"/>
           </a:ln>
         </p:spPr>
+        <p:txBody>
+          <a:bodyPr/>
+          <a:lstStyle/>
+          <a:p>
+            <a:endParaRPr lang="en-US"/>
+          </a:p>
+        </p:txBody>
       </p:sp>
       <p:sp>
         <p:nvSpPr>
@@ -6991,13 +7120,20 @@
           </a:solidFill>
           <a:ln/>
           <a:effectLst>
-            <a:outerShdw sx="100000" sy="100000" kx="0" ky="0" algn="bl" rotWithShape="0" blurRad="101600" dist="38100" dir="2700000">
+            <a:outerShdw blurRad="101600" dist="38100" dir="2700000" algn="bl" rotWithShape="0">
               <a:srgbClr val="000000">
                 <a:alpha val="12000"/>
               </a:srgbClr>
             </a:outerShdw>
           </a:effectLst>
         </p:spPr>
+        <p:txBody>
+          <a:bodyPr/>
+          <a:lstStyle/>
+          <a:p>
+            <a:endParaRPr lang="en-US"/>
+          </a:p>
+        </p:txBody>
       </p:sp>
       <p:sp>
         <p:nvSpPr>
@@ -7020,6 +7156,13 @@
           </a:solidFill>
           <a:ln/>
         </p:spPr>
+        <p:txBody>
+          <a:bodyPr/>
+          <a:lstStyle/>
+          <a:p>
+            <a:endParaRPr lang="en-US"/>
+          </a:p>
+        </p:txBody>
       </p:sp>
       <p:sp>
         <p:nvSpPr>
@@ -7042,7 +7185,7 @@
           <a:bodyPr wrap="square" lIns="0" tIns="0" rIns="0" bIns="0" rtlCol="0" anchor="ctr"/>
           <a:lstStyle/>
           <a:p>
-            <a:pPr algn="ctr" indent="0" marL="0">
+            <a:pPr marL="0" indent="0" algn="ctr">
               <a:buNone/>
             </a:pPr>
             <a:r>
@@ -7081,7 +7224,7 @@
           <a:bodyPr wrap="square" lIns="0" tIns="0" rIns="0" bIns="0" rtlCol="0" anchor="ctr"/>
           <a:lstStyle/>
           <a:p>
-            <a:pPr algn="ctr" indent="0" marL="0">
+            <a:pPr marL="0" indent="0" algn="ctr">
               <a:lnSpc>
                 <a:spcPct val="130000"/>
               </a:lnSpc>
@@ -7101,7 +7244,7 @@
             <a:endParaRPr lang="en-US" sz="1100" dirty="0"/>
           </a:p>
           <a:p>
-            <a:pPr algn="ctr" indent="0" marL="0">
+            <a:pPr marL="0" indent="0" algn="ctr">
               <a:lnSpc>
                 <a:spcPct val="130000"/>
               </a:lnSpc>
@@ -7121,7 +7264,7 @@
             <a:endParaRPr lang="en-US" sz="1100" dirty="0"/>
           </a:p>
           <a:p>
-            <a:pPr algn="ctr" indent="0" marL="0">
+            <a:pPr marL="0" indent="0" algn="ctr">
               <a:lnSpc>
                 <a:spcPct val="130000"/>
               </a:lnSpc>
@@ -7163,7 +7306,7 @@
           <a:bodyPr wrap="square" lIns="0" tIns="0" rIns="0" bIns="0" rtlCol="0" anchor="ctr"/>
           <a:lstStyle/>
           <a:p>
-            <a:pPr indent="0" marL="0">
+            <a:pPr marL="0" indent="0">
               <a:buNone/>
             </a:pPr>
             <a:r>
@@ -7202,6 +7345,13 @@
           </a:solidFill>
           <a:ln/>
         </p:spPr>
+        <p:txBody>
+          <a:bodyPr/>
+          <a:lstStyle/>
+          <a:p>
+            <a:endParaRPr lang="en-US"/>
+          </a:p>
+        </p:txBody>
       </p:sp>
       <p:sp>
         <p:nvSpPr>
@@ -7224,7 +7374,7 @@
           <a:bodyPr wrap="square" lIns="0" tIns="0" rIns="0" bIns="0" rtlCol="0" anchor="ctr"/>
           <a:lstStyle/>
           <a:p>
-            <a:pPr indent="0" marL="0">
+            <a:pPr marL="0" indent="0">
               <a:buNone/>
             </a:pPr>
             <a:r>
@@ -7263,6 +7413,13 @@
           </a:solidFill>
           <a:ln/>
         </p:spPr>
+        <p:txBody>
+          <a:bodyPr/>
+          <a:lstStyle/>
+          <a:p>
+            <a:endParaRPr lang="en-US"/>
+          </a:p>
+        </p:txBody>
       </p:sp>
       <p:sp>
         <p:nvSpPr>
@@ -7285,7 +7442,7 @@
           <a:bodyPr wrap="square" lIns="0" tIns="0" rIns="0" bIns="0" rtlCol="0" anchor="ctr"/>
           <a:lstStyle/>
           <a:p>
-            <a:pPr indent="0" marL="0">
+            <a:pPr marL="0" indent="0">
               <a:buNone/>
             </a:pPr>
             <a:r>
@@ -7324,6 +7481,13 @@
           </a:solidFill>
           <a:ln/>
         </p:spPr>
+        <p:txBody>
+          <a:bodyPr/>
+          <a:lstStyle/>
+          <a:p>
+            <a:endParaRPr lang="en-US"/>
+          </a:p>
+        </p:txBody>
       </p:sp>
       <p:sp>
         <p:nvSpPr>
@@ -7346,7 +7510,7 @@
           <a:bodyPr wrap="square" lIns="0" tIns="0" rIns="0" bIns="0" rtlCol="0" anchor="ctr"/>
           <a:lstStyle/>
           <a:p>
-            <a:pPr indent="0" marL="0">
+            <a:pPr marL="0" indent="0">
               <a:buNone/>
             </a:pPr>
             <a:r>
@@ -7385,6 +7549,13 @@
           </a:solidFill>
           <a:ln/>
         </p:spPr>
+        <p:txBody>
+          <a:bodyPr/>
+          <a:lstStyle/>
+          <a:p>
+            <a:endParaRPr lang="en-US"/>
+          </a:p>
+        </p:txBody>
       </p:sp>
       <p:sp>
         <p:nvSpPr>
@@ -7407,7 +7578,7 @@
           <a:bodyPr wrap="square" lIns="0" tIns="0" rIns="0" bIns="0" rtlCol="0" anchor="ctr"/>
           <a:lstStyle/>
           <a:p>
-            <a:pPr indent="0" marL="0">
+            <a:pPr marL="0" indent="0">
               <a:buNone/>
             </a:pPr>
             <a:r>
@@ -7446,6 +7617,13 @@
           </a:solidFill>
           <a:ln/>
         </p:spPr>
+        <p:txBody>
+          <a:bodyPr/>
+          <a:lstStyle/>
+          <a:p>
+            <a:endParaRPr lang="en-US"/>
+          </a:p>
+        </p:txBody>
       </p:sp>
       <p:sp>
         <p:nvSpPr>
@@ -7468,7 +7646,7 @@
           <a:bodyPr wrap="square" lIns="0" tIns="0" rIns="0" bIns="0" rtlCol="0" anchor="ctr"/>
           <a:lstStyle/>
           <a:p>
-            <a:pPr indent="0" marL="0">
+            <a:pPr marL="0" indent="0">
               <a:buNone/>
             </a:pPr>
             <a:r>
@@ -7507,6 +7685,13 @@
           </a:solidFill>
           <a:ln/>
         </p:spPr>
+        <p:txBody>
+          <a:bodyPr/>
+          <a:lstStyle/>
+          <a:p>
+            <a:endParaRPr lang="en-US"/>
+          </a:p>
+        </p:txBody>
       </p:sp>
       <p:sp>
         <p:nvSpPr>
@@ -7529,7 +7714,7 @@
           <a:bodyPr wrap="square" lIns="0" tIns="0" rIns="0" bIns="0" rtlCol="0" anchor="ctr"/>
           <a:lstStyle/>
           <a:p>
-            <a:pPr indent="0" marL="0">
+            <a:pPr marL="0" indent="0">
               <a:buNone/>
             </a:pPr>
             <a:r>
@@ -7563,6 +7748,7 @@
         <a:solidFill>
           <a:srgbClr val="1A0533"/>
         </a:solidFill>
+        <a:effectLst/>
       </p:bgPr>
     </p:bg>
     <p:spTree>
@@ -7600,7 +7786,7 @@
           <a:bodyPr wrap="square" lIns="0" tIns="0" rIns="0" bIns="0" rtlCol="0" anchor="ctr"/>
           <a:lstStyle/>
           <a:p>
-            <a:pPr indent="0" marL="0">
+            <a:pPr marL="0" indent="0">
               <a:buNone/>
             </a:pPr>
             <a:r>
@@ -7639,7 +7825,7 @@
           <a:bodyPr wrap="square" lIns="0" tIns="0" rIns="0" bIns="0" rtlCol="0" anchor="ctr"/>
           <a:lstStyle/>
           <a:p>
-            <a:pPr indent="0" marL="0">
+            <a:pPr marL="0" indent="0">
               <a:buNone/>
             </a:pPr>
             <a:r>
@@ -7680,6 +7866,13 @@
           </a:solidFill>
           <a:ln/>
         </p:spPr>
+        <p:txBody>
+          <a:bodyPr/>
+          <a:lstStyle/>
+          <a:p>
+            <a:endParaRPr lang="en-US"/>
+          </a:p>
+        </p:txBody>
       </p:sp>
       <p:sp>
         <p:nvSpPr>
@@ -7704,6 +7897,13 @@
           </a:solidFill>
           <a:ln/>
         </p:spPr>
+        <p:txBody>
+          <a:bodyPr/>
+          <a:lstStyle/>
+          <a:p>
+            <a:endParaRPr lang="en-US"/>
+          </a:p>
+        </p:txBody>
       </p:sp>
       <p:sp>
         <p:nvSpPr>
@@ -7726,7 +7926,7 @@
           <a:bodyPr wrap="square" lIns="0" tIns="0" rIns="0" bIns="0" rtlCol="0" anchor="ctr"/>
           <a:lstStyle/>
           <a:p>
-            <a:pPr indent="0" marL="0">
+            <a:pPr marL="0" indent="0">
               <a:buNone/>
             </a:pPr>
             <a:r>
@@ -7765,7 +7965,7 @@
           <a:bodyPr wrap="square" lIns="0" tIns="0" rIns="0" bIns="0" rtlCol="0" anchor="ctr"/>
           <a:lstStyle/>
           <a:p>
-            <a:pPr indent="0" marL="0">
+            <a:pPr marL="0" indent="0">
               <a:buNone/>
             </a:pPr>
             <a:r>
@@ -7804,7 +8004,7 @@
           <a:bodyPr wrap="square" lIns="0" tIns="0" rIns="0" bIns="0" rtlCol="0" anchor="ctr"/>
           <a:lstStyle/>
           <a:p>
-            <a:pPr indent="0" marL="0">
+            <a:pPr marL="0" indent="0">
               <a:buNone/>
             </a:pPr>
             <a:r>
@@ -7843,7 +8043,7 @@
           <a:bodyPr wrap="square" lIns="0" tIns="0" rIns="0" bIns="0" rtlCol="0" anchor="ctr"/>
           <a:lstStyle/>
           <a:p>
-            <a:pPr indent="0" marL="0">
+            <a:pPr marL="0" indent="0">
               <a:lnSpc>
                 <a:spcPct val="115000"/>
               </a:lnSpc>
@@ -7885,7 +8085,7 @@
           <a:bodyPr wrap="square" lIns="0" tIns="0" rIns="0" bIns="0" rtlCol="0" anchor="ctr"/>
           <a:lstStyle/>
           <a:p>
-            <a:pPr indent="0" marL="0">
+            <a:pPr marL="0" indent="0">
               <a:buNone/>
             </a:pPr>
             <a:r>
@@ -7924,7 +8124,7 @@
           <a:bodyPr wrap="square" lIns="0" tIns="0" rIns="0" bIns="0" rtlCol="0" anchor="ctr"/>
           <a:lstStyle/>
           <a:p>
-            <a:pPr indent="0" marL="0">
+            <a:pPr marL="0" indent="0">
               <a:lnSpc>
                 <a:spcPct val="115000"/>
               </a:lnSpc>
@@ -7966,7 +8166,7 @@
           <a:bodyPr wrap="square" lIns="0" tIns="0" rIns="0" bIns="0" rtlCol="0" anchor="ctr"/>
           <a:lstStyle/>
           <a:p>
-            <a:pPr indent="0" marL="0">
+            <a:pPr marL="0" indent="0">
               <a:buNone/>
             </a:pPr>
             <a:r>
@@ -8005,7 +8205,7 @@
           <a:bodyPr wrap="square" lIns="0" tIns="0" rIns="0" bIns="0" rtlCol="0" anchor="ctr"/>
           <a:lstStyle/>
           <a:p>
-            <a:pPr indent="0" marL="0">
+            <a:pPr marL="0" indent="0">
               <a:lnSpc>
                 <a:spcPct val="115000"/>
               </a:lnSpc>
@@ -8047,7 +8247,7 @@
           <a:bodyPr wrap="square" lIns="0" tIns="0" rIns="0" bIns="0" rtlCol="0" anchor="ctr"/>
           <a:lstStyle/>
           <a:p>
-            <a:pPr indent="0" marL="0">
+            <a:pPr marL="0" indent="0">
               <a:buNone/>
             </a:pPr>
             <a:r>
@@ -8086,7 +8286,7 @@
           <a:bodyPr wrap="square" lIns="0" tIns="0" rIns="0" bIns="0" rtlCol="0" anchor="ctr"/>
           <a:lstStyle/>
           <a:p>
-            <a:pPr indent="0" marL="0">
+            <a:pPr marL="0" indent="0">
               <a:lnSpc>
                 <a:spcPct val="115000"/>
               </a:lnSpc>
@@ -8130,6 +8330,13 @@
           </a:solidFill>
           <a:ln/>
         </p:spPr>
+        <p:txBody>
+          <a:bodyPr/>
+          <a:lstStyle/>
+          <a:p>
+            <a:endParaRPr lang="en-US"/>
+          </a:p>
+        </p:txBody>
       </p:sp>
       <p:sp>
         <p:nvSpPr>
@@ -8152,7 +8359,7 @@
           <a:bodyPr wrap="square" lIns="0" tIns="0" rIns="0" bIns="0" rtlCol="0" anchor="ctr"/>
           <a:lstStyle/>
           <a:p>
-            <a:pPr algn="ctr" indent="0" marL="0">
+            <a:pPr marL="0" indent="0" algn="ctr">
               <a:buNone/>
             </a:pPr>
             <a:r>
@@ -8191,7 +8398,7 @@
           <a:bodyPr wrap="square" lIns="0" tIns="0" rIns="0" bIns="0" rtlCol="0" anchor="ctr"/>
           <a:lstStyle/>
           <a:p>
-            <a:pPr algn="ctr" indent="0" marL="0">
+            <a:pPr marL="0" indent="0" algn="ctr">
               <a:lnSpc>
                 <a:spcPct val="120000"/>
               </a:lnSpc>
@@ -8235,6 +8442,13 @@
           </a:solidFill>
           <a:ln/>
         </p:spPr>
+        <p:txBody>
+          <a:bodyPr/>
+          <a:lstStyle/>
+          <a:p>
+            <a:endParaRPr lang="en-US"/>
+          </a:p>
+        </p:txBody>
       </p:sp>
       <p:sp>
         <p:nvSpPr>
@@ -8259,6 +8473,13 @@
           </a:solidFill>
           <a:ln/>
         </p:spPr>
+        <p:txBody>
+          <a:bodyPr/>
+          <a:lstStyle/>
+          <a:p>
+            <a:endParaRPr lang="en-US"/>
+          </a:p>
+        </p:txBody>
       </p:sp>
       <p:sp>
         <p:nvSpPr>
@@ -8281,7 +8502,7 @@
           <a:bodyPr wrap="square" lIns="0" tIns="0" rIns="0" bIns="0" rtlCol="0" anchor="ctr"/>
           <a:lstStyle/>
           <a:p>
-            <a:pPr indent="0" marL="0">
+            <a:pPr marL="0" indent="0">
               <a:buNone/>
             </a:pPr>
             <a:r>
@@ -8320,7 +8541,7 @@
           <a:bodyPr wrap="square" lIns="0" tIns="0" rIns="0" bIns="0" rtlCol="0" anchor="ctr"/>
           <a:lstStyle/>
           <a:p>
-            <a:pPr indent="0" marL="0">
+            <a:pPr marL="0" indent="0">
               <a:buNone/>
             </a:pPr>
             <a:r>
@@ -8359,7 +8580,7 @@
           <a:bodyPr wrap="square" lIns="0" tIns="0" rIns="0" bIns="0" rtlCol="0" anchor="ctr"/>
           <a:lstStyle/>
           <a:p>
-            <a:pPr indent="0" marL="0">
+            <a:pPr marL="0" indent="0">
               <a:buNone/>
             </a:pPr>
             <a:r>
@@ -8398,7 +8619,7 @@
           <a:bodyPr wrap="square" lIns="0" tIns="0" rIns="0" bIns="0" rtlCol="0" anchor="ctr"/>
           <a:lstStyle/>
           <a:p>
-            <a:pPr indent="0" marL="0">
+            <a:pPr marL="0" indent="0">
               <a:lnSpc>
                 <a:spcPct val="115000"/>
               </a:lnSpc>
@@ -8440,7 +8661,7 @@
           <a:bodyPr wrap="square" lIns="0" tIns="0" rIns="0" bIns="0" rtlCol="0" anchor="ctr"/>
           <a:lstStyle/>
           <a:p>
-            <a:pPr indent="0" marL="0">
+            <a:pPr marL="0" indent="0">
               <a:buNone/>
             </a:pPr>
             <a:r>
@@ -8479,7 +8700,7 @@
           <a:bodyPr wrap="square" lIns="0" tIns="0" rIns="0" bIns="0" rtlCol="0" anchor="ctr"/>
           <a:lstStyle/>
           <a:p>
-            <a:pPr indent="0" marL="0">
+            <a:pPr marL="0" indent="0">
               <a:lnSpc>
                 <a:spcPct val="115000"/>
               </a:lnSpc>
@@ -8521,7 +8742,7 @@
           <a:bodyPr wrap="square" lIns="0" tIns="0" rIns="0" bIns="0" rtlCol="0" anchor="ctr"/>
           <a:lstStyle/>
           <a:p>
-            <a:pPr indent="0" marL="0">
+            <a:pPr marL="0" indent="0">
               <a:buNone/>
             </a:pPr>
             <a:r>
@@ -8560,7 +8781,7 @@
           <a:bodyPr wrap="square" lIns="0" tIns="0" rIns="0" bIns="0" rtlCol="0" anchor="ctr"/>
           <a:lstStyle/>
           <a:p>
-            <a:pPr indent="0" marL="0">
+            <a:pPr marL="0" indent="0">
               <a:lnSpc>
                 <a:spcPct val="115000"/>
               </a:lnSpc>
@@ -8602,7 +8823,7 @@
           <a:bodyPr wrap="square" lIns="0" tIns="0" rIns="0" bIns="0" rtlCol="0" anchor="ctr"/>
           <a:lstStyle/>
           <a:p>
-            <a:pPr indent="0" marL="0">
+            <a:pPr marL="0" indent="0">
               <a:buNone/>
             </a:pPr>
             <a:r>
@@ -8641,7 +8862,7 @@
           <a:bodyPr wrap="square" lIns="0" tIns="0" rIns="0" bIns="0" rtlCol="0" anchor="ctr"/>
           <a:lstStyle/>
           <a:p>
-            <a:pPr indent="0" marL="0">
+            <a:pPr marL="0" indent="0">
               <a:lnSpc>
                 <a:spcPct val="115000"/>
               </a:lnSpc>
@@ -8685,6 +8906,13 @@
           </a:solidFill>
           <a:ln/>
         </p:spPr>
+        <p:txBody>
+          <a:bodyPr/>
+          <a:lstStyle/>
+          <a:p>
+            <a:endParaRPr lang="en-US"/>
+          </a:p>
+        </p:txBody>
       </p:sp>
       <p:sp>
         <p:nvSpPr>
@@ -8707,7 +8935,7 @@
           <a:bodyPr wrap="square" lIns="0" tIns="0" rIns="0" bIns="0" rtlCol="0" anchor="ctr"/>
           <a:lstStyle/>
           <a:p>
-            <a:pPr algn="ctr" indent="0" marL="0">
+            <a:pPr marL="0" indent="0" algn="ctr">
               <a:buNone/>
             </a:pPr>
             <a:r>
@@ -8746,7 +8974,7 @@
           <a:bodyPr wrap="square" lIns="0" tIns="0" rIns="0" bIns="0" rtlCol="0" anchor="ctr"/>
           <a:lstStyle/>
           <a:p>
-            <a:pPr algn="ctr" indent="0" marL="0">
+            <a:pPr marL="0" indent="0" algn="ctr">
               <a:lnSpc>
                 <a:spcPct val="120000"/>
               </a:lnSpc>
@@ -8790,6 +9018,13 @@
           </a:solidFill>
           <a:ln/>
         </p:spPr>
+        <p:txBody>
+          <a:bodyPr/>
+          <a:lstStyle/>
+          <a:p>
+            <a:endParaRPr lang="en-US"/>
+          </a:p>
+        </p:txBody>
       </p:sp>
       <p:sp>
         <p:nvSpPr>
@@ -8814,6 +9049,13 @@
           </a:solidFill>
           <a:ln/>
         </p:spPr>
+        <p:txBody>
+          <a:bodyPr/>
+          <a:lstStyle/>
+          <a:p>
+            <a:endParaRPr lang="en-US"/>
+          </a:p>
+        </p:txBody>
       </p:sp>
       <p:sp>
         <p:nvSpPr>
@@ -8836,7 +9078,7 @@
           <a:bodyPr wrap="square" lIns="0" tIns="0" rIns="0" bIns="0" rtlCol="0" anchor="ctr"/>
           <a:lstStyle/>
           <a:p>
-            <a:pPr indent="0" marL="0">
+            <a:pPr marL="0" indent="0">
               <a:buNone/>
             </a:pPr>
             <a:r>
@@ -8875,7 +9117,7 @@
           <a:bodyPr wrap="square" lIns="0" tIns="0" rIns="0" bIns="0" rtlCol="0" anchor="ctr"/>
           <a:lstStyle/>
           <a:p>
-            <a:pPr indent="0" marL="0">
+            <a:pPr marL="0" indent="0">
               <a:buNone/>
             </a:pPr>
             <a:r>
@@ -8914,7 +9156,7 @@
           <a:bodyPr wrap="square" lIns="0" tIns="0" rIns="0" bIns="0" rtlCol="0" anchor="ctr"/>
           <a:lstStyle/>
           <a:p>
-            <a:pPr indent="0" marL="0">
+            <a:pPr marL="0" indent="0">
               <a:buNone/>
             </a:pPr>
             <a:r>
@@ -8953,7 +9195,7 @@
           <a:bodyPr wrap="square" lIns="0" tIns="0" rIns="0" bIns="0" rtlCol="0" anchor="ctr"/>
           <a:lstStyle/>
           <a:p>
-            <a:pPr indent="0" marL="0">
+            <a:pPr marL="0" indent="0">
               <a:lnSpc>
                 <a:spcPct val="115000"/>
               </a:lnSpc>
@@ -8995,7 +9237,7 @@
           <a:bodyPr wrap="square" lIns="0" tIns="0" rIns="0" bIns="0" rtlCol="0" anchor="ctr"/>
           <a:lstStyle/>
           <a:p>
-            <a:pPr indent="0" marL="0">
+            <a:pPr marL="0" indent="0">
               <a:buNone/>
             </a:pPr>
             <a:r>
@@ -9034,7 +9276,7 @@
           <a:bodyPr wrap="square" lIns="0" tIns="0" rIns="0" bIns="0" rtlCol="0" anchor="ctr"/>
           <a:lstStyle/>
           <a:p>
-            <a:pPr indent="0" marL="0">
+            <a:pPr marL="0" indent="0">
               <a:lnSpc>
                 <a:spcPct val="115000"/>
               </a:lnSpc>
@@ -9076,7 +9318,7 @@
           <a:bodyPr wrap="square" lIns="0" tIns="0" rIns="0" bIns="0" rtlCol="0" anchor="ctr"/>
           <a:lstStyle/>
           <a:p>
-            <a:pPr indent="0" marL="0">
+            <a:pPr marL="0" indent="0">
               <a:buNone/>
             </a:pPr>
             <a:r>
@@ -9115,7 +9357,7 @@
           <a:bodyPr wrap="square" lIns="0" tIns="0" rIns="0" bIns="0" rtlCol="0" anchor="ctr"/>
           <a:lstStyle/>
           <a:p>
-            <a:pPr indent="0" marL="0">
+            <a:pPr marL="0" indent="0">
               <a:lnSpc>
                 <a:spcPct val="115000"/>
               </a:lnSpc>
@@ -9157,7 +9399,7 @@
           <a:bodyPr wrap="square" lIns="0" tIns="0" rIns="0" bIns="0" rtlCol="0" anchor="ctr"/>
           <a:lstStyle/>
           <a:p>
-            <a:pPr indent="0" marL="0">
+            <a:pPr marL="0" indent="0">
               <a:buNone/>
             </a:pPr>
             <a:r>
@@ -9196,7 +9438,7 @@
           <a:bodyPr wrap="square" lIns="0" tIns="0" rIns="0" bIns="0" rtlCol="0" anchor="ctr"/>
           <a:lstStyle/>
           <a:p>
-            <a:pPr indent="0" marL="0">
+            <a:pPr marL="0" indent="0">
               <a:lnSpc>
                 <a:spcPct val="115000"/>
               </a:lnSpc>
@@ -9240,6 +9482,13 @@
           </a:solidFill>
           <a:ln/>
         </p:spPr>
+        <p:txBody>
+          <a:bodyPr/>
+          <a:lstStyle/>
+          <a:p>
+            <a:endParaRPr lang="en-US"/>
+          </a:p>
+        </p:txBody>
       </p:sp>
       <p:sp>
         <p:nvSpPr>
@@ -9262,7 +9511,7 @@
           <a:bodyPr wrap="square" lIns="0" tIns="0" rIns="0" bIns="0" rtlCol="0" anchor="ctr"/>
           <a:lstStyle/>
           <a:p>
-            <a:pPr algn="ctr" indent="0" marL="0">
+            <a:pPr marL="0" indent="0" algn="ctr">
               <a:buNone/>
             </a:pPr>
             <a:r>
@@ -9301,7 +9550,7 @@
           <a:bodyPr wrap="square" lIns="0" tIns="0" rIns="0" bIns="0" rtlCol="0" anchor="ctr"/>
           <a:lstStyle/>
           <a:p>
-            <a:pPr algn="ctr" indent="0" marL="0">
+            <a:pPr marL="0" indent="0" algn="ctr">
               <a:lnSpc>
                 <a:spcPct val="120000"/>
               </a:lnSpc>
@@ -9345,6 +9594,13 @@
           </a:solidFill>
           <a:ln/>
         </p:spPr>
+        <p:txBody>
+          <a:bodyPr/>
+          <a:lstStyle/>
+          <a:p>
+            <a:endParaRPr lang="en-US"/>
+          </a:p>
+        </p:txBody>
       </p:sp>
       <p:sp>
         <p:nvSpPr>
@@ -9367,7 +9623,7 @@
           <a:bodyPr wrap="square" lIns="0" tIns="0" rIns="0" bIns="0" rtlCol="0" anchor="ctr"/>
           <a:lstStyle/>
           <a:p>
-            <a:pPr algn="ctr" indent="0" marL="0">
+            <a:pPr marL="0" indent="0" algn="ctr">
               <a:buNone/>
             </a:pPr>
             <a:r>
@@ -9401,6 +9657,7 @@
         <a:solidFill>
           <a:srgbClr val="F8F5FF"/>
         </a:solidFill>
+        <a:effectLst/>
       </p:bgPr>
     </p:bg>
     <p:spTree>
@@ -9438,7 +9695,7 @@
           <a:bodyPr wrap="square" lIns="0" tIns="0" rIns="0" bIns="0" rtlCol="0" anchor="ctr"/>
           <a:lstStyle/>
           <a:p>
-            <a:pPr indent="0" marL="0">
+            <a:pPr marL="0" indent="0">
               <a:buNone/>
             </a:pPr>
             <a:r>
@@ -9477,13 +9734,20 @@
           </a:solidFill>
           <a:ln/>
           <a:effectLst>
-            <a:outerShdw sx="100000" sy="100000" kx="0" ky="0" algn="bl" rotWithShape="0" blurRad="101600" dist="38100" dir="2700000">
+            <a:outerShdw blurRad="101600" dist="38100" dir="2700000" algn="bl" rotWithShape="0">
               <a:srgbClr val="000000">
                 <a:alpha val="12000"/>
               </a:srgbClr>
             </a:outerShdw>
           </a:effectLst>
         </p:spPr>
+        <p:txBody>
+          <a:bodyPr/>
+          <a:lstStyle/>
+          <a:p>
+            <a:endParaRPr lang="en-US"/>
+          </a:p>
+        </p:txBody>
       </p:sp>
       <p:sp>
         <p:nvSpPr>
@@ -9506,7 +9770,7 @@
           <a:bodyPr wrap="square" lIns="0" tIns="0" rIns="0" bIns="0" rtlCol="0" anchor="ctr"/>
           <a:lstStyle/>
           <a:p>
-            <a:pPr indent="0" marL="0">
+            <a:pPr marL="0" indent="0">
               <a:buNone/>
             </a:pPr>
             <a:r>
@@ -9526,217 +9790,7 @@
       </p:sp>
       <p:pic>
         <p:nvPicPr>
-          <p:cNvPr id="5" name="Image 0" descr="preencoded.png">    </p:cNvPr>
-          <p:cNvPicPr>
-            <a:picLocks noChangeAspect="1"/>
-          </p:cNvPicPr>
-          <p:nvPr/>
-        </p:nvPicPr>
-        <p:blipFill>
-          <a:blip r:embed="rId1"/>
-          <a:stretch>
-            <a:fillRect/>
-          </a:stretch>
-        </p:blipFill>
-        <p:spPr>
-          <a:xfrm>
-            <a:off x="475488" y="1426464"/>
-            <a:ext cx="256032" cy="256032"/>
-          </a:xfrm>
-          <a:prstGeom prst="rect">
-            <a:avLst/>
-          </a:prstGeom>
-        </p:spPr>
-      </p:pic>
-      <p:sp>
-        <p:nvSpPr>
-          <p:cNvPr id="6" name="Text 3"/>
-          <p:cNvSpPr/>
-          <p:nvPr/>
-        </p:nvSpPr>
-        <p:spPr>
-          <a:xfrm>
-            <a:off x="822960" y="1389888"/>
-            <a:ext cx="3429000" cy="274320"/>
-          </a:xfrm>
-          <a:prstGeom prst="rect">
-            <a:avLst/>
-          </a:prstGeom>
-          <a:noFill/>
-          <a:ln/>
-        </p:spPr>
-        <p:txBody>
-          <a:bodyPr wrap="square" lIns="0" tIns="0" rIns="0" bIns="0" rtlCol="0" anchor="ctr"/>
-          <a:lstStyle/>
-          <a:p>
-            <a:pPr indent="0" marL="0">
-              <a:buNone/>
-            </a:pPr>
-            <a:r>
-              <a:rPr lang="en-US" sz="1250" b="1" dirty="0">
-                <a:solidFill>
-                  <a:srgbClr val="1A0533"/>
-                </a:solidFill>
-                <a:latin typeface="Calibri" pitchFamily="34" charset="0"/>
-                <a:ea typeface="Calibri" pitchFamily="34" charset="-122"/>
-                <a:cs typeface="Calibri" pitchFamily="34" charset="-120"/>
-              </a:rPr>
-              <a:t>Investigator time yield</a:t>
-            </a:r>
-            <a:endParaRPr lang="en-US" sz="1250" dirty="0"/>
-          </a:p>
-        </p:txBody>
-      </p:sp>
-      <p:sp>
-        <p:nvSpPr>
-          <p:cNvPr id="7" name="Text 4"/>
-          <p:cNvSpPr/>
-          <p:nvPr/>
-        </p:nvSpPr>
-        <p:spPr>
-          <a:xfrm>
-            <a:off x="822960" y="1664208"/>
-            <a:ext cx="3429000" cy="457200"/>
-          </a:xfrm>
-          <a:prstGeom prst="rect">
-            <a:avLst/>
-          </a:prstGeom>
-          <a:noFill/>
-          <a:ln/>
-        </p:spPr>
-        <p:txBody>
-          <a:bodyPr wrap="square" lIns="0" tIns="0" rIns="0" bIns="0" rtlCol="0" anchor="ctr"/>
-          <a:lstStyle/>
-          <a:p>
-            <a:pPr indent="0" marL="0">
-              <a:lnSpc>
-                <a:spcPct val="120000"/>
-              </a:lnSpc>
-              <a:buNone/>
-            </a:pPr>
-            <a:r>
-              <a:rPr lang="en-US" sz="1100" dirty="0">
-                <a:solidFill>
-                  <a:srgbClr val="6B7280"/>
-                </a:solidFill>
-                <a:latin typeface="Calibri" pitchFamily="34" charset="0"/>
-                <a:ea typeface="Calibri" pitchFamily="34" charset="-122"/>
-                <a:cs typeface="Calibri" pitchFamily="34" charset="-120"/>
-              </a:rPr>
-              <a:t>Triage claims with documented rationale — SIU analysts focus on edge cases</a:t>
-            </a:r>
-            <a:endParaRPr lang="en-US" sz="1100" dirty="0"/>
-          </a:p>
-        </p:txBody>
-      </p:sp>
-      <p:pic>
-        <p:nvPicPr>
-          <p:cNvPr id="8" name="Image 1" descr="preencoded.png">    </p:cNvPr>
-          <p:cNvPicPr>
-            <a:picLocks noChangeAspect="1"/>
-          </p:cNvPicPr>
-          <p:nvPr/>
-        </p:nvPicPr>
-        <p:blipFill>
-          <a:blip r:embed="rId2"/>
-          <a:stretch>
-            <a:fillRect/>
-          </a:stretch>
-        </p:blipFill>
-        <p:spPr>
-          <a:xfrm>
-            <a:off x="475488" y="2249424"/>
-            <a:ext cx="256032" cy="256032"/>
-          </a:xfrm>
-          <a:prstGeom prst="rect">
-            <a:avLst/>
-          </a:prstGeom>
-        </p:spPr>
-      </p:pic>
-      <p:sp>
-        <p:nvSpPr>
-          <p:cNvPr id="9" name="Text 5"/>
-          <p:cNvSpPr/>
-          <p:nvPr/>
-        </p:nvSpPr>
-        <p:spPr>
-          <a:xfrm>
-            <a:off x="822960" y="2212848"/>
-            <a:ext cx="3429000" cy="274320"/>
-          </a:xfrm>
-          <a:prstGeom prst="rect">
-            <a:avLst/>
-          </a:prstGeom>
-          <a:noFill/>
-          <a:ln/>
-        </p:spPr>
-        <p:txBody>
-          <a:bodyPr wrap="square" lIns="0" tIns="0" rIns="0" bIns="0" rtlCol="0" anchor="ctr"/>
-          <a:lstStyle/>
-          <a:p>
-            <a:pPr indent="0" marL="0">
-              <a:buNone/>
-            </a:pPr>
-            <a:r>
-              <a:rPr lang="en-US" sz="1250" b="1" dirty="0">
-                <a:solidFill>
-                  <a:srgbClr val="1A0533"/>
-                </a:solidFill>
-                <a:latin typeface="Calibri" pitchFamily="34" charset="0"/>
-                <a:ea typeface="Calibri" pitchFamily="34" charset="-122"/>
-                <a:cs typeface="Calibri" pitchFamily="34" charset="-120"/>
-              </a:rPr>
-              <a:t>Policy-to-rule automation</a:t>
-            </a:r>
-            <a:endParaRPr lang="en-US" sz="1250" dirty="0"/>
-          </a:p>
-        </p:txBody>
-      </p:sp>
-      <p:sp>
-        <p:nvSpPr>
-          <p:cNvPr id="10" name="Text 6"/>
-          <p:cNvSpPr/>
-          <p:nvPr/>
-        </p:nvSpPr>
-        <p:spPr>
-          <a:xfrm>
-            <a:off x="822960" y="2487168"/>
-            <a:ext cx="3429000" cy="457200"/>
-          </a:xfrm>
-          <a:prstGeom prst="rect">
-            <a:avLst/>
-          </a:prstGeom>
-          <a:noFill/>
-          <a:ln/>
-        </p:spPr>
-        <p:txBody>
-          <a:bodyPr wrap="square" lIns="0" tIns="0" rIns="0" bIns="0" rtlCol="0" anchor="ctr"/>
-          <a:lstStyle/>
-          <a:p>
-            <a:pPr indent="0" marL="0">
-              <a:lnSpc>
-                <a:spcPct val="120000"/>
-              </a:lnSpc>
-              <a:buNone/>
-            </a:pPr>
-            <a:r>
-              <a:rPr lang="en-US" sz="1100" dirty="0">
-                <a:solidFill>
-                  <a:srgbClr val="6B7280"/>
-                </a:solidFill>
-                <a:latin typeface="Calibri" pitchFamily="34" charset="0"/>
-                <a:ea typeface="Calibri" pitchFamily="34" charset="-122"/>
-                <a:cs typeface="Calibri" pitchFamily="34" charset="-120"/>
-              </a:rPr>
-              <a:t>Convert new CMS NCD/LCD prose to live edits in seconds, not weeks</a:t>
-            </a:r>
-            <a:endParaRPr lang="en-US" sz="1100" dirty="0"/>
-          </a:p>
-        </p:txBody>
-      </p:sp>
-      <p:pic>
-        <p:nvPicPr>
-          <p:cNvPr id="11" name="Image 2" descr="preencoded.png">    </p:cNvPr>
+          <p:cNvPr id="5" name="Image 0" descr="preencoded.png"/>
           <p:cNvPicPr>
             <a:picLocks noChangeAspect="1"/>
           </p:cNvPicPr>
@@ -9750,7 +9804,7 @@
         </p:blipFill>
         <p:spPr>
           <a:xfrm>
-            <a:off x="475488" y="3072384"/>
+            <a:off x="475488" y="1426464"/>
             <a:ext cx="256032" cy="256032"/>
           </a:xfrm>
           <a:prstGeom prst="rect">
@@ -9760,13 +9814,13 @@
       </p:pic>
       <p:sp>
         <p:nvSpPr>
-          <p:cNvPr id="12" name="Text 7"/>
-          <p:cNvSpPr/>
-          <p:nvPr/>
-        </p:nvSpPr>
-        <p:spPr>
-          <a:xfrm>
-            <a:off x="822960" y="3035808"/>
+          <p:cNvPr id="6" name="Text 3"/>
+          <p:cNvSpPr/>
+          <p:nvPr/>
+        </p:nvSpPr>
+        <p:spPr>
+          <a:xfrm>
+            <a:off x="822960" y="1389888"/>
             <a:ext cx="3429000" cy="274320"/>
           </a:xfrm>
           <a:prstGeom prst="rect">
@@ -9779,7 +9833,7 @@
           <a:bodyPr wrap="square" lIns="0" tIns="0" rIns="0" bIns="0" rtlCol="0" anchor="ctr"/>
           <a:lstStyle/>
           <a:p>
-            <a:pPr indent="0" marL="0">
+            <a:pPr marL="0" indent="0">
               <a:buNone/>
             </a:pPr>
             <a:r>
@@ -9791,7 +9845,7 @@
                 <a:ea typeface="Calibri" pitchFamily="34" charset="-122"/>
                 <a:cs typeface="Calibri" pitchFamily="34" charset="-120"/>
               </a:rPr>
-              <a:t>Appeal defensibility</a:t>
+              <a:t>Investigator time yield</a:t>
             </a:r>
             <a:endParaRPr lang="en-US" sz="1250" dirty="0"/>
           </a:p>
@@ -9799,13 +9853,13 @@
       </p:sp>
       <p:sp>
         <p:nvSpPr>
-          <p:cNvPr id="13" name="Text 8"/>
-          <p:cNvSpPr/>
-          <p:nvPr/>
-        </p:nvSpPr>
-        <p:spPr>
-          <a:xfrm>
-            <a:off x="822960" y="3310128"/>
+          <p:cNvPr id="7" name="Text 4"/>
+          <p:cNvSpPr/>
+          <p:nvPr/>
+        </p:nvSpPr>
+        <p:spPr>
+          <a:xfrm>
+            <a:off x="822960" y="1664208"/>
             <a:ext cx="3429000" cy="457200"/>
           </a:xfrm>
           <a:prstGeom prst="rect">
@@ -9818,7 +9872,7 @@
           <a:bodyPr wrap="square" lIns="0" tIns="0" rIns="0" bIns="0" rtlCol="0" anchor="ctr"/>
           <a:lstStyle/>
           <a:p>
-            <a:pPr indent="0" marL="0">
+            <a:pPr marL="0" indent="0">
               <a:lnSpc>
                 <a:spcPct val="120000"/>
               </a:lnSpc>
@@ -9833,7 +9887,7 @@
                 <a:ea typeface="Calibri" pitchFamily="34" charset="-122"/>
                 <a:cs typeface="Calibri" pitchFamily="34" charset="-120"/>
               </a:rPr>
-              <a:t>Every determination cites an exact CMS document ID, strengthening audit trails</a:t>
+              <a:t>Triage claims with documented rationale — SIU analysts focus on edge cases</a:t>
             </a:r>
             <a:endParaRPr lang="en-US" sz="1100" dirty="0"/>
           </a:p>
@@ -9841,7 +9895,397 @@
       </p:sp>
       <p:pic>
         <p:nvPicPr>
-          <p:cNvPr id="14" name="Image 3" descr="preencoded.png">    </p:cNvPr>
+          <p:cNvPr id="8" name="Image 1" descr="preencoded.png"/>
+          <p:cNvPicPr>
+            <a:picLocks noChangeAspect="1"/>
+          </p:cNvPicPr>
+          <p:nvPr/>
+        </p:nvPicPr>
+        <p:blipFill>
+          <a:blip r:embed="rId3"/>
+          <a:stretch>
+            <a:fillRect/>
+          </a:stretch>
+        </p:blipFill>
+        <p:spPr>
+          <a:xfrm>
+            <a:off x="475488" y="2249424"/>
+            <a:ext cx="256032" cy="256032"/>
+          </a:xfrm>
+          <a:prstGeom prst="rect">
+            <a:avLst/>
+          </a:prstGeom>
+        </p:spPr>
+      </p:pic>
+      <p:sp>
+        <p:nvSpPr>
+          <p:cNvPr id="9" name="Text 5"/>
+          <p:cNvSpPr/>
+          <p:nvPr/>
+        </p:nvSpPr>
+        <p:spPr>
+          <a:xfrm>
+            <a:off x="822960" y="2212848"/>
+            <a:ext cx="3429000" cy="274320"/>
+          </a:xfrm>
+          <a:prstGeom prst="rect">
+            <a:avLst/>
+          </a:prstGeom>
+          <a:noFill/>
+          <a:ln/>
+        </p:spPr>
+        <p:txBody>
+          <a:bodyPr wrap="square" lIns="0" tIns="0" rIns="0" bIns="0" rtlCol="0" anchor="ctr"/>
+          <a:lstStyle/>
+          <a:p>
+            <a:pPr marL="0" indent="0">
+              <a:buNone/>
+            </a:pPr>
+            <a:r>
+              <a:rPr lang="en-US" sz="1250" b="1" dirty="0">
+                <a:solidFill>
+                  <a:srgbClr val="1A0533"/>
+                </a:solidFill>
+                <a:latin typeface="Calibri" pitchFamily="34" charset="0"/>
+                <a:ea typeface="Calibri" pitchFamily="34" charset="-122"/>
+                <a:cs typeface="Calibri" pitchFamily="34" charset="-120"/>
+              </a:rPr>
+              <a:t>Policy-to-rule automation</a:t>
+            </a:r>
+            <a:endParaRPr lang="en-US" sz="1250" dirty="0"/>
+          </a:p>
+        </p:txBody>
+      </p:sp>
+      <p:sp>
+        <p:nvSpPr>
+          <p:cNvPr id="10" name="Text 6"/>
+          <p:cNvSpPr/>
+          <p:nvPr/>
+        </p:nvSpPr>
+        <p:spPr>
+          <a:xfrm>
+            <a:off x="822960" y="2487168"/>
+            <a:ext cx="3429000" cy="457200"/>
+          </a:xfrm>
+          <a:prstGeom prst="rect">
+            <a:avLst/>
+          </a:prstGeom>
+          <a:noFill/>
+          <a:ln/>
+        </p:spPr>
+        <p:txBody>
+          <a:bodyPr wrap="square" lIns="0" tIns="0" rIns="0" bIns="0" rtlCol="0" anchor="ctr"/>
+          <a:lstStyle/>
+          <a:p>
+            <a:pPr marL="0" indent="0">
+              <a:lnSpc>
+                <a:spcPct val="120000"/>
+              </a:lnSpc>
+              <a:buNone/>
+            </a:pPr>
+            <a:r>
+              <a:rPr lang="en-US" sz="1100" dirty="0">
+                <a:solidFill>
+                  <a:srgbClr val="6B7280"/>
+                </a:solidFill>
+                <a:latin typeface="Calibri" pitchFamily="34" charset="0"/>
+                <a:ea typeface="Calibri" pitchFamily="34" charset="-122"/>
+                <a:cs typeface="Calibri" pitchFamily="34" charset="-120"/>
+              </a:rPr>
+              <a:t>Convert new CMS NCD/LCD prose to live edits in seconds, not weeks</a:t>
+            </a:r>
+            <a:endParaRPr lang="en-US" sz="1100" dirty="0"/>
+          </a:p>
+        </p:txBody>
+      </p:sp>
+      <p:pic>
+        <p:nvPicPr>
+          <p:cNvPr id="11" name="Image 2" descr="preencoded.png"/>
+          <p:cNvPicPr>
+            <a:picLocks noChangeAspect="1"/>
+          </p:cNvPicPr>
+          <p:nvPr/>
+        </p:nvPicPr>
+        <p:blipFill>
+          <a:blip r:embed="rId3"/>
+          <a:stretch>
+            <a:fillRect/>
+          </a:stretch>
+        </p:blipFill>
+        <p:spPr>
+          <a:xfrm>
+            <a:off x="475488" y="3072384"/>
+            <a:ext cx="256032" cy="256032"/>
+          </a:xfrm>
+          <a:prstGeom prst="rect">
+            <a:avLst/>
+          </a:prstGeom>
+        </p:spPr>
+      </p:pic>
+      <p:sp>
+        <p:nvSpPr>
+          <p:cNvPr id="12" name="Text 7"/>
+          <p:cNvSpPr/>
+          <p:nvPr/>
+        </p:nvSpPr>
+        <p:spPr>
+          <a:xfrm>
+            <a:off x="822960" y="3035808"/>
+            <a:ext cx="3429000" cy="274320"/>
+          </a:xfrm>
+          <a:prstGeom prst="rect">
+            <a:avLst/>
+          </a:prstGeom>
+          <a:noFill/>
+          <a:ln/>
+        </p:spPr>
+        <p:txBody>
+          <a:bodyPr wrap="square" lIns="0" tIns="0" rIns="0" bIns="0" rtlCol="0" anchor="ctr"/>
+          <a:lstStyle/>
+          <a:p>
+            <a:pPr marL="0" indent="0">
+              <a:buNone/>
+            </a:pPr>
+            <a:r>
+              <a:rPr lang="en-US" sz="1250" b="1" dirty="0">
+                <a:solidFill>
+                  <a:srgbClr val="1A0533"/>
+                </a:solidFill>
+                <a:latin typeface="Calibri" pitchFamily="34" charset="0"/>
+                <a:ea typeface="Calibri" pitchFamily="34" charset="-122"/>
+                <a:cs typeface="Calibri" pitchFamily="34" charset="-120"/>
+              </a:rPr>
+              <a:t>Appeal defensibility</a:t>
+            </a:r>
+            <a:endParaRPr lang="en-US" sz="1250" dirty="0"/>
+          </a:p>
+        </p:txBody>
+      </p:sp>
+      <p:sp>
+        <p:nvSpPr>
+          <p:cNvPr id="13" name="Text 8"/>
+          <p:cNvSpPr/>
+          <p:nvPr/>
+        </p:nvSpPr>
+        <p:spPr>
+          <a:xfrm>
+            <a:off x="822960" y="3310128"/>
+            <a:ext cx="3429000" cy="457200"/>
+          </a:xfrm>
+          <a:prstGeom prst="rect">
+            <a:avLst/>
+          </a:prstGeom>
+          <a:noFill/>
+          <a:ln/>
+        </p:spPr>
+        <p:txBody>
+          <a:bodyPr wrap="square" lIns="0" tIns="0" rIns="0" bIns="0" rtlCol="0" anchor="ctr"/>
+          <a:lstStyle/>
+          <a:p>
+            <a:pPr marL="0" indent="0">
+              <a:lnSpc>
+                <a:spcPct val="120000"/>
+              </a:lnSpc>
+              <a:buNone/>
+            </a:pPr>
+            <a:r>
+              <a:rPr lang="en-US" sz="1100" dirty="0">
+                <a:solidFill>
+                  <a:srgbClr val="6B7280"/>
+                </a:solidFill>
+                <a:latin typeface="Calibri" pitchFamily="34" charset="0"/>
+                <a:ea typeface="Calibri" pitchFamily="34" charset="-122"/>
+                <a:cs typeface="Calibri" pitchFamily="34" charset="-120"/>
+              </a:rPr>
+              <a:t>Every determination cites an exact CMS document ID, strengthening audit trails</a:t>
+            </a:r>
+            <a:endParaRPr lang="en-US" sz="1100" dirty="0"/>
+          </a:p>
+        </p:txBody>
+      </p:sp>
+      <p:pic>
+        <p:nvPicPr>
+          <p:cNvPr id="14" name="Image 3" descr="preencoded.png"/>
+          <p:cNvPicPr>
+            <a:picLocks noChangeAspect="1"/>
+          </p:cNvPicPr>
+          <p:nvPr/>
+        </p:nvPicPr>
+        <p:blipFill>
+          <a:blip r:embed="rId3"/>
+          <a:stretch>
+            <a:fillRect/>
+          </a:stretch>
+        </p:blipFill>
+        <p:spPr>
+          <a:xfrm>
+            <a:off x="475488" y="3895344"/>
+            <a:ext cx="256032" cy="256032"/>
+          </a:xfrm>
+          <a:prstGeom prst="rect">
+            <a:avLst/>
+          </a:prstGeom>
+        </p:spPr>
+      </p:pic>
+      <p:sp>
+        <p:nvSpPr>
+          <p:cNvPr id="15" name="Text 9"/>
+          <p:cNvSpPr/>
+          <p:nvPr/>
+        </p:nvSpPr>
+        <p:spPr>
+          <a:xfrm>
+            <a:off x="822960" y="3858768"/>
+            <a:ext cx="3429000" cy="274320"/>
+          </a:xfrm>
+          <a:prstGeom prst="rect">
+            <a:avLst/>
+          </a:prstGeom>
+          <a:noFill/>
+          <a:ln/>
+        </p:spPr>
+        <p:txBody>
+          <a:bodyPr wrap="square" lIns="0" tIns="0" rIns="0" bIns="0" rtlCol="0" anchor="ctr"/>
+          <a:lstStyle/>
+          <a:p>
+            <a:pPr marL="0" indent="0">
+              <a:buNone/>
+            </a:pPr>
+            <a:r>
+              <a:rPr lang="en-US" sz="1250" b="1" dirty="0">
+                <a:solidFill>
+                  <a:srgbClr val="1A0533"/>
+                </a:solidFill>
+                <a:latin typeface="Calibri" pitchFamily="34" charset="0"/>
+                <a:ea typeface="Calibri" pitchFamily="34" charset="-122"/>
+                <a:cs typeface="Calibri" pitchFamily="34" charset="-120"/>
+              </a:rPr>
+              <a:t>Architecture generalizes</a:t>
+            </a:r>
+            <a:endParaRPr lang="en-US" sz="1250" dirty="0"/>
+          </a:p>
+        </p:txBody>
+      </p:sp>
+      <p:sp>
+        <p:nvSpPr>
+          <p:cNvPr id="16" name="Text 10"/>
+          <p:cNvSpPr/>
+          <p:nvPr/>
+        </p:nvSpPr>
+        <p:spPr>
+          <a:xfrm>
+            <a:off x="822960" y="4133088"/>
+            <a:ext cx="3429000" cy="457200"/>
+          </a:xfrm>
+          <a:prstGeom prst="rect">
+            <a:avLst/>
+          </a:prstGeom>
+          <a:noFill/>
+          <a:ln/>
+        </p:spPr>
+        <p:txBody>
+          <a:bodyPr wrap="square" lIns="0" tIns="0" rIns="0" bIns="0" rtlCol="0" anchor="ctr"/>
+          <a:lstStyle/>
+          <a:p>
+            <a:pPr marL="0" indent="0">
+              <a:lnSpc>
+                <a:spcPct val="120000"/>
+              </a:lnSpc>
+              <a:buNone/>
+            </a:pPr>
+            <a:r>
+              <a:rPr lang="en-US" sz="1100" dirty="0">
+                <a:solidFill>
+                  <a:srgbClr val="6B7280"/>
+                </a:solidFill>
+                <a:latin typeface="Calibri" pitchFamily="34" charset="0"/>
+                <a:ea typeface="Calibri" pitchFamily="34" charset="-122"/>
+                <a:cs typeface="Calibri" pitchFamily="34" charset="-120"/>
+              </a:rPr>
+              <a:t>Same pipeline covers prepay review, provider risk profiling, and TPO operations</a:t>
+            </a:r>
+            <a:endParaRPr lang="en-US" sz="1100" dirty="0"/>
+          </a:p>
+        </p:txBody>
+      </p:sp>
+      <p:sp>
+        <p:nvSpPr>
+          <p:cNvPr id="17" name="Shape 11"/>
+          <p:cNvSpPr/>
+          <p:nvPr/>
+        </p:nvSpPr>
+        <p:spPr>
+          <a:xfrm>
+            <a:off x="4727448" y="868680"/>
+            <a:ext cx="4069080" cy="4069080"/>
+          </a:xfrm>
+          <a:prstGeom prst="roundRect">
+            <a:avLst>
+              <a:gd name="adj" fmla="val 3146"/>
+            </a:avLst>
+          </a:prstGeom>
+          <a:solidFill>
+            <a:srgbClr val="FFF1F2"/>
+          </a:solidFill>
+          <a:ln/>
+          <a:effectLst>
+            <a:outerShdw blurRad="101600" dist="38100" dir="2700000" algn="bl" rotWithShape="0">
+              <a:srgbClr val="000000">
+                <a:alpha val="12000"/>
+              </a:srgbClr>
+            </a:outerShdw>
+          </a:effectLst>
+        </p:spPr>
+        <p:txBody>
+          <a:bodyPr/>
+          <a:lstStyle/>
+          <a:p>
+            <a:endParaRPr lang="en-US"/>
+          </a:p>
+        </p:txBody>
+      </p:sp>
+      <p:sp>
+        <p:nvSpPr>
+          <p:cNvPr id="18" name="Text 12"/>
+          <p:cNvSpPr/>
+          <p:nvPr/>
+        </p:nvSpPr>
+        <p:spPr>
+          <a:xfrm>
+            <a:off x="4882896" y="960120"/>
+            <a:ext cx="3749040" cy="347472"/>
+          </a:xfrm>
+          <a:prstGeom prst="rect">
+            <a:avLst/>
+          </a:prstGeom>
+          <a:noFill/>
+          <a:ln/>
+        </p:spPr>
+        <p:txBody>
+          <a:bodyPr wrap="square" lIns="0" tIns="0" rIns="0" bIns="0" rtlCol="0" anchor="ctr"/>
+          <a:lstStyle/>
+          <a:p>
+            <a:pPr marL="0" indent="0">
+              <a:buNone/>
+            </a:pPr>
+            <a:r>
+              <a:rPr lang="en-US" sz="1600" b="1" dirty="0">
+                <a:solidFill>
+                  <a:srgbClr val="DC2626"/>
+                </a:solidFill>
+                <a:latin typeface="Calibri" pitchFamily="34" charset="0"/>
+                <a:ea typeface="Calibri" pitchFamily="34" charset="-122"/>
+                <a:cs typeface="Calibri" pitchFamily="34" charset="-120"/>
+              </a:rPr>
+              <a:t>Threats</a:t>
+            </a:r>
+            <a:endParaRPr lang="en-US" sz="1600" dirty="0"/>
+          </a:p>
+        </p:txBody>
+      </p:sp>
+      <p:pic>
+        <p:nvPicPr>
+          <p:cNvPr id="19" name="Image 4" descr="preencoded.png"/>
           <p:cNvPicPr>
             <a:picLocks noChangeAspect="1"/>
           </p:cNvPicPr>
@@ -9855,7 +10299,7 @@
         </p:blipFill>
         <p:spPr>
           <a:xfrm>
-            <a:off x="475488" y="3895344"/>
+            <a:off x="4855464" y="1426464"/>
             <a:ext cx="256032" cy="256032"/>
           </a:xfrm>
           <a:prstGeom prst="rect">
@@ -9865,13 +10309,13 @@
       </p:pic>
       <p:sp>
         <p:nvSpPr>
-          <p:cNvPr id="15" name="Text 9"/>
-          <p:cNvSpPr/>
-          <p:nvPr/>
-        </p:nvSpPr>
-        <p:spPr>
-          <a:xfrm>
-            <a:off x="822960" y="3858768"/>
+          <p:cNvPr id="20" name="Text 13"/>
+          <p:cNvSpPr/>
+          <p:nvPr/>
+        </p:nvSpPr>
+        <p:spPr>
+          <a:xfrm>
+            <a:off x="5212080" y="1389888"/>
             <a:ext cx="3429000" cy="274320"/>
           </a:xfrm>
           <a:prstGeom prst="rect">
@@ -9884,7 +10328,7 @@
           <a:bodyPr wrap="square" lIns="0" tIns="0" rIns="0" bIns="0" rtlCol="0" anchor="ctr"/>
           <a:lstStyle/>
           <a:p>
-            <a:pPr indent="0" marL="0">
+            <a:pPr marL="0" indent="0">
               <a:buNone/>
             </a:pPr>
             <a:r>
@@ -9896,7 +10340,7 @@
                 <a:ea typeface="Calibri" pitchFamily="34" charset="-122"/>
                 <a:cs typeface="Calibri" pitchFamily="34" charset="-120"/>
               </a:rPr>
-              <a:t>Architecture generalizes</a:t>
+              <a:t>Hallucination risk</a:t>
             </a:r>
             <a:endParaRPr lang="en-US" sz="1250" dirty="0"/>
           </a:p>
@@ -9904,13 +10348,13 @@
       </p:sp>
       <p:sp>
         <p:nvSpPr>
-          <p:cNvPr id="16" name="Text 10"/>
-          <p:cNvSpPr/>
-          <p:nvPr/>
-        </p:nvSpPr>
-        <p:spPr>
-          <a:xfrm>
-            <a:off x="822960" y="4133088"/>
+          <p:cNvPr id="21" name="Text 14"/>
+          <p:cNvSpPr/>
+          <p:nvPr/>
+        </p:nvSpPr>
+        <p:spPr>
+          <a:xfrm>
+            <a:off x="5212080" y="1664208"/>
             <a:ext cx="3429000" cy="457200"/>
           </a:xfrm>
           <a:prstGeom prst="rect">
@@ -9923,7 +10367,7 @@
           <a:bodyPr wrap="square" lIns="0" tIns="0" rIns="0" bIns="0" rtlCol="0" anchor="ctr"/>
           <a:lstStyle/>
           <a:p>
-            <a:pPr indent="0" marL="0">
+            <a:pPr marL="0" indent="0">
               <a:lnSpc>
                 <a:spcPct val="120000"/>
               </a:lnSpc>
@@ -9938,97 +10382,29 @@
                 <a:ea typeface="Calibri" pitchFamily="34" charset="-122"/>
                 <a:cs typeface="Calibri" pitchFamily="34" charset="-120"/>
               </a:rPr>
-              <a:t>Same pipeline covers prepay review, provider risk profiling, and TPO operations</a:t>
+              <a:t>LLM outputs must be recommendations for human review, never autonomous denials</a:t>
             </a:r>
             <a:endParaRPr lang="en-US" sz="1100" dirty="0"/>
-          </a:p>
-        </p:txBody>
-      </p:sp>
-      <p:sp>
-        <p:nvSpPr>
-          <p:cNvPr id="17" name="Shape 11"/>
-          <p:cNvSpPr/>
-          <p:nvPr/>
-        </p:nvSpPr>
-        <p:spPr>
-          <a:xfrm>
-            <a:off x="4727448" y="868680"/>
-            <a:ext cx="4069080" cy="4069080"/>
-          </a:xfrm>
-          <a:prstGeom prst="roundRect">
-            <a:avLst>
-              <a:gd name="adj" fmla="val 3146"/>
-            </a:avLst>
-          </a:prstGeom>
-          <a:solidFill>
-            <a:srgbClr val="FFF1F2"/>
-          </a:solidFill>
-          <a:ln/>
-          <a:effectLst>
-            <a:outerShdw sx="100000" sy="100000" kx="0" ky="0" algn="bl" rotWithShape="0" blurRad="101600" dist="38100" dir="2700000">
-              <a:srgbClr val="000000">
-                <a:alpha val="12000"/>
-              </a:srgbClr>
-            </a:outerShdw>
-          </a:effectLst>
-        </p:spPr>
-      </p:sp>
-      <p:sp>
-        <p:nvSpPr>
-          <p:cNvPr id="18" name="Text 12"/>
-          <p:cNvSpPr/>
-          <p:nvPr/>
-        </p:nvSpPr>
-        <p:spPr>
-          <a:xfrm>
-            <a:off x="4882896" y="960120"/>
-            <a:ext cx="3749040" cy="347472"/>
-          </a:xfrm>
-          <a:prstGeom prst="rect">
-            <a:avLst/>
-          </a:prstGeom>
-          <a:noFill/>
-          <a:ln/>
-        </p:spPr>
-        <p:txBody>
-          <a:bodyPr wrap="square" lIns="0" tIns="0" rIns="0" bIns="0" rtlCol="0" anchor="ctr"/>
-          <a:lstStyle/>
-          <a:p>
-            <a:pPr indent="0" marL="0">
-              <a:buNone/>
-            </a:pPr>
-            <a:r>
-              <a:rPr lang="en-US" sz="1600" b="1" dirty="0">
-                <a:solidFill>
-                  <a:srgbClr val="DC2626"/>
-                </a:solidFill>
-                <a:latin typeface="Calibri" pitchFamily="34" charset="0"/>
-                <a:ea typeface="Calibri" pitchFamily="34" charset="-122"/>
-                <a:cs typeface="Calibri" pitchFamily="34" charset="-120"/>
-              </a:rPr>
-              <a:t>Threats</a:t>
-            </a:r>
-            <a:endParaRPr lang="en-US" sz="1600" dirty="0"/>
           </a:p>
         </p:txBody>
       </p:sp>
       <p:pic>
         <p:nvPicPr>
-          <p:cNvPr id="19" name="Image 4" descr="preencoded.png">    </p:cNvPr>
+          <p:cNvPr id="22" name="Image 5" descr="preencoded.png"/>
           <p:cNvPicPr>
             <a:picLocks noChangeAspect="1"/>
           </p:cNvPicPr>
           <p:nvPr/>
         </p:nvPicPr>
         <p:blipFill>
-          <a:blip r:embed="rId5"/>
+          <a:blip r:embed="rId4"/>
           <a:stretch>
             <a:fillRect/>
           </a:stretch>
         </p:blipFill>
         <p:spPr>
           <a:xfrm>
-            <a:off x="4855464" y="1426464"/>
+            <a:off x="4855464" y="2249424"/>
             <a:ext cx="256032" cy="256032"/>
           </a:xfrm>
           <a:prstGeom prst="rect">
@@ -10038,13 +10414,13 @@
       </p:pic>
       <p:sp>
         <p:nvSpPr>
-          <p:cNvPr id="20" name="Text 13"/>
-          <p:cNvSpPr/>
-          <p:nvPr/>
-        </p:nvSpPr>
-        <p:spPr>
-          <a:xfrm>
-            <a:off x="5212080" y="1389888"/>
+          <p:cNvPr id="23" name="Text 15"/>
+          <p:cNvSpPr/>
+          <p:nvPr/>
+        </p:nvSpPr>
+        <p:spPr>
+          <a:xfrm>
+            <a:off x="5212080" y="2212848"/>
             <a:ext cx="3429000" cy="274320"/>
           </a:xfrm>
           <a:prstGeom prst="rect">
@@ -10057,7 +10433,7 @@
           <a:bodyPr wrap="square" lIns="0" tIns="0" rIns="0" bIns="0" rtlCol="0" anchor="ctr"/>
           <a:lstStyle/>
           <a:p>
-            <a:pPr indent="0" marL="0">
+            <a:pPr marL="0" indent="0">
               <a:buNone/>
             </a:pPr>
             <a:r>
@@ -10069,7 +10445,7 @@
                 <a:ea typeface="Calibri" pitchFamily="34" charset="-122"/>
                 <a:cs typeface="Calibri" pitchFamily="34" charset="-120"/>
               </a:rPr>
-              <a:t>Hallucination risk</a:t>
+              <a:t>AI-generated fraud</a:t>
             </a:r>
             <a:endParaRPr lang="en-US" sz="1250" dirty="0"/>
           </a:p>
@@ -10077,13 +10453,13 @@
       </p:sp>
       <p:sp>
         <p:nvSpPr>
-          <p:cNvPr id="21" name="Text 14"/>
-          <p:cNvSpPr/>
-          <p:nvPr/>
-        </p:nvSpPr>
-        <p:spPr>
-          <a:xfrm>
-            <a:off x="5212080" y="1664208"/>
+          <p:cNvPr id="24" name="Text 16"/>
+          <p:cNvSpPr/>
+          <p:nvPr/>
+        </p:nvSpPr>
+        <p:spPr>
+          <a:xfrm>
+            <a:off x="5212080" y="2487168"/>
             <a:ext cx="3429000" cy="457200"/>
           </a:xfrm>
           <a:prstGeom prst="rect">
@@ -10096,7 +10472,7 @@
           <a:bodyPr wrap="square" lIns="0" tIns="0" rIns="0" bIns="0" rtlCol="0" anchor="ctr"/>
           <a:lstStyle/>
           <a:p>
-            <a:pPr indent="0" marL="0">
+            <a:pPr marL="0" indent="0">
               <a:lnSpc>
                 <a:spcPct val="120000"/>
               </a:lnSpc>
@@ -10111,7 +10487,7 @@
                 <a:ea typeface="Calibri" pitchFamily="34" charset="-122"/>
                 <a:cs typeface="Calibri" pitchFamily="34" charset="-120"/>
               </a:rPr>
-              <a:t>LLM outputs must be recommendations for human review, never autonomous denials</a:t>
+              <a:t>Synthetic clinical documents and deepfake billing are an emerging attack vector</a:t>
             </a:r>
             <a:endParaRPr lang="en-US" sz="1100" dirty="0"/>
           </a:p>
@@ -10119,21 +10495,21 @@
       </p:sp>
       <p:pic>
         <p:nvPicPr>
-          <p:cNvPr id="22" name="Image 5" descr="preencoded.png">    </p:cNvPr>
+          <p:cNvPr id="25" name="Image 6" descr="preencoded.png"/>
           <p:cNvPicPr>
             <a:picLocks noChangeAspect="1"/>
           </p:cNvPicPr>
           <p:nvPr/>
         </p:nvPicPr>
         <p:blipFill>
-          <a:blip r:embed="rId6"/>
+          <a:blip r:embed="rId4"/>
           <a:stretch>
             <a:fillRect/>
           </a:stretch>
         </p:blipFill>
         <p:spPr>
           <a:xfrm>
-            <a:off x="4855464" y="2249424"/>
+            <a:off x="4855464" y="3072384"/>
             <a:ext cx="256032" cy="256032"/>
           </a:xfrm>
           <a:prstGeom prst="rect">
@@ -10143,13 +10519,13 @@
       </p:pic>
       <p:sp>
         <p:nvSpPr>
-          <p:cNvPr id="23" name="Text 15"/>
-          <p:cNvSpPr/>
-          <p:nvPr/>
-        </p:nvSpPr>
-        <p:spPr>
-          <a:xfrm>
-            <a:off x="5212080" y="2212848"/>
+          <p:cNvPr id="26" name="Text 17"/>
+          <p:cNvSpPr/>
+          <p:nvPr/>
+        </p:nvSpPr>
+        <p:spPr>
+          <a:xfrm>
+            <a:off x="5212080" y="3035808"/>
             <a:ext cx="3429000" cy="274320"/>
           </a:xfrm>
           <a:prstGeom prst="rect">
@@ -10162,7 +10538,7 @@
           <a:bodyPr wrap="square" lIns="0" tIns="0" rIns="0" bIns="0" rtlCol="0" anchor="ctr"/>
           <a:lstStyle/>
           <a:p>
-            <a:pPr indent="0" marL="0">
+            <a:pPr marL="0" indent="0">
               <a:buNone/>
             </a:pPr>
             <a:r>
@@ -10174,7 +10550,7 @@
                 <a:ea typeface="Calibri" pitchFamily="34" charset="-122"/>
                 <a:cs typeface="Calibri" pitchFamily="34" charset="-120"/>
               </a:rPr>
-              <a:t>AI-generated fraud</a:t>
+              <a:t>PHI and HIPAA exposure</a:t>
             </a:r>
             <a:endParaRPr lang="en-US" sz="1250" dirty="0"/>
           </a:p>
@@ -10182,13 +10558,13 @@
       </p:sp>
       <p:sp>
         <p:nvSpPr>
-          <p:cNvPr id="24" name="Text 16"/>
-          <p:cNvSpPr/>
-          <p:nvPr/>
-        </p:nvSpPr>
-        <p:spPr>
-          <a:xfrm>
-            <a:off x="5212080" y="2487168"/>
+          <p:cNvPr id="27" name="Text 18"/>
+          <p:cNvSpPr/>
+          <p:nvPr/>
+        </p:nvSpPr>
+        <p:spPr>
+          <a:xfrm>
+            <a:off x="5212080" y="3310128"/>
             <a:ext cx="3429000" cy="457200"/>
           </a:xfrm>
           <a:prstGeom prst="rect">
@@ -10201,7 +10577,7 @@
           <a:bodyPr wrap="square" lIns="0" tIns="0" rIns="0" bIns="0" rtlCol="0" anchor="ctr"/>
           <a:lstStyle/>
           <a:p>
-            <a:pPr indent="0" marL="0">
+            <a:pPr marL="0" indent="0">
               <a:lnSpc>
                 <a:spcPct val="120000"/>
               </a:lnSpc>
@@ -10216,7 +10592,7 @@
                 <a:ea typeface="Calibri" pitchFamily="34" charset="-122"/>
                 <a:cs typeface="Calibri" pitchFamily="34" charset="-120"/>
               </a:rPr>
-              <a:t>Synthetic clinical documents and deepfake billing are an emerging attack vector</a:t>
+              <a:t>PHI requires HIPAA-compliant infra and BAAs before any production routing</a:t>
             </a:r>
             <a:endParaRPr lang="en-US" sz="1100" dirty="0"/>
           </a:p>
@@ -10224,125 +10600,20 @@
       </p:sp>
       <p:pic>
         <p:nvPicPr>
-          <p:cNvPr id="25" name="Image 6" descr="preencoded.png">    </p:cNvPr>
+          <p:cNvPr id="28" name="Image 7" descr="preencoded.png"/>
           <p:cNvPicPr>
             <a:picLocks noChangeAspect="1"/>
           </p:cNvPicPr>
           <p:nvPr/>
         </p:nvPicPr>
         <p:blipFill>
-          <a:blip r:embed="rId7"/>
+          <a:blip r:embed="rId4"/>
           <a:stretch>
             <a:fillRect/>
           </a:stretch>
         </p:blipFill>
         <p:spPr>
           <a:xfrm>
-            <a:off x="4855464" y="3072384"/>
-            <a:ext cx="256032" cy="256032"/>
-          </a:xfrm>
-          <a:prstGeom prst="rect">
-            <a:avLst/>
-          </a:prstGeom>
-        </p:spPr>
-      </p:pic>
-      <p:sp>
-        <p:nvSpPr>
-          <p:cNvPr id="26" name="Text 17"/>
-          <p:cNvSpPr/>
-          <p:nvPr/>
-        </p:nvSpPr>
-        <p:spPr>
-          <a:xfrm>
-            <a:off x="5212080" y="3035808"/>
-            <a:ext cx="3429000" cy="274320"/>
-          </a:xfrm>
-          <a:prstGeom prst="rect">
-            <a:avLst/>
-          </a:prstGeom>
-          <a:noFill/>
-          <a:ln/>
-        </p:spPr>
-        <p:txBody>
-          <a:bodyPr wrap="square" lIns="0" tIns="0" rIns="0" bIns="0" rtlCol="0" anchor="ctr"/>
-          <a:lstStyle/>
-          <a:p>
-            <a:pPr indent="0" marL="0">
-              <a:buNone/>
-            </a:pPr>
-            <a:r>
-              <a:rPr lang="en-US" sz="1250" b="1" dirty="0">
-                <a:solidFill>
-                  <a:srgbClr val="1A0533"/>
-                </a:solidFill>
-                <a:latin typeface="Calibri" pitchFamily="34" charset="0"/>
-                <a:ea typeface="Calibri" pitchFamily="34" charset="-122"/>
-                <a:cs typeface="Calibri" pitchFamily="34" charset="-120"/>
-              </a:rPr>
-              <a:t>PHI and HIPAA exposure</a:t>
-            </a:r>
-            <a:endParaRPr lang="en-US" sz="1250" dirty="0"/>
-          </a:p>
-        </p:txBody>
-      </p:sp>
-      <p:sp>
-        <p:nvSpPr>
-          <p:cNvPr id="27" name="Text 18"/>
-          <p:cNvSpPr/>
-          <p:nvPr/>
-        </p:nvSpPr>
-        <p:spPr>
-          <a:xfrm>
-            <a:off x="5212080" y="3310128"/>
-            <a:ext cx="3429000" cy="457200"/>
-          </a:xfrm>
-          <a:prstGeom prst="rect">
-            <a:avLst/>
-          </a:prstGeom>
-          <a:noFill/>
-          <a:ln/>
-        </p:spPr>
-        <p:txBody>
-          <a:bodyPr wrap="square" lIns="0" tIns="0" rIns="0" bIns="0" rtlCol="0" anchor="ctr"/>
-          <a:lstStyle/>
-          <a:p>
-            <a:pPr indent="0" marL="0">
-              <a:lnSpc>
-                <a:spcPct val="120000"/>
-              </a:lnSpc>
-              <a:buNone/>
-            </a:pPr>
-            <a:r>
-              <a:rPr lang="en-US" sz="1100" dirty="0">
-                <a:solidFill>
-                  <a:srgbClr val="6B7280"/>
-                </a:solidFill>
-                <a:latin typeface="Calibri" pitchFamily="34" charset="0"/>
-                <a:ea typeface="Calibri" pitchFamily="34" charset="-122"/>
-                <a:cs typeface="Calibri" pitchFamily="34" charset="-120"/>
-              </a:rPr>
-              <a:t>PHI requires HIPAA-compliant infra and BAAs before any production routing</a:t>
-            </a:r>
-            <a:endParaRPr lang="en-US" sz="1100" dirty="0"/>
-          </a:p>
-        </p:txBody>
-      </p:sp>
-      <p:pic>
-        <p:nvPicPr>
-          <p:cNvPr id="28" name="Image 7" descr="preencoded.png">    </p:cNvPr>
-          <p:cNvPicPr>
-            <a:picLocks noChangeAspect="1"/>
-          </p:cNvPicPr>
-          <p:nvPr/>
-        </p:nvPicPr>
-        <p:blipFill>
-          <a:blip r:embed="rId8"/>
-          <a:stretch>
-            <a:fillRect/>
-          </a:stretch>
-        </p:blipFill>
-        <p:spPr>
-          <a:xfrm>
             <a:off x="4855464" y="3895344"/>
             <a:ext cx="256032" cy="256032"/>
           </a:xfrm>
@@ -10372,7 +10643,7 @@
           <a:bodyPr wrap="square" lIns="0" tIns="0" rIns="0" bIns="0" rtlCol="0" anchor="ctr"/>
           <a:lstStyle/>
           <a:p>
-            <a:pPr indent="0" marL="0">
+            <a:pPr marL="0" indent="0">
               <a:buNone/>
             </a:pPr>
             <a:r>
@@ -10411,7 +10682,7 @@
           <a:bodyPr wrap="square" lIns="0" tIns="0" rIns="0" bIns="0" rtlCol="0" anchor="ctr"/>
           <a:lstStyle/>
           <a:p>
-            <a:pPr indent="0" marL="0">
+            <a:pPr marL="0" indent="0">
               <a:lnSpc>
                 <a:spcPct val="120000"/>
               </a:lnSpc>
@@ -10448,6 +10719,7 @@
         <a:solidFill>
           <a:srgbClr val="F8F5FF"/>
         </a:solidFill>
+        <a:effectLst/>
       </p:bgPr>
     </p:bg>
     <p:spTree>
@@ -10485,7 +10757,7 @@
           <a:bodyPr wrap="square" lIns="0" tIns="0" rIns="0" bIns="0" rtlCol="0" anchor="ctr"/>
           <a:lstStyle/>
           <a:p>
-            <a:pPr indent="0" marL="0">
+            <a:pPr marL="0" indent="0">
               <a:buNone/>
             </a:pPr>
             <a:r>
@@ -10524,7 +10796,7 @@
           <a:bodyPr wrap="square" lIns="0" tIns="0" rIns="0" bIns="0" rtlCol="0" anchor="ctr"/>
           <a:lstStyle/>
           <a:p>
-            <a:pPr indent="0" marL="0">
+            <a:pPr marL="0" indent="0">
               <a:buNone/>
             </a:pPr>
             <a:r>
@@ -10563,13 +10835,20 @@
           </a:solidFill>
           <a:ln/>
           <a:effectLst>
-            <a:outerShdw sx="100000" sy="100000" kx="0" ky="0" algn="bl" rotWithShape="0" blurRad="101600" dist="38100" dir="2700000">
+            <a:outerShdw blurRad="101600" dist="38100" dir="2700000" algn="bl" rotWithShape="0">
               <a:srgbClr val="000000">
                 <a:alpha val="12000"/>
               </a:srgbClr>
             </a:outerShdw>
           </a:effectLst>
         </p:spPr>
+        <p:txBody>
+          <a:bodyPr/>
+          <a:lstStyle/>
+          <a:p>
+            <a:endParaRPr lang="en-US"/>
+          </a:p>
+        </p:txBody>
       </p:sp>
       <p:sp>
         <p:nvSpPr>
@@ -10592,734 +10871,17 @@
           </a:solidFill>
           <a:ln/>
         </p:spPr>
+        <p:txBody>
+          <a:bodyPr/>
+          <a:lstStyle/>
+          <a:p>
+            <a:endParaRPr lang="en-US"/>
+          </a:p>
+        </p:txBody>
       </p:sp>
       <p:pic>
         <p:nvPicPr>
-          <p:cNvPr id="6" name="Image 0" descr="preencoded.png">    </p:cNvPr>
-          <p:cNvPicPr>
-            <a:picLocks noChangeAspect="1"/>
-          </p:cNvPicPr>
-          <p:nvPr/>
-        </p:nvPicPr>
-        <p:blipFill>
-          <a:blip r:embed="rId1"/>
-          <a:stretch>
-            <a:fillRect/>
-          </a:stretch>
-        </p:blipFill>
-        <p:spPr>
-          <a:xfrm>
-            <a:off x="429768" y="1243584"/>
-            <a:ext cx="347472" cy="347472"/>
-          </a:xfrm>
-          <a:prstGeom prst="rect">
-            <a:avLst/>
-          </a:prstGeom>
-        </p:spPr>
-      </p:pic>
-      <p:sp>
-        <p:nvSpPr>
-          <p:cNvPr id="7" name="Text 4"/>
-          <p:cNvSpPr/>
-          <p:nvPr/>
-        </p:nvSpPr>
-        <p:spPr>
-          <a:xfrm>
-            <a:off x="868680" y="1216152"/>
-            <a:ext cx="2066544" cy="320040"/>
-          </a:xfrm>
-          <a:prstGeom prst="rect">
-            <a:avLst/>
-          </a:prstGeom>
-          <a:noFill/>
-          <a:ln/>
-        </p:spPr>
-        <p:txBody>
-          <a:bodyPr wrap="square" lIns="0" tIns="0" rIns="0" bIns="0" rtlCol="0" anchor="ctr"/>
-          <a:lstStyle/>
-          <a:p>
-            <a:pPr indent="0" marL="0">
-              <a:buNone/>
-            </a:pPr>
-            <a:r>
-              <a:rPr lang="en-US" sz="1300" b="1" dirty="0">
-                <a:solidFill>
-                  <a:srgbClr val="FFFFFF"/>
-                </a:solidFill>
-                <a:latin typeface="Calibri" pitchFamily="34" charset="0"/>
-                <a:ea typeface="Calibri" pitchFamily="34" charset="-122"/>
-                <a:cs typeface="Calibri" pitchFamily="34" charset="-120"/>
-              </a:rPr>
-              <a:t>Option A</a:t>
-            </a:r>
-            <a:endParaRPr lang="en-US" sz="1300" dirty="0"/>
-          </a:p>
-        </p:txBody>
-      </p:sp>
-      <p:sp>
-        <p:nvSpPr>
-          <p:cNvPr id="8" name="Text 5"/>
-          <p:cNvSpPr/>
-          <p:nvPr/>
-        </p:nvSpPr>
-        <p:spPr>
-          <a:xfrm>
-            <a:off x="429768" y="1536192"/>
-            <a:ext cx="2505456" cy="548640"/>
-          </a:xfrm>
-          <a:prstGeom prst="rect">
-            <a:avLst/>
-          </a:prstGeom>
-          <a:noFill/>
-          <a:ln/>
-        </p:spPr>
-        <p:txBody>
-          <a:bodyPr wrap="square" lIns="0" tIns="0" rIns="0" bIns="0" rtlCol="0" anchor="ctr"/>
-          <a:lstStyle/>
-          <a:p>
-            <a:pPr indent="0" marL="0">
-              <a:lnSpc>
-                <a:spcPct val="115000"/>
-              </a:lnSpc>
-              <a:buNone/>
-            </a:pPr>
-            <a:r>
-              <a:rPr lang="en-US" sz="1200" dirty="0">
-                <a:solidFill>
-                  <a:srgbClr val="FFFFFF"/>
-                </a:solidFill>
-                <a:latin typeface="Calibri" pitchFamily="34" charset="0"/>
-                <a:ea typeface="Calibri" pitchFamily="34" charset="-122"/>
-                <a:cs typeface="Calibri" pitchFamily="34" charset="-120"/>
-              </a:rPr>
-              <a:t>Agentic Prepayment Layer</a:t>
-            </a:r>
-            <a:endParaRPr lang="en-US" sz="1200" dirty="0"/>
-          </a:p>
-        </p:txBody>
-      </p:sp>
-      <p:sp>
-        <p:nvSpPr>
-          <p:cNvPr id="9" name="Shape 6"/>
-          <p:cNvSpPr/>
-          <p:nvPr/>
-        </p:nvSpPr>
-        <p:spPr>
-          <a:xfrm>
-            <a:off x="429768" y="2249424"/>
-            <a:ext cx="2487168" cy="274320"/>
-          </a:xfrm>
-          <a:prstGeom prst="roundRect">
-            <a:avLst>
-              <a:gd name="adj" fmla="val 20000"/>
-            </a:avLst>
-          </a:prstGeom>
-          <a:solidFill>
-            <a:srgbClr val="E9D5FF"/>
-          </a:solidFill>
-          <a:ln/>
-        </p:spPr>
-      </p:sp>
-      <p:sp>
-        <p:nvSpPr>
-          <p:cNvPr id="10" name="Text 7"/>
-          <p:cNvSpPr/>
-          <p:nvPr/>
-        </p:nvSpPr>
-        <p:spPr>
-          <a:xfrm>
-            <a:off x="466344" y="2267712"/>
-            <a:ext cx="2414016" cy="237744"/>
-          </a:xfrm>
-          <a:prstGeom prst="rect">
-            <a:avLst/>
-          </a:prstGeom>
-          <a:noFill/>
-          <a:ln/>
-        </p:spPr>
-        <p:txBody>
-          <a:bodyPr wrap="square" lIns="0" tIns="0" rIns="0" bIns="0" rtlCol="0" anchor="ctr"/>
-          <a:lstStyle/>
-          <a:p>
-            <a:pPr indent="0" marL="0">
-              <a:buNone/>
-            </a:pPr>
-            <a:r>
-              <a:rPr lang="en-US" sz="1000" b="1" dirty="0">
-                <a:solidFill>
-                  <a:srgbClr val="4A0080"/>
-                </a:solidFill>
-                <a:latin typeface="Calibri" pitchFamily="34" charset="0"/>
-                <a:ea typeface="Calibri" pitchFamily="34" charset="-122"/>
-                <a:cs typeface="Calibri" pitchFamily="34" charset="-120"/>
-              </a:rPr>
-              <a:t>Attach to Claim Pattern Review</a:t>
-            </a:r>
-            <a:endParaRPr lang="en-US" sz="1000" dirty="0"/>
-          </a:p>
-        </p:txBody>
-      </p:sp>
-      <p:sp>
-        <p:nvSpPr>
-          <p:cNvPr id="11" name="Text 8"/>
-          <p:cNvSpPr/>
-          <p:nvPr/>
-        </p:nvSpPr>
-        <p:spPr>
-          <a:xfrm>
-            <a:off x="429768" y="2596896"/>
-            <a:ext cx="2505456" cy="1207008"/>
-          </a:xfrm>
-          <a:prstGeom prst="rect">
-            <a:avLst/>
-          </a:prstGeom>
-          <a:noFill/>
-          <a:ln/>
-        </p:spPr>
-        <p:txBody>
-          <a:bodyPr wrap="square" lIns="0" tIns="0" rIns="0" bIns="0" rtlCol="0" anchor="ctr"/>
-          <a:lstStyle/>
-          <a:p>
-            <a:pPr indent="0" marL="0">
-              <a:lnSpc>
-                <a:spcPct val="125000"/>
-              </a:lnSpc>
-              <a:buNone/>
-            </a:pPr>
-            <a:r>
-              <a:rPr lang="en-US" sz="1100" dirty="0">
-                <a:solidFill>
-                  <a:srgbClr val="374151"/>
-                </a:solidFill>
-                <a:latin typeface="Calibri" pitchFamily="34" charset="0"/>
-                <a:ea typeface="Calibri" pitchFamily="34" charset="-122"/>
-                <a:cs typeface="Calibri" pitchFamily="34" charset="-120"/>
-              </a:rPr>
-              <a:t>Add a multi-agent LLM reasoning layer to Cotiviti's existing Claim Pattern Review. Each flagged claim gets a plain-English, CMS-cited rationale before it reaches a credentialed analyst.</a:t>
-            </a:r>
-            <a:endParaRPr lang="en-US" sz="1100" dirty="0"/>
-          </a:p>
-        </p:txBody>
-      </p:sp>
-      <p:sp>
-        <p:nvSpPr>
-          <p:cNvPr id="12" name="Shape 9"/>
-          <p:cNvSpPr/>
-          <p:nvPr/>
-        </p:nvSpPr>
-        <p:spPr>
-          <a:xfrm>
-            <a:off x="429768" y="3840480"/>
-            <a:ext cx="2505456" cy="914400"/>
-          </a:xfrm>
-          <a:prstGeom prst="roundRect">
-            <a:avLst>
-              <a:gd name="adj" fmla="val 8000"/>
-            </a:avLst>
-          </a:prstGeom>
-          <a:solidFill>
-            <a:srgbClr val="F7F5FF"/>
-          </a:solidFill>
-          <a:ln/>
-        </p:spPr>
-      </p:sp>
-      <p:sp>
-        <p:nvSpPr>
-          <p:cNvPr id="13" name="Text 10"/>
-          <p:cNvSpPr/>
-          <p:nvPr/>
-        </p:nvSpPr>
-        <p:spPr>
-          <a:xfrm>
-            <a:off x="502920" y="3877056"/>
-            <a:ext cx="2359152" cy="237744"/>
-          </a:xfrm>
-          <a:prstGeom prst="rect">
-            <a:avLst/>
-          </a:prstGeom>
-          <a:noFill/>
-          <a:ln/>
-        </p:spPr>
-        <p:txBody>
-          <a:bodyPr wrap="square" lIns="0" tIns="0" rIns="0" bIns="0" rtlCol="0" anchor="ctr"/>
-          <a:lstStyle/>
-          <a:p>
-            <a:pPr indent="0" marL="0">
-              <a:buNone/>
-            </a:pPr>
-            <a:r>
-              <a:rPr lang="en-US" sz="950" b="1" dirty="0">
-                <a:solidFill>
-                  <a:srgbClr val="6B21C8"/>
-                </a:solidFill>
-                <a:latin typeface="Calibri" pitchFamily="34" charset="0"/>
-                <a:ea typeface="Calibri" pitchFamily="34" charset="-122"/>
-                <a:cs typeface="Calibri" pitchFamily="34" charset="-120"/>
-              </a:rPr>
-              <a:t>Proven in PayGuard AI:</a:t>
-            </a:r>
-            <a:endParaRPr lang="en-US" sz="950" dirty="0"/>
-          </a:p>
-        </p:txBody>
-      </p:sp>
-      <p:sp>
-        <p:nvSpPr>
-          <p:cNvPr id="14" name="Text 11"/>
-          <p:cNvSpPr/>
-          <p:nvPr/>
-        </p:nvSpPr>
-        <p:spPr>
-          <a:xfrm>
-            <a:off x="502920" y="4096512"/>
-            <a:ext cx="2359152" cy="594360"/>
-          </a:xfrm>
-          <a:prstGeom prst="rect">
-            <a:avLst/>
-          </a:prstGeom>
-          <a:noFill/>
-          <a:ln/>
-        </p:spPr>
-        <p:txBody>
-          <a:bodyPr wrap="square" lIns="0" tIns="0" rIns="0" bIns="0" rtlCol="0" anchor="ctr"/>
-          <a:lstStyle/>
-          <a:p>
-            <a:pPr indent="0" marL="0">
-              <a:lnSpc>
-                <a:spcPct val="120000"/>
-              </a:lnSpc>
-              <a:buNone/>
-            </a:pPr>
-            <a:r>
-              <a:rPr lang="en-US" sz="950" dirty="0">
-                <a:solidFill>
-                  <a:srgbClr val="1A0533"/>
-                </a:solidFill>
-                <a:latin typeface="Calibri" pitchFamily="34" charset="0"/>
-                <a:ea typeface="Calibri" pitchFamily="34" charset="-122"/>
-                <a:cs typeface="Calibri" pitchFamily="34" charset="-120"/>
-              </a:rPr>
-              <a:t>Demonstrated end-to-end with live CMS API grounding and PDF audit export per claim.</a:t>
-            </a:r>
-            <a:endParaRPr lang="en-US" sz="950" dirty="0"/>
-          </a:p>
-        </p:txBody>
-      </p:sp>
-      <p:sp>
-        <p:nvSpPr>
-          <p:cNvPr id="15" name="Shape 12"/>
-          <p:cNvSpPr/>
-          <p:nvPr/>
-        </p:nvSpPr>
-        <p:spPr>
-          <a:xfrm>
-            <a:off x="3246120" y="1170432"/>
-            <a:ext cx="2724912" cy="3767328"/>
-          </a:xfrm>
-          <a:prstGeom prst="roundRect">
-            <a:avLst>
-              <a:gd name="adj" fmla="val 4698"/>
-            </a:avLst>
-          </a:prstGeom>
-          <a:solidFill>
-            <a:srgbClr val="FFFFFF"/>
-          </a:solidFill>
-          <a:ln/>
-          <a:effectLst>
-            <a:outerShdw sx="100000" sy="100000" kx="0" ky="0" algn="bl" rotWithShape="0" blurRad="101600" dist="38100" dir="2700000">
-              <a:srgbClr val="000000">
-                <a:alpha val="12000"/>
-              </a:srgbClr>
-            </a:outerShdw>
-          </a:effectLst>
-        </p:spPr>
-      </p:sp>
-      <p:sp>
-        <p:nvSpPr>
-          <p:cNvPr id="16" name="Shape 13"/>
-          <p:cNvSpPr/>
-          <p:nvPr/>
-        </p:nvSpPr>
-        <p:spPr>
-          <a:xfrm>
-            <a:off x="3246120" y="1170432"/>
-            <a:ext cx="2724912" cy="987552"/>
-          </a:xfrm>
-          <a:prstGeom prst="roundRect">
-            <a:avLst>
-              <a:gd name="adj" fmla="val 12963"/>
-            </a:avLst>
-          </a:prstGeom>
-          <a:solidFill>
-            <a:srgbClr val="F59E0B"/>
-          </a:solidFill>
-          <a:ln/>
-        </p:spPr>
-      </p:sp>
-      <p:pic>
-        <p:nvPicPr>
-          <p:cNvPr id="17" name="Image 1" descr="preencoded.png">    </p:cNvPr>
-          <p:cNvPicPr>
-            <a:picLocks noChangeAspect="1"/>
-          </p:cNvPicPr>
-          <p:nvPr/>
-        </p:nvPicPr>
-        <p:blipFill>
-          <a:blip r:embed="rId2"/>
-          <a:stretch>
-            <a:fillRect/>
-          </a:stretch>
-        </p:blipFill>
-        <p:spPr>
-          <a:xfrm>
-            <a:off x="3355848" y="1243584"/>
-            <a:ext cx="347472" cy="347472"/>
-          </a:xfrm>
-          <a:prstGeom prst="rect">
-            <a:avLst/>
-          </a:prstGeom>
-        </p:spPr>
-      </p:pic>
-      <p:sp>
-        <p:nvSpPr>
-          <p:cNvPr id="18" name="Text 14"/>
-          <p:cNvSpPr/>
-          <p:nvPr/>
-        </p:nvSpPr>
-        <p:spPr>
-          <a:xfrm>
-            <a:off x="3794760" y="1216152"/>
-            <a:ext cx="2066544" cy="320040"/>
-          </a:xfrm>
-          <a:prstGeom prst="rect">
-            <a:avLst/>
-          </a:prstGeom>
-          <a:noFill/>
-          <a:ln/>
-        </p:spPr>
-        <p:txBody>
-          <a:bodyPr wrap="square" lIns="0" tIns="0" rIns="0" bIns="0" rtlCol="0" anchor="ctr"/>
-          <a:lstStyle/>
-          <a:p>
-            <a:pPr indent="0" marL="0">
-              <a:buNone/>
-            </a:pPr>
-            <a:r>
-              <a:rPr lang="en-US" sz="1300" b="1" dirty="0">
-                <a:solidFill>
-                  <a:srgbClr val="FFFFFF"/>
-                </a:solidFill>
-                <a:latin typeface="Calibri" pitchFamily="34" charset="0"/>
-                <a:ea typeface="Calibri" pitchFamily="34" charset="-122"/>
-                <a:cs typeface="Calibri" pitchFamily="34" charset="-120"/>
-              </a:rPr>
-              <a:t>Option B</a:t>
-            </a:r>
-            <a:endParaRPr lang="en-US" sz="1300" dirty="0"/>
-          </a:p>
-        </p:txBody>
-      </p:sp>
-      <p:sp>
-        <p:nvSpPr>
-          <p:cNvPr id="19" name="Text 15"/>
-          <p:cNvSpPr/>
-          <p:nvPr/>
-        </p:nvSpPr>
-        <p:spPr>
-          <a:xfrm>
-            <a:off x="3355848" y="1536192"/>
-            <a:ext cx="2505456" cy="548640"/>
-          </a:xfrm>
-          <a:prstGeom prst="rect">
-            <a:avLst/>
-          </a:prstGeom>
-          <a:noFill/>
-          <a:ln/>
-        </p:spPr>
-        <p:txBody>
-          <a:bodyPr wrap="square" lIns="0" tIns="0" rIns="0" bIns="0" rtlCol="0" anchor="ctr"/>
-          <a:lstStyle/>
-          <a:p>
-            <a:pPr indent="0" marL="0">
-              <a:lnSpc>
-                <a:spcPct val="115000"/>
-              </a:lnSpc>
-              <a:buNone/>
-            </a:pPr>
-            <a:r>
-              <a:rPr lang="en-US" sz="1200" dirty="0">
-                <a:solidFill>
-                  <a:srgbClr val="FFFFFF"/>
-                </a:solidFill>
-                <a:latin typeface="Calibri" pitchFamily="34" charset="0"/>
-                <a:ea typeface="Calibri" pitchFamily="34" charset="-122"/>
-                <a:cs typeface="Calibri" pitchFamily="34" charset="-120"/>
-              </a:rPr>
-              <a:t>Policy-to-Rule Conversion</a:t>
-            </a:r>
-            <a:endParaRPr lang="en-US" sz="1200" dirty="0"/>
-          </a:p>
-        </p:txBody>
-      </p:sp>
-      <p:sp>
-        <p:nvSpPr>
-          <p:cNvPr id="20" name="Shape 16"/>
-          <p:cNvSpPr/>
-          <p:nvPr/>
-        </p:nvSpPr>
-        <p:spPr>
-          <a:xfrm>
-            <a:off x="3355848" y="2249424"/>
-            <a:ext cx="2487168" cy="274320"/>
-          </a:xfrm>
-          <a:prstGeom prst="roundRect">
-            <a:avLst>
-              <a:gd name="adj" fmla="val 20000"/>
-            </a:avLst>
-          </a:prstGeom>
-          <a:solidFill>
-            <a:srgbClr val="E9D5FF"/>
-          </a:solidFill>
-          <a:ln/>
-        </p:spPr>
-      </p:sp>
-      <p:sp>
-        <p:nvSpPr>
-          <p:cNvPr id="21" name="Text 17"/>
-          <p:cNvSpPr/>
-          <p:nvPr/>
-        </p:nvSpPr>
-        <p:spPr>
-          <a:xfrm>
-            <a:off x="3392424" y="2267712"/>
-            <a:ext cx="2414016" cy="237744"/>
-          </a:xfrm>
-          <a:prstGeom prst="rect">
-            <a:avLst/>
-          </a:prstGeom>
-          <a:noFill/>
-          <a:ln/>
-        </p:spPr>
-        <p:txBody>
-          <a:bodyPr wrap="square" lIns="0" tIns="0" rIns="0" bIns="0" rtlCol="0" anchor="ctr"/>
-          <a:lstStyle/>
-          <a:p>
-            <a:pPr indent="0" marL="0">
-              <a:buNone/>
-            </a:pPr>
-            <a:r>
-              <a:rPr lang="en-US" sz="1000" b="1" dirty="0">
-                <a:solidFill>
-                  <a:srgbClr val="4A0080"/>
-                </a:solidFill>
-                <a:latin typeface="Calibri" pitchFamily="34" charset="0"/>
-                <a:ea typeface="Calibri" pitchFamily="34" charset="-122"/>
-                <a:cs typeface="Calibri" pitchFamily="34" charset="-120"/>
-              </a:rPr>
-              <a:t>Compress edit library lag</a:t>
-            </a:r>
-            <a:endParaRPr lang="en-US" sz="1000" dirty="0"/>
-          </a:p>
-        </p:txBody>
-      </p:sp>
-      <p:sp>
-        <p:nvSpPr>
-          <p:cNvPr id="22" name="Text 18"/>
-          <p:cNvSpPr/>
-          <p:nvPr/>
-        </p:nvSpPr>
-        <p:spPr>
-          <a:xfrm>
-            <a:off x="3355848" y="2596896"/>
-            <a:ext cx="2505456" cy="1207008"/>
-          </a:xfrm>
-          <a:prstGeom prst="rect">
-            <a:avLst/>
-          </a:prstGeom>
-          <a:noFill/>
-          <a:ln/>
-        </p:spPr>
-        <p:txBody>
-          <a:bodyPr wrap="square" lIns="0" tIns="0" rIns="0" bIns="0" rtlCol="0" anchor="ctr"/>
-          <a:lstStyle/>
-          <a:p>
-            <a:pPr indent="0" marL="0">
-              <a:lnSpc>
-                <a:spcPct val="125000"/>
-              </a:lnSpc>
-              <a:buNone/>
-            </a:pPr>
-            <a:r>
-              <a:rPr lang="en-US" sz="1100" dirty="0">
-                <a:solidFill>
-                  <a:srgbClr val="374151"/>
-                </a:solidFill>
-                <a:latin typeface="Calibri" pitchFamily="34" charset="0"/>
-                <a:ea typeface="Calibri" pitchFamily="34" charset="-122"/>
-                <a:cs typeface="Calibri" pitchFamily="34" charset="-120"/>
-              </a:rPr>
-              <a:t>Build tooling to convert new CMS NCD/LCD prose into structured executable edits automatically. New policy becomes a live prepayment rule in minutes, not weeks.</a:t>
-            </a:r>
-            <a:endParaRPr lang="en-US" sz="1100" dirty="0"/>
-          </a:p>
-        </p:txBody>
-      </p:sp>
-      <p:sp>
-        <p:nvSpPr>
-          <p:cNvPr id="23" name="Shape 19"/>
-          <p:cNvSpPr/>
-          <p:nvPr/>
-        </p:nvSpPr>
-        <p:spPr>
-          <a:xfrm>
-            <a:off x="3355848" y="3840480"/>
-            <a:ext cx="2505456" cy="914400"/>
-          </a:xfrm>
-          <a:prstGeom prst="roundRect">
-            <a:avLst>
-              <a:gd name="adj" fmla="val 8000"/>
-            </a:avLst>
-          </a:prstGeom>
-          <a:solidFill>
-            <a:srgbClr val="F7F5FF"/>
-          </a:solidFill>
-          <a:ln/>
-        </p:spPr>
-      </p:sp>
-      <p:sp>
-        <p:nvSpPr>
-          <p:cNvPr id="24" name="Text 20"/>
-          <p:cNvSpPr/>
-          <p:nvPr/>
-        </p:nvSpPr>
-        <p:spPr>
-          <a:xfrm>
-            <a:off x="3429000" y="3877056"/>
-            <a:ext cx="2359152" cy="237744"/>
-          </a:xfrm>
-          <a:prstGeom prst="rect">
-            <a:avLst/>
-          </a:prstGeom>
-          <a:noFill/>
-          <a:ln/>
-        </p:spPr>
-        <p:txBody>
-          <a:bodyPr wrap="square" lIns="0" tIns="0" rIns="0" bIns="0" rtlCol="0" anchor="ctr"/>
-          <a:lstStyle/>
-          <a:p>
-            <a:pPr indent="0" marL="0">
-              <a:buNone/>
-            </a:pPr>
-            <a:r>
-              <a:rPr lang="en-US" sz="950" b="1" dirty="0">
-                <a:solidFill>
-                  <a:srgbClr val="6B21C8"/>
-                </a:solidFill>
-                <a:latin typeface="Calibri" pitchFamily="34" charset="0"/>
-                <a:ea typeface="Calibri" pitchFamily="34" charset="-122"/>
-                <a:cs typeface="Calibri" pitchFamily="34" charset="-120"/>
-              </a:rPr>
-              <a:t>Proven in PayGuard AI:</a:t>
-            </a:r>
-            <a:endParaRPr lang="en-US" sz="950" dirty="0"/>
-          </a:p>
-        </p:txBody>
-      </p:sp>
-      <p:sp>
-        <p:nvSpPr>
-          <p:cNvPr id="25" name="Text 21"/>
-          <p:cNvSpPr/>
-          <p:nvPr/>
-        </p:nvSpPr>
-        <p:spPr>
-          <a:xfrm>
-            <a:off x="3429000" y="4096512"/>
-            <a:ext cx="2359152" cy="594360"/>
-          </a:xfrm>
-          <a:prstGeom prst="rect">
-            <a:avLst/>
-          </a:prstGeom>
-          <a:noFill/>
-          <a:ln/>
-        </p:spPr>
-        <p:txBody>
-          <a:bodyPr wrap="square" lIns="0" tIns="0" rIns="0" bIns="0" rtlCol="0" anchor="ctr"/>
-          <a:lstStyle/>
-          <a:p>
-            <a:pPr indent="0" marL="0">
-              <a:lnSpc>
-                <a:spcPct val="120000"/>
-              </a:lnSpc>
-              <a:buNone/>
-            </a:pPr>
-            <a:r>
-              <a:rPr lang="en-US" sz="950" dirty="0">
-                <a:solidFill>
-                  <a:srgbClr val="1A0533"/>
-                </a:solidFill>
-                <a:latin typeface="Calibri" pitchFamily="34" charset="0"/>
-                <a:ea typeface="Calibri" pitchFamily="34" charset="-122"/>
-                <a:cs typeface="Calibri" pitchFamily="34" charset="-120"/>
-              </a:rPr>
-              <a:t>Prototyped via LLM-assisted policy-to-JSON converter feeding the deterministic rules engine.</a:t>
-            </a:r>
-            <a:endParaRPr lang="en-US" sz="950" dirty="0"/>
-          </a:p>
-        </p:txBody>
-      </p:sp>
-      <p:sp>
-        <p:nvSpPr>
-          <p:cNvPr id="26" name="Shape 22"/>
-          <p:cNvSpPr/>
-          <p:nvPr/>
-        </p:nvSpPr>
-        <p:spPr>
-          <a:xfrm>
-            <a:off x="6172200" y="1170432"/>
-            <a:ext cx="2724912" cy="3767328"/>
-          </a:xfrm>
-          <a:prstGeom prst="roundRect">
-            <a:avLst>
-              <a:gd name="adj" fmla="val 4698"/>
-            </a:avLst>
-          </a:prstGeom>
-          <a:solidFill>
-            <a:srgbClr val="FFFFFF"/>
-          </a:solidFill>
-          <a:ln/>
-          <a:effectLst>
-            <a:outerShdw sx="100000" sy="100000" kx="0" ky="0" algn="bl" rotWithShape="0" blurRad="101600" dist="38100" dir="2700000">
-              <a:srgbClr val="000000">
-                <a:alpha val="12000"/>
-              </a:srgbClr>
-            </a:outerShdw>
-          </a:effectLst>
-        </p:spPr>
-      </p:sp>
-      <p:sp>
-        <p:nvSpPr>
-          <p:cNvPr id="27" name="Shape 23"/>
-          <p:cNvSpPr/>
-          <p:nvPr/>
-        </p:nvSpPr>
-        <p:spPr>
-          <a:xfrm>
-            <a:off x="6172200" y="1170432"/>
-            <a:ext cx="2724912" cy="987552"/>
-          </a:xfrm>
-          <a:prstGeom prst="roundRect">
-            <a:avLst>
-              <a:gd name="adj" fmla="val 12963"/>
-            </a:avLst>
-          </a:prstGeom>
-          <a:solidFill>
-            <a:srgbClr val="0D9488"/>
-          </a:solidFill>
-          <a:ln/>
-        </p:spPr>
-      </p:sp>
-      <p:pic>
-        <p:nvPicPr>
-          <p:cNvPr id="28" name="Image 2" descr="preencoded.png">    </p:cNvPr>
+          <p:cNvPr id="6" name="Image 0" descr="preencoded.png"/>
           <p:cNvPicPr>
             <a:picLocks noChangeAspect="1"/>
           </p:cNvPicPr>
@@ -11333,7 +10895,7 @@
         </p:blipFill>
         <p:spPr>
           <a:xfrm>
-            <a:off x="6281928" y="1243584"/>
+            <a:off x="429768" y="1243584"/>
             <a:ext cx="347472" cy="347472"/>
           </a:xfrm>
           <a:prstGeom prst="rect">
@@ -11343,13 +10905,13 @@
       </p:pic>
       <p:sp>
         <p:nvSpPr>
-          <p:cNvPr id="29" name="Text 24"/>
-          <p:cNvSpPr/>
-          <p:nvPr/>
-        </p:nvSpPr>
-        <p:spPr>
-          <a:xfrm>
-            <a:off x="6720840" y="1216152"/>
+          <p:cNvPr id="7" name="Text 4"/>
+          <p:cNvSpPr/>
+          <p:nvPr/>
+        </p:nvSpPr>
+        <p:spPr>
+          <a:xfrm>
+            <a:off x="868680" y="1216152"/>
             <a:ext cx="2066544" cy="320040"/>
           </a:xfrm>
           <a:prstGeom prst="rect">
@@ -11362,7 +10924,7 @@
           <a:bodyPr wrap="square" lIns="0" tIns="0" rIns="0" bIns="0" rtlCol="0" anchor="ctr"/>
           <a:lstStyle/>
           <a:p>
-            <a:pPr indent="0" marL="0">
+            <a:pPr marL="0" indent="0">
               <a:buNone/>
             </a:pPr>
             <a:r>
@@ -11374,7 +10936,7 @@
                 <a:ea typeface="Calibri" pitchFamily="34" charset="-122"/>
                 <a:cs typeface="Calibri" pitchFamily="34" charset="-120"/>
               </a:rPr>
-              <a:t>Option C</a:t>
+              <a:t>Option A</a:t>
             </a:r>
             <a:endParaRPr lang="en-US" sz="1300" dirty="0"/>
           </a:p>
@@ -11382,13 +10944,13 @@
       </p:sp>
       <p:sp>
         <p:nvSpPr>
-          <p:cNvPr id="30" name="Text 25"/>
-          <p:cNvSpPr/>
-          <p:nvPr/>
-        </p:nvSpPr>
-        <p:spPr>
-          <a:xfrm>
-            <a:off x="6281928" y="1536192"/>
+          <p:cNvPr id="8" name="Text 5"/>
+          <p:cNvSpPr/>
+          <p:nvPr/>
+        </p:nvSpPr>
+        <p:spPr>
+          <a:xfrm>
+            <a:off x="429768" y="1536192"/>
             <a:ext cx="2505456" cy="548640"/>
           </a:xfrm>
           <a:prstGeom prst="rect">
@@ -11401,7 +10963,7 @@
           <a:bodyPr wrap="square" lIns="0" tIns="0" rIns="0" bIns="0" rtlCol="0" anchor="ctr"/>
           <a:lstStyle/>
           <a:p>
-            <a:pPr indent="0" marL="0">
+            <a:pPr marL="0" indent="0">
               <a:lnSpc>
                 <a:spcPct val="115000"/>
               </a:lnSpc>
@@ -11416,7 +10978,7 @@
                 <a:ea typeface="Calibri" pitchFamily="34" charset="-122"/>
                 <a:cs typeface="Calibri" pitchFamily="34" charset="-120"/>
               </a:rPr>
-              <a:t>Formal AI Governance Program</a:t>
+              <a:t>Agentic Prepayment Layer</a:t>
             </a:r>
             <a:endParaRPr lang="en-US" sz="1200" dirty="0"/>
           </a:p>
@@ -11424,13 +10986,13 @@
       </p:sp>
       <p:sp>
         <p:nvSpPr>
-          <p:cNvPr id="31" name="Shape 26"/>
-          <p:cNvSpPr/>
-          <p:nvPr/>
-        </p:nvSpPr>
-        <p:spPr>
-          <a:xfrm>
-            <a:off x="6281928" y="2249424"/>
+          <p:cNvPr id="9" name="Shape 6"/>
+          <p:cNvSpPr/>
+          <p:nvPr/>
+        </p:nvSpPr>
+        <p:spPr>
+          <a:xfrm>
+            <a:off x="429768" y="2249424"/>
             <a:ext cx="2487168" cy="274320"/>
           </a:xfrm>
           <a:prstGeom prst="roundRect">
@@ -11443,16 +11005,23 @@
           </a:solidFill>
           <a:ln/>
         </p:spPr>
-      </p:sp>
-      <p:sp>
-        <p:nvSpPr>
-          <p:cNvPr id="32" name="Text 27"/>
-          <p:cNvSpPr/>
-          <p:nvPr/>
-        </p:nvSpPr>
-        <p:spPr>
-          <a:xfrm>
-            <a:off x="6318504" y="2267712"/>
+        <p:txBody>
+          <a:bodyPr/>
+          <a:lstStyle/>
+          <a:p>
+            <a:endParaRPr lang="en-US"/>
+          </a:p>
+        </p:txBody>
+      </p:sp>
+      <p:sp>
+        <p:nvSpPr>
+          <p:cNvPr id="10" name="Text 7"/>
+          <p:cNvSpPr/>
+          <p:nvPr/>
+        </p:nvSpPr>
+        <p:spPr>
+          <a:xfrm>
+            <a:off x="466344" y="2267712"/>
             <a:ext cx="2414016" cy="237744"/>
           </a:xfrm>
           <a:prstGeom prst="rect">
@@ -11465,7 +11034,7 @@
           <a:bodyPr wrap="square" lIns="0" tIns="0" rIns="0" bIns="0" rtlCol="0" anchor="ctr"/>
           <a:lstStyle/>
           <a:p>
-            <a:pPr indent="0" marL="0">
+            <a:pPr marL="0" indent="0">
               <a:buNone/>
             </a:pPr>
             <a:r>
@@ -11477,7 +11046,7 @@
                 <a:ea typeface="Calibri" pitchFamily="34" charset="-122"/>
                 <a:cs typeface="Calibri" pitchFamily="34" charset="-120"/>
               </a:rPr>
-              <a:t>Client-facing differentiator</a:t>
+              <a:t>Attach to Claim Pattern Review</a:t>
             </a:r>
             <a:endParaRPr lang="en-US" sz="1000" dirty="0"/>
           </a:p>
@@ -11485,13 +11054,13 @@
       </p:sp>
       <p:sp>
         <p:nvSpPr>
-          <p:cNvPr id="33" name="Text 28"/>
-          <p:cNvSpPr/>
-          <p:nvPr/>
-        </p:nvSpPr>
-        <p:spPr>
-          <a:xfrm>
-            <a:off x="6281928" y="2596896"/>
+          <p:cNvPr id="11" name="Text 8"/>
+          <p:cNvSpPr/>
+          <p:nvPr/>
+        </p:nvSpPr>
+        <p:spPr>
+          <a:xfrm>
+            <a:off x="429768" y="2596896"/>
             <a:ext cx="2505456" cy="1207008"/>
           </a:xfrm>
           <a:prstGeom prst="rect">
@@ -11504,7 +11073,7 @@
           <a:bodyPr wrap="square" lIns="0" tIns="0" rIns="0" bIns="0" rtlCol="0" anchor="ctr"/>
           <a:lstStyle/>
           <a:p>
-            <a:pPr indent="0" marL="0">
+            <a:pPr marL="0" indent="0">
               <a:lnSpc>
                 <a:spcPct val="125000"/>
               </a:lnSpc>
@@ -11519,7 +11088,7 @@
                 <a:ea typeface="Calibri" pitchFamily="34" charset="-122"/>
                 <a:cs typeface="Calibri" pitchFamily="34" charset="-120"/>
               </a:rPr>
-              <a:t>Formalize and publish a governance framework: human-in-the-loop requirements, PHI safeguards, bias monitoring, drift alerting, and accuracy benchmarking vs. ground truth.</a:t>
+              <a:t>Add a multi-agent LLM reasoning layer to Cotiviti's existing Claim Pattern Review. Each flagged claim gets a plain-English, CMS-cited rationale before it reaches a credentialed analyst.</a:t>
             </a:r>
             <a:endParaRPr lang="en-US" sz="1100" dirty="0"/>
           </a:p>
@@ -11527,13 +11096,13 @@
       </p:sp>
       <p:sp>
         <p:nvSpPr>
-          <p:cNvPr id="34" name="Shape 29"/>
-          <p:cNvSpPr/>
-          <p:nvPr/>
-        </p:nvSpPr>
-        <p:spPr>
-          <a:xfrm>
-            <a:off x="6281928" y="3840480"/>
+          <p:cNvPr id="12" name="Shape 9"/>
+          <p:cNvSpPr/>
+          <p:nvPr/>
+        </p:nvSpPr>
+        <p:spPr>
+          <a:xfrm>
+            <a:off x="429768" y="3840480"/>
             <a:ext cx="2505456" cy="914400"/>
           </a:xfrm>
           <a:prstGeom prst="roundRect">
@@ -11546,6 +11115,793 @@
           </a:solidFill>
           <a:ln/>
         </p:spPr>
+        <p:txBody>
+          <a:bodyPr/>
+          <a:lstStyle/>
+          <a:p>
+            <a:endParaRPr lang="en-US"/>
+          </a:p>
+        </p:txBody>
+      </p:sp>
+      <p:sp>
+        <p:nvSpPr>
+          <p:cNvPr id="13" name="Text 10"/>
+          <p:cNvSpPr/>
+          <p:nvPr/>
+        </p:nvSpPr>
+        <p:spPr>
+          <a:xfrm>
+            <a:off x="502920" y="3877056"/>
+            <a:ext cx="2359152" cy="237744"/>
+          </a:xfrm>
+          <a:prstGeom prst="rect">
+            <a:avLst/>
+          </a:prstGeom>
+          <a:noFill/>
+          <a:ln/>
+        </p:spPr>
+        <p:txBody>
+          <a:bodyPr wrap="square" lIns="0" tIns="0" rIns="0" bIns="0" rtlCol="0" anchor="ctr"/>
+          <a:lstStyle/>
+          <a:p>
+            <a:pPr marL="0" indent="0">
+              <a:buNone/>
+            </a:pPr>
+            <a:r>
+              <a:rPr lang="en-US" sz="950" b="1" dirty="0">
+                <a:solidFill>
+                  <a:srgbClr val="6B21C8"/>
+                </a:solidFill>
+                <a:latin typeface="Calibri" pitchFamily="34" charset="0"/>
+                <a:ea typeface="Calibri" pitchFamily="34" charset="-122"/>
+                <a:cs typeface="Calibri" pitchFamily="34" charset="-120"/>
+              </a:rPr>
+              <a:t>Proven in PayGuard AI:</a:t>
+            </a:r>
+            <a:endParaRPr lang="en-US" sz="950" dirty="0"/>
+          </a:p>
+        </p:txBody>
+      </p:sp>
+      <p:sp>
+        <p:nvSpPr>
+          <p:cNvPr id="14" name="Text 11"/>
+          <p:cNvSpPr/>
+          <p:nvPr/>
+        </p:nvSpPr>
+        <p:spPr>
+          <a:xfrm>
+            <a:off x="502920" y="4096512"/>
+            <a:ext cx="2359152" cy="594360"/>
+          </a:xfrm>
+          <a:prstGeom prst="rect">
+            <a:avLst/>
+          </a:prstGeom>
+          <a:noFill/>
+          <a:ln/>
+        </p:spPr>
+        <p:txBody>
+          <a:bodyPr wrap="square" lIns="0" tIns="0" rIns="0" bIns="0" rtlCol="0" anchor="ctr"/>
+          <a:lstStyle/>
+          <a:p>
+            <a:pPr marL="0" indent="0">
+              <a:lnSpc>
+                <a:spcPct val="120000"/>
+              </a:lnSpc>
+              <a:buNone/>
+            </a:pPr>
+            <a:r>
+              <a:rPr lang="en-US" sz="950" dirty="0">
+                <a:solidFill>
+                  <a:srgbClr val="1A0533"/>
+                </a:solidFill>
+                <a:latin typeface="Calibri" pitchFamily="34" charset="0"/>
+                <a:ea typeface="Calibri" pitchFamily="34" charset="-122"/>
+                <a:cs typeface="Calibri" pitchFamily="34" charset="-120"/>
+              </a:rPr>
+              <a:t>Demonstrated end-to-end with live CMS API grounding and PDF audit export per claim.</a:t>
+            </a:r>
+            <a:endParaRPr lang="en-US" sz="950" dirty="0"/>
+          </a:p>
+        </p:txBody>
+      </p:sp>
+      <p:sp>
+        <p:nvSpPr>
+          <p:cNvPr id="15" name="Shape 12"/>
+          <p:cNvSpPr/>
+          <p:nvPr/>
+        </p:nvSpPr>
+        <p:spPr>
+          <a:xfrm>
+            <a:off x="3246120" y="1170432"/>
+            <a:ext cx="2724912" cy="3767328"/>
+          </a:xfrm>
+          <a:prstGeom prst="roundRect">
+            <a:avLst>
+              <a:gd name="adj" fmla="val 4698"/>
+            </a:avLst>
+          </a:prstGeom>
+          <a:solidFill>
+            <a:srgbClr val="FFFFFF"/>
+          </a:solidFill>
+          <a:ln/>
+          <a:effectLst>
+            <a:outerShdw blurRad="101600" dist="38100" dir="2700000" algn="bl" rotWithShape="0">
+              <a:srgbClr val="000000">
+                <a:alpha val="12000"/>
+              </a:srgbClr>
+            </a:outerShdw>
+          </a:effectLst>
+        </p:spPr>
+        <p:txBody>
+          <a:bodyPr/>
+          <a:lstStyle/>
+          <a:p>
+            <a:endParaRPr lang="en-US"/>
+          </a:p>
+        </p:txBody>
+      </p:sp>
+      <p:sp>
+        <p:nvSpPr>
+          <p:cNvPr id="16" name="Shape 13"/>
+          <p:cNvSpPr/>
+          <p:nvPr/>
+        </p:nvSpPr>
+        <p:spPr>
+          <a:xfrm>
+            <a:off x="3246120" y="1170432"/>
+            <a:ext cx="2724912" cy="987552"/>
+          </a:xfrm>
+          <a:prstGeom prst="roundRect">
+            <a:avLst>
+              <a:gd name="adj" fmla="val 12963"/>
+            </a:avLst>
+          </a:prstGeom>
+          <a:solidFill>
+            <a:srgbClr val="F59E0B"/>
+          </a:solidFill>
+          <a:ln/>
+        </p:spPr>
+        <p:txBody>
+          <a:bodyPr/>
+          <a:lstStyle/>
+          <a:p>
+            <a:endParaRPr lang="en-US"/>
+          </a:p>
+        </p:txBody>
+      </p:sp>
+      <p:pic>
+        <p:nvPicPr>
+          <p:cNvPr id="17" name="Image 1" descr="preencoded.png"/>
+          <p:cNvPicPr>
+            <a:picLocks noChangeAspect="1"/>
+          </p:cNvPicPr>
+          <p:nvPr/>
+        </p:nvPicPr>
+        <p:blipFill>
+          <a:blip r:embed="rId4"/>
+          <a:stretch>
+            <a:fillRect/>
+          </a:stretch>
+        </p:blipFill>
+        <p:spPr>
+          <a:xfrm>
+            <a:off x="3355848" y="1243584"/>
+            <a:ext cx="347472" cy="347472"/>
+          </a:xfrm>
+          <a:prstGeom prst="rect">
+            <a:avLst/>
+          </a:prstGeom>
+        </p:spPr>
+      </p:pic>
+      <p:sp>
+        <p:nvSpPr>
+          <p:cNvPr id="18" name="Text 14"/>
+          <p:cNvSpPr/>
+          <p:nvPr/>
+        </p:nvSpPr>
+        <p:spPr>
+          <a:xfrm>
+            <a:off x="3794760" y="1216152"/>
+            <a:ext cx="2066544" cy="320040"/>
+          </a:xfrm>
+          <a:prstGeom prst="rect">
+            <a:avLst/>
+          </a:prstGeom>
+          <a:noFill/>
+          <a:ln/>
+        </p:spPr>
+        <p:txBody>
+          <a:bodyPr wrap="square" lIns="0" tIns="0" rIns="0" bIns="0" rtlCol="0" anchor="ctr"/>
+          <a:lstStyle/>
+          <a:p>
+            <a:pPr marL="0" indent="0">
+              <a:buNone/>
+            </a:pPr>
+            <a:r>
+              <a:rPr lang="en-US" sz="1300" b="1" dirty="0">
+                <a:solidFill>
+                  <a:srgbClr val="FFFFFF"/>
+                </a:solidFill>
+                <a:latin typeface="Calibri" pitchFamily="34" charset="0"/>
+                <a:ea typeface="Calibri" pitchFamily="34" charset="-122"/>
+                <a:cs typeface="Calibri" pitchFamily="34" charset="-120"/>
+              </a:rPr>
+              <a:t>Option B</a:t>
+            </a:r>
+            <a:endParaRPr lang="en-US" sz="1300" dirty="0"/>
+          </a:p>
+        </p:txBody>
+      </p:sp>
+      <p:sp>
+        <p:nvSpPr>
+          <p:cNvPr id="19" name="Text 15"/>
+          <p:cNvSpPr/>
+          <p:nvPr/>
+        </p:nvSpPr>
+        <p:spPr>
+          <a:xfrm>
+            <a:off x="3355848" y="1536192"/>
+            <a:ext cx="2505456" cy="548640"/>
+          </a:xfrm>
+          <a:prstGeom prst="rect">
+            <a:avLst/>
+          </a:prstGeom>
+          <a:noFill/>
+          <a:ln/>
+        </p:spPr>
+        <p:txBody>
+          <a:bodyPr wrap="square" lIns="0" tIns="0" rIns="0" bIns="0" rtlCol="0" anchor="ctr"/>
+          <a:lstStyle/>
+          <a:p>
+            <a:pPr marL="0" indent="0">
+              <a:lnSpc>
+                <a:spcPct val="115000"/>
+              </a:lnSpc>
+              <a:buNone/>
+            </a:pPr>
+            <a:r>
+              <a:rPr lang="en-US" sz="1200" dirty="0">
+                <a:solidFill>
+                  <a:srgbClr val="FFFFFF"/>
+                </a:solidFill>
+                <a:latin typeface="Calibri" pitchFamily="34" charset="0"/>
+                <a:ea typeface="Calibri" pitchFamily="34" charset="-122"/>
+                <a:cs typeface="Calibri" pitchFamily="34" charset="-120"/>
+              </a:rPr>
+              <a:t>Policy-to-Rule Conversion</a:t>
+            </a:r>
+            <a:endParaRPr lang="en-US" sz="1200" dirty="0"/>
+          </a:p>
+        </p:txBody>
+      </p:sp>
+      <p:sp>
+        <p:nvSpPr>
+          <p:cNvPr id="20" name="Shape 16"/>
+          <p:cNvSpPr/>
+          <p:nvPr/>
+        </p:nvSpPr>
+        <p:spPr>
+          <a:xfrm>
+            <a:off x="3355848" y="2249424"/>
+            <a:ext cx="2487168" cy="274320"/>
+          </a:xfrm>
+          <a:prstGeom prst="roundRect">
+            <a:avLst>
+              <a:gd name="adj" fmla="val 20000"/>
+            </a:avLst>
+          </a:prstGeom>
+          <a:solidFill>
+            <a:srgbClr val="E9D5FF"/>
+          </a:solidFill>
+          <a:ln/>
+        </p:spPr>
+        <p:txBody>
+          <a:bodyPr/>
+          <a:lstStyle/>
+          <a:p>
+            <a:endParaRPr lang="en-US"/>
+          </a:p>
+        </p:txBody>
+      </p:sp>
+      <p:sp>
+        <p:nvSpPr>
+          <p:cNvPr id="21" name="Text 17"/>
+          <p:cNvSpPr/>
+          <p:nvPr/>
+        </p:nvSpPr>
+        <p:spPr>
+          <a:xfrm>
+            <a:off x="3392424" y="2267712"/>
+            <a:ext cx="2414016" cy="237744"/>
+          </a:xfrm>
+          <a:prstGeom prst="rect">
+            <a:avLst/>
+          </a:prstGeom>
+          <a:noFill/>
+          <a:ln/>
+        </p:spPr>
+        <p:txBody>
+          <a:bodyPr wrap="square" lIns="0" tIns="0" rIns="0" bIns="0" rtlCol="0" anchor="ctr"/>
+          <a:lstStyle/>
+          <a:p>
+            <a:pPr marL="0" indent="0">
+              <a:buNone/>
+            </a:pPr>
+            <a:r>
+              <a:rPr lang="en-US" sz="1000" b="1" dirty="0">
+                <a:solidFill>
+                  <a:srgbClr val="4A0080"/>
+                </a:solidFill>
+                <a:latin typeface="Calibri" pitchFamily="34" charset="0"/>
+                <a:ea typeface="Calibri" pitchFamily="34" charset="-122"/>
+                <a:cs typeface="Calibri" pitchFamily="34" charset="-120"/>
+              </a:rPr>
+              <a:t>Compress edit library lag</a:t>
+            </a:r>
+            <a:endParaRPr lang="en-US" sz="1000" dirty="0"/>
+          </a:p>
+        </p:txBody>
+      </p:sp>
+      <p:sp>
+        <p:nvSpPr>
+          <p:cNvPr id="22" name="Text 18"/>
+          <p:cNvSpPr/>
+          <p:nvPr/>
+        </p:nvSpPr>
+        <p:spPr>
+          <a:xfrm>
+            <a:off x="3355848" y="2596896"/>
+            <a:ext cx="2505456" cy="1207008"/>
+          </a:xfrm>
+          <a:prstGeom prst="rect">
+            <a:avLst/>
+          </a:prstGeom>
+          <a:noFill/>
+          <a:ln/>
+        </p:spPr>
+        <p:txBody>
+          <a:bodyPr wrap="square" lIns="0" tIns="0" rIns="0" bIns="0" rtlCol="0" anchor="ctr"/>
+          <a:lstStyle/>
+          <a:p>
+            <a:pPr marL="0" indent="0">
+              <a:lnSpc>
+                <a:spcPct val="125000"/>
+              </a:lnSpc>
+              <a:buNone/>
+            </a:pPr>
+            <a:r>
+              <a:rPr lang="en-US" sz="1100" dirty="0">
+                <a:solidFill>
+                  <a:srgbClr val="374151"/>
+                </a:solidFill>
+                <a:latin typeface="Calibri" pitchFamily="34" charset="0"/>
+                <a:ea typeface="Calibri" pitchFamily="34" charset="-122"/>
+                <a:cs typeface="Calibri" pitchFamily="34" charset="-120"/>
+              </a:rPr>
+              <a:t>Build tooling to convert new CMS NCD/LCD prose into structured executable edits automatically. New policy becomes a live prepayment rule in minutes, not weeks.</a:t>
+            </a:r>
+            <a:endParaRPr lang="en-US" sz="1100" dirty="0"/>
+          </a:p>
+        </p:txBody>
+      </p:sp>
+      <p:sp>
+        <p:nvSpPr>
+          <p:cNvPr id="23" name="Shape 19"/>
+          <p:cNvSpPr/>
+          <p:nvPr/>
+        </p:nvSpPr>
+        <p:spPr>
+          <a:xfrm>
+            <a:off x="3355848" y="3840480"/>
+            <a:ext cx="2505456" cy="914400"/>
+          </a:xfrm>
+          <a:prstGeom prst="roundRect">
+            <a:avLst>
+              <a:gd name="adj" fmla="val 8000"/>
+            </a:avLst>
+          </a:prstGeom>
+          <a:solidFill>
+            <a:srgbClr val="F7F5FF"/>
+          </a:solidFill>
+          <a:ln/>
+        </p:spPr>
+        <p:txBody>
+          <a:bodyPr/>
+          <a:lstStyle/>
+          <a:p>
+            <a:endParaRPr lang="en-US"/>
+          </a:p>
+        </p:txBody>
+      </p:sp>
+      <p:sp>
+        <p:nvSpPr>
+          <p:cNvPr id="24" name="Text 20"/>
+          <p:cNvSpPr/>
+          <p:nvPr/>
+        </p:nvSpPr>
+        <p:spPr>
+          <a:xfrm>
+            <a:off x="3429000" y="3877056"/>
+            <a:ext cx="2359152" cy="237744"/>
+          </a:xfrm>
+          <a:prstGeom prst="rect">
+            <a:avLst/>
+          </a:prstGeom>
+          <a:noFill/>
+          <a:ln/>
+        </p:spPr>
+        <p:txBody>
+          <a:bodyPr wrap="square" lIns="0" tIns="0" rIns="0" bIns="0" rtlCol="0" anchor="ctr"/>
+          <a:lstStyle/>
+          <a:p>
+            <a:pPr marL="0" indent="0">
+              <a:buNone/>
+            </a:pPr>
+            <a:r>
+              <a:rPr lang="en-US" sz="950" b="1" dirty="0">
+                <a:solidFill>
+                  <a:srgbClr val="6B21C8"/>
+                </a:solidFill>
+                <a:latin typeface="Calibri" pitchFamily="34" charset="0"/>
+                <a:ea typeface="Calibri" pitchFamily="34" charset="-122"/>
+                <a:cs typeface="Calibri" pitchFamily="34" charset="-120"/>
+              </a:rPr>
+              <a:t>Proven in PayGuard AI:</a:t>
+            </a:r>
+            <a:endParaRPr lang="en-US" sz="950" dirty="0"/>
+          </a:p>
+        </p:txBody>
+      </p:sp>
+      <p:sp>
+        <p:nvSpPr>
+          <p:cNvPr id="25" name="Text 21"/>
+          <p:cNvSpPr/>
+          <p:nvPr/>
+        </p:nvSpPr>
+        <p:spPr>
+          <a:xfrm>
+            <a:off x="3429000" y="4096512"/>
+            <a:ext cx="2359152" cy="594360"/>
+          </a:xfrm>
+          <a:prstGeom prst="rect">
+            <a:avLst/>
+          </a:prstGeom>
+          <a:noFill/>
+          <a:ln/>
+        </p:spPr>
+        <p:txBody>
+          <a:bodyPr wrap="square" lIns="0" tIns="0" rIns="0" bIns="0" rtlCol="0" anchor="ctr"/>
+          <a:lstStyle/>
+          <a:p>
+            <a:pPr marL="0" indent="0">
+              <a:lnSpc>
+                <a:spcPct val="120000"/>
+              </a:lnSpc>
+              <a:buNone/>
+            </a:pPr>
+            <a:r>
+              <a:rPr lang="en-US" sz="950" dirty="0">
+                <a:solidFill>
+                  <a:srgbClr val="1A0533"/>
+                </a:solidFill>
+                <a:latin typeface="Calibri" pitchFamily="34" charset="0"/>
+                <a:ea typeface="Calibri" pitchFamily="34" charset="-122"/>
+                <a:cs typeface="Calibri" pitchFamily="34" charset="-120"/>
+              </a:rPr>
+              <a:t>Prototyped via LLM-assisted policy-to-JSON converter feeding the deterministic rules engine.</a:t>
+            </a:r>
+            <a:endParaRPr lang="en-US" sz="950" dirty="0"/>
+          </a:p>
+        </p:txBody>
+      </p:sp>
+      <p:sp>
+        <p:nvSpPr>
+          <p:cNvPr id="26" name="Shape 22"/>
+          <p:cNvSpPr/>
+          <p:nvPr/>
+        </p:nvSpPr>
+        <p:spPr>
+          <a:xfrm>
+            <a:off x="6172200" y="1170432"/>
+            <a:ext cx="2724912" cy="3767328"/>
+          </a:xfrm>
+          <a:prstGeom prst="roundRect">
+            <a:avLst>
+              <a:gd name="adj" fmla="val 4698"/>
+            </a:avLst>
+          </a:prstGeom>
+          <a:solidFill>
+            <a:srgbClr val="FFFFFF"/>
+          </a:solidFill>
+          <a:ln/>
+          <a:effectLst>
+            <a:outerShdw blurRad="101600" dist="38100" dir="2700000" algn="bl" rotWithShape="0">
+              <a:srgbClr val="000000">
+                <a:alpha val="12000"/>
+              </a:srgbClr>
+            </a:outerShdw>
+          </a:effectLst>
+        </p:spPr>
+        <p:txBody>
+          <a:bodyPr/>
+          <a:lstStyle/>
+          <a:p>
+            <a:endParaRPr lang="en-US"/>
+          </a:p>
+        </p:txBody>
+      </p:sp>
+      <p:sp>
+        <p:nvSpPr>
+          <p:cNvPr id="27" name="Shape 23"/>
+          <p:cNvSpPr/>
+          <p:nvPr/>
+        </p:nvSpPr>
+        <p:spPr>
+          <a:xfrm>
+            <a:off x="6172200" y="1170432"/>
+            <a:ext cx="2724912" cy="987552"/>
+          </a:xfrm>
+          <a:prstGeom prst="roundRect">
+            <a:avLst>
+              <a:gd name="adj" fmla="val 12963"/>
+            </a:avLst>
+          </a:prstGeom>
+          <a:solidFill>
+            <a:srgbClr val="0D9488"/>
+          </a:solidFill>
+          <a:ln/>
+        </p:spPr>
+        <p:txBody>
+          <a:bodyPr/>
+          <a:lstStyle/>
+          <a:p>
+            <a:endParaRPr lang="en-US"/>
+          </a:p>
+        </p:txBody>
+      </p:sp>
+      <p:pic>
+        <p:nvPicPr>
+          <p:cNvPr id="28" name="Image 2" descr="preencoded.png"/>
+          <p:cNvPicPr>
+            <a:picLocks noChangeAspect="1"/>
+          </p:cNvPicPr>
+          <p:nvPr/>
+        </p:nvPicPr>
+        <p:blipFill>
+          <a:blip r:embed="rId5"/>
+          <a:stretch>
+            <a:fillRect/>
+          </a:stretch>
+        </p:blipFill>
+        <p:spPr>
+          <a:xfrm>
+            <a:off x="6281928" y="1243584"/>
+            <a:ext cx="347472" cy="347472"/>
+          </a:xfrm>
+          <a:prstGeom prst="rect">
+            <a:avLst/>
+          </a:prstGeom>
+        </p:spPr>
+      </p:pic>
+      <p:sp>
+        <p:nvSpPr>
+          <p:cNvPr id="29" name="Text 24"/>
+          <p:cNvSpPr/>
+          <p:nvPr/>
+        </p:nvSpPr>
+        <p:spPr>
+          <a:xfrm>
+            <a:off x="6720840" y="1216152"/>
+            <a:ext cx="2066544" cy="320040"/>
+          </a:xfrm>
+          <a:prstGeom prst="rect">
+            <a:avLst/>
+          </a:prstGeom>
+          <a:noFill/>
+          <a:ln/>
+        </p:spPr>
+        <p:txBody>
+          <a:bodyPr wrap="square" lIns="0" tIns="0" rIns="0" bIns="0" rtlCol="0" anchor="ctr"/>
+          <a:lstStyle/>
+          <a:p>
+            <a:pPr marL="0" indent="0">
+              <a:buNone/>
+            </a:pPr>
+            <a:r>
+              <a:rPr lang="en-US" sz="1300" b="1" dirty="0">
+                <a:solidFill>
+                  <a:srgbClr val="FFFFFF"/>
+                </a:solidFill>
+                <a:latin typeface="Calibri" pitchFamily="34" charset="0"/>
+                <a:ea typeface="Calibri" pitchFamily="34" charset="-122"/>
+                <a:cs typeface="Calibri" pitchFamily="34" charset="-120"/>
+              </a:rPr>
+              <a:t>Option C</a:t>
+            </a:r>
+            <a:endParaRPr lang="en-US" sz="1300" dirty="0"/>
+          </a:p>
+        </p:txBody>
+      </p:sp>
+      <p:sp>
+        <p:nvSpPr>
+          <p:cNvPr id="30" name="Text 25"/>
+          <p:cNvSpPr/>
+          <p:nvPr/>
+        </p:nvSpPr>
+        <p:spPr>
+          <a:xfrm>
+            <a:off x="6281928" y="1536192"/>
+            <a:ext cx="2505456" cy="548640"/>
+          </a:xfrm>
+          <a:prstGeom prst="rect">
+            <a:avLst/>
+          </a:prstGeom>
+          <a:noFill/>
+          <a:ln/>
+        </p:spPr>
+        <p:txBody>
+          <a:bodyPr wrap="square" lIns="0" tIns="0" rIns="0" bIns="0" rtlCol="0" anchor="ctr"/>
+          <a:lstStyle/>
+          <a:p>
+            <a:pPr marL="0" indent="0">
+              <a:lnSpc>
+                <a:spcPct val="115000"/>
+              </a:lnSpc>
+              <a:buNone/>
+            </a:pPr>
+            <a:r>
+              <a:rPr lang="en-US" sz="1200" dirty="0">
+                <a:solidFill>
+                  <a:srgbClr val="FFFFFF"/>
+                </a:solidFill>
+                <a:latin typeface="Calibri" pitchFamily="34" charset="0"/>
+                <a:ea typeface="Calibri" pitchFamily="34" charset="-122"/>
+                <a:cs typeface="Calibri" pitchFamily="34" charset="-120"/>
+              </a:rPr>
+              <a:t>Formal AI Governance Program</a:t>
+            </a:r>
+            <a:endParaRPr lang="en-US" sz="1200" dirty="0"/>
+          </a:p>
+        </p:txBody>
+      </p:sp>
+      <p:sp>
+        <p:nvSpPr>
+          <p:cNvPr id="31" name="Shape 26"/>
+          <p:cNvSpPr/>
+          <p:nvPr/>
+        </p:nvSpPr>
+        <p:spPr>
+          <a:xfrm>
+            <a:off x="6281928" y="2249424"/>
+            <a:ext cx="2487168" cy="274320"/>
+          </a:xfrm>
+          <a:prstGeom prst="roundRect">
+            <a:avLst>
+              <a:gd name="adj" fmla="val 20000"/>
+            </a:avLst>
+          </a:prstGeom>
+          <a:solidFill>
+            <a:srgbClr val="E9D5FF"/>
+          </a:solidFill>
+          <a:ln/>
+        </p:spPr>
+        <p:txBody>
+          <a:bodyPr/>
+          <a:lstStyle/>
+          <a:p>
+            <a:endParaRPr lang="en-US"/>
+          </a:p>
+        </p:txBody>
+      </p:sp>
+      <p:sp>
+        <p:nvSpPr>
+          <p:cNvPr id="32" name="Text 27"/>
+          <p:cNvSpPr/>
+          <p:nvPr/>
+        </p:nvSpPr>
+        <p:spPr>
+          <a:xfrm>
+            <a:off x="6318504" y="2267712"/>
+            <a:ext cx="2414016" cy="237744"/>
+          </a:xfrm>
+          <a:prstGeom prst="rect">
+            <a:avLst/>
+          </a:prstGeom>
+          <a:noFill/>
+          <a:ln/>
+        </p:spPr>
+        <p:txBody>
+          <a:bodyPr wrap="square" lIns="0" tIns="0" rIns="0" bIns="0" rtlCol="0" anchor="ctr"/>
+          <a:lstStyle/>
+          <a:p>
+            <a:pPr marL="0" indent="0">
+              <a:buNone/>
+            </a:pPr>
+            <a:r>
+              <a:rPr lang="en-US" sz="1000" b="1" dirty="0">
+                <a:solidFill>
+                  <a:srgbClr val="4A0080"/>
+                </a:solidFill>
+                <a:latin typeface="Calibri" pitchFamily="34" charset="0"/>
+                <a:ea typeface="Calibri" pitchFamily="34" charset="-122"/>
+                <a:cs typeface="Calibri" pitchFamily="34" charset="-120"/>
+              </a:rPr>
+              <a:t>Client-facing differentiator</a:t>
+            </a:r>
+            <a:endParaRPr lang="en-US" sz="1000" dirty="0"/>
+          </a:p>
+        </p:txBody>
+      </p:sp>
+      <p:sp>
+        <p:nvSpPr>
+          <p:cNvPr id="33" name="Text 28"/>
+          <p:cNvSpPr/>
+          <p:nvPr/>
+        </p:nvSpPr>
+        <p:spPr>
+          <a:xfrm>
+            <a:off x="6281928" y="2596896"/>
+            <a:ext cx="2505456" cy="1207008"/>
+          </a:xfrm>
+          <a:prstGeom prst="rect">
+            <a:avLst/>
+          </a:prstGeom>
+          <a:noFill/>
+          <a:ln/>
+        </p:spPr>
+        <p:txBody>
+          <a:bodyPr wrap="square" lIns="0" tIns="0" rIns="0" bIns="0" rtlCol="0" anchor="ctr"/>
+          <a:lstStyle/>
+          <a:p>
+            <a:pPr marL="0" indent="0">
+              <a:lnSpc>
+                <a:spcPct val="125000"/>
+              </a:lnSpc>
+              <a:buNone/>
+            </a:pPr>
+            <a:r>
+              <a:rPr lang="en-US" sz="1100" dirty="0">
+                <a:solidFill>
+                  <a:srgbClr val="374151"/>
+                </a:solidFill>
+                <a:latin typeface="Calibri" pitchFamily="34" charset="0"/>
+                <a:ea typeface="Calibri" pitchFamily="34" charset="-122"/>
+                <a:cs typeface="Calibri" pitchFamily="34" charset="-120"/>
+              </a:rPr>
+              <a:t>Formalize and publish a governance framework: human-in-the-loop requirements, PHI safeguards, bias monitoring, drift alerting, and accuracy benchmarking vs. ground truth.</a:t>
+            </a:r>
+            <a:endParaRPr lang="en-US" sz="1100" dirty="0"/>
+          </a:p>
+        </p:txBody>
+      </p:sp>
+      <p:sp>
+        <p:nvSpPr>
+          <p:cNvPr id="34" name="Shape 29"/>
+          <p:cNvSpPr/>
+          <p:nvPr/>
+        </p:nvSpPr>
+        <p:spPr>
+          <a:xfrm>
+            <a:off x="6281928" y="3840480"/>
+            <a:ext cx="2505456" cy="914400"/>
+          </a:xfrm>
+          <a:prstGeom prst="roundRect">
+            <a:avLst>
+              <a:gd name="adj" fmla="val 8000"/>
+            </a:avLst>
+          </a:prstGeom>
+          <a:solidFill>
+            <a:srgbClr val="F7F5FF"/>
+          </a:solidFill>
+          <a:ln/>
+        </p:spPr>
+        <p:txBody>
+          <a:bodyPr/>
+          <a:lstStyle/>
+          <a:p>
+            <a:endParaRPr lang="en-US"/>
+          </a:p>
+        </p:txBody>
       </p:sp>
       <p:sp>
         <p:nvSpPr>
@@ -11568,7 +11924,7 @@
           <a:bodyPr wrap="square" lIns="0" tIns="0" rIns="0" bIns="0" rtlCol="0" anchor="ctr"/>
           <a:lstStyle/>
           <a:p>
-            <a:pPr indent="0" marL="0">
+            <a:pPr marL="0" indent="0">
               <a:buNone/>
             </a:pPr>
             <a:r>
@@ -11607,7 +11963,7 @@
           <a:bodyPr wrap="square" lIns="0" tIns="0" rIns="0" bIns="0" rtlCol="0" anchor="ctr"/>
           <a:lstStyle/>
           <a:p>
-            <a:pPr indent="0" marL="0">
+            <a:pPr marL="0" indent="0">
               <a:lnSpc>
                 <a:spcPct val="120000"/>
               </a:lnSpc>
@@ -11644,6 +12000,7 @@
         <a:solidFill>
           <a:srgbClr val="F8F5FF"/>
         </a:solidFill>
+        <a:effectLst/>
       </p:bgPr>
     </p:bg>
     <p:spTree>
@@ -11681,7 +12038,7 @@
           <a:bodyPr wrap="square" lIns="0" tIns="0" rIns="0" bIns="0" rtlCol="0" anchor="ctr"/>
           <a:lstStyle/>
           <a:p>
-            <a:pPr indent="0" marL="0">
+            <a:pPr marL="0" indent="0">
               <a:buNone/>
             </a:pPr>
             <a:r>
@@ -11720,7 +12077,7 @@
           <a:bodyPr wrap="square" lIns="0" tIns="0" rIns="0" bIns="0" rtlCol="0" anchor="ctr"/>
           <a:lstStyle/>
           <a:p>
-            <a:pPr indent="0" marL="0">
+            <a:pPr marL="0" indent="0">
               <a:buNone/>
             </a:pPr>
             <a:r>
@@ -11740,139 +12097,7 @@
       </p:sp>
       <p:pic>
         <p:nvPicPr>
-          <p:cNvPr id="4" name="Image 0" descr="preencoded.png">    </p:cNvPr>
-          <p:cNvPicPr>
-            <a:picLocks noChangeAspect="1"/>
-          </p:cNvPicPr>
-          <p:nvPr/>
-        </p:nvPicPr>
-        <p:blipFill>
-          <a:blip r:embed="rId1"/>
-          <a:stretch>
-            <a:fillRect/>
-          </a:stretch>
-        </p:blipFill>
-        <p:spPr>
-          <a:xfrm>
-            <a:off x="457200" y="1307592"/>
-            <a:ext cx="237744" cy="237744"/>
-          </a:xfrm>
-          <a:prstGeom prst="rect">
-            <a:avLst/>
-          </a:prstGeom>
-        </p:spPr>
-      </p:pic>
-      <p:sp>
-        <p:nvSpPr>
-          <p:cNvPr id="5" name="Text 2"/>
-          <p:cNvSpPr/>
-          <p:nvPr/>
-        </p:nvSpPr>
-        <p:spPr>
-          <a:xfrm>
-            <a:off x="786384" y="1280160"/>
-            <a:ext cx="3657600" cy="402336"/>
-          </a:xfrm>
-          <a:prstGeom prst="rect">
-            <a:avLst/>
-          </a:prstGeom>
-          <a:noFill/>
-          <a:ln/>
-        </p:spPr>
-        <p:txBody>
-          <a:bodyPr wrap="square" lIns="0" tIns="0" rIns="0" bIns="0" rtlCol="0" anchor="ctr"/>
-          <a:lstStyle/>
-          <a:p>
-            <a:pPr indent="0" marL="0">
-              <a:lnSpc>
-                <a:spcPct val="120000"/>
-              </a:lnSpc>
-              <a:buNone/>
-            </a:pPr>
-            <a:r>
-              <a:rPr lang="en-US" sz="1150" dirty="0">
-                <a:solidFill>
-                  <a:srgbClr val="374151"/>
-                </a:solidFill>
-                <a:latin typeface="Calibri" pitchFamily="34" charset="0"/>
-                <a:ea typeface="Calibri" pitchFamily="34" charset="-122"/>
-                <a:cs typeface="Calibri" pitchFamily="34" charset="-120"/>
-              </a:rPr>
-              <a:t>Human-in-the-loop review required before any claim action</a:t>
-            </a:r>
-            <a:endParaRPr lang="en-US" sz="1150" dirty="0"/>
-          </a:p>
-        </p:txBody>
-      </p:sp>
-      <p:pic>
-        <p:nvPicPr>
-          <p:cNvPr id="6" name="Image 1" descr="preencoded.png">    </p:cNvPr>
-          <p:cNvPicPr>
-            <a:picLocks noChangeAspect="1"/>
-          </p:cNvPicPr>
-          <p:nvPr/>
-        </p:nvPicPr>
-        <p:blipFill>
-          <a:blip r:embed="rId2"/>
-          <a:stretch>
-            <a:fillRect/>
-          </a:stretch>
-        </p:blipFill>
-        <p:spPr>
-          <a:xfrm>
-            <a:off x="457200" y="1801368"/>
-            <a:ext cx="237744" cy="237744"/>
-          </a:xfrm>
-          <a:prstGeom prst="rect">
-            <a:avLst/>
-          </a:prstGeom>
-        </p:spPr>
-      </p:pic>
-      <p:sp>
-        <p:nvSpPr>
-          <p:cNvPr id="7" name="Text 3"/>
-          <p:cNvSpPr/>
-          <p:nvPr/>
-        </p:nvSpPr>
-        <p:spPr>
-          <a:xfrm>
-            <a:off x="786384" y="1773936"/>
-            <a:ext cx="3657600" cy="402336"/>
-          </a:xfrm>
-          <a:prstGeom prst="rect">
-            <a:avLst/>
-          </a:prstGeom>
-          <a:noFill/>
-          <a:ln/>
-        </p:spPr>
-        <p:txBody>
-          <a:bodyPr wrap="square" lIns="0" tIns="0" rIns="0" bIns="0" rtlCol="0" anchor="ctr"/>
-          <a:lstStyle/>
-          <a:p>
-            <a:pPr indent="0" marL="0">
-              <a:lnSpc>
-                <a:spcPct val="120000"/>
-              </a:lnSpc>
-              <a:buNone/>
-            </a:pPr>
-            <a:r>
-              <a:rPr lang="en-US" sz="1150" dirty="0">
-                <a:solidFill>
-                  <a:srgbClr val="374151"/>
-                </a:solidFill>
-                <a:latin typeface="Calibri" pitchFamily="34" charset="0"/>
-                <a:ea typeface="Calibri" pitchFamily="34" charset="-122"/>
-                <a:cs typeface="Calibri" pitchFamily="34" charset="-120"/>
-              </a:rPr>
-              <a:t>All outputs labeled as AI recommendations, never autonomous denials</a:t>
-            </a:r>
-            <a:endParaRPr lang="en-US" sz="1150" dirty="0"/>
-          </a:p>
-        </p:txBody>
-      </p:sp>
-      <p:pic>
-        <p:nvPicPr>
-          <p:cNvPr id="8" name="Image 2" descr="preencoded.png">    </p:cNvPr>
+          <p:cNvPr id="4" name="Image 0" descr="preencoded.png"/>
           <p:cNvPicPr>
             <a:picLocks noChangeAspect="1"/>
           </p:cNvPicPr>
@@ -11886,7 +12111,7 @@
         </p:blipFill>
         <p:spPr>
           <a:xfrm>
-            <a:off x="457200" y="2295144"/>
+            <a:off x="457200" y="1307592"/>
             <a:ext cx="237744" cy="237744"/>
           </a:xfrm>
           <a:prstGeom prst="rect">
@@ -11896,13 +12121,13 @@
       </p:pic>
       <p:sp>
         <p:nvSpPr>
-          <p:cNvPr id="9" name="Text 4"/>
-          <p:cNvSpPr/>
-          <p:nvPr/>
-        </p:nvSpPr>
-        <p:spPr>
-          <a:xfrm>
-            <a:off x="786384" y="2267712"/>
+          <p:cNvPr id="5" name="Text 2"/>
+          <p:cNvSpPr/>
+          <p:nvPr/>
+        </p:nvSpPr>
+        <p:spPr>
+          <a:xfrm>
+            <a:off x="786384" y="1280160"/>
             <a:ext cx="3657600" cy="402336"/>
           </a:xfrm>
           <a:prstGeom prst="rect">
@@ -11915,7 +12140,7 @@
           <a:bodyPr wrap="square" lIns="0" tIns="0" rIns="0" bIns="0" rtlCol="0" anchor="ctr"/>
           <a:lstStyle/>
           <a:p>
-            <a:pPr indent="0" marL="0">
+            <a:pPr marL="0" indent="0">
               <a:lnSpc>
                 <a:spcPct val="120000"/>
               </a:lnSpc>
@@ -11930,7 +12155,7 @@
                 <a:ea typeface="Calibri" pitchFamily="34" charset="-122"/>
                 <a:cs typeface="Calibri" pitchFamily="34" charset="-120"/>
               </a:rPr>
-              <a:t>Synthetic data only — no real PHI used at any stage</a:t>
+              <a:t>Human-in-the-loop review required before any claim action</a:t>
             </a:r>
             <a:endParaRPr lang="en-US" sz="1150" dirty="0"/>
           </a:p>
@@ -11938,21 +12163,21 @@
       </p:sp>
       <p:pic>
         <p:nvPicPr>
-          <p:cNvPr id="10" name="Image 3" descr="preencoded.png">    </p:cNvPr>
+          <p:cNvPr id="6" name="Image 1" descr="preencoded.png"/>
           <p:cNvPicPr>
             <a:picLocks noChangeAspect="1"/>
           </p:cNvPicPr>
           <p:nvPr/>
         </p:nvPicPr>
         <p:blipFill>
-          <a:blip r:embed="rId4"/>
+          <a:blip r:embed="rId3"/>
           <a:stretch>
             <a:fillRect/>
           </a:stretch>
         </p:blipFill>
         <p:spPr>
           <a:xfrm>
-            <a:off x="457200" y="2788920"/>
+            <a:off x="457200" y="1801368"/>
             <a:ext cx="237744" cy="237744"/>
           </a:xfrm>
           <a:prstGeom prst="rect">
@@ -11962,13 +12187,13 @@
       </p:pic>
       <p:sp>
         <p:nvSpPr>
-          <p:cNvPr id="11" name="Text 5"/>
-          <p:cNvSpPr/>
-          <p:nvPr/>
-        </p:nvSpPr>
-        <p:spPr>
-          <a:xfrm>
-            <a:off x="786384" y="2761488"/>
+          <p:cNvPr id="7" name="Text 3"/>
+          <p:cNvSpPr/>
+          <p:nvPr/>
+        </p:nvSpPr>
+        <p:spPr>
+          <a:xfrm>
+            <a:off x="786384" y="1773936"/>
             <a:ext cx="3657600" cy="402336"/>
           </a:xfrm>
           <a:prstGeom prst="rect">
@@ -11981,7 +12206,7 @@
           <a:bodyPr wrap="square" lIns="0" tIns="0" rIns="0" bIns="0" rtlCol="0" anchor="ctr"/>
           <a:lstStyle/>
           <a:p>
-            <a:pPr indent="0" marL="0">
+            <a:pPr marL="0" indent="0">
               <a:lnSpc>
                 <a:spcPct val="120000"/>
               </a:lnSpc>
@@ -11996,7 +12221,7 @@
                 <a:ea typeface="Calibri" pitchFamily="34" charset="-122"/>
                 <a:cs typeface="Calibri" pitchFamily="34" charset="-120"/>
               </a:rPr>
-              <a:t>GOVERNANCE.md documents all controls and production requirements</a:t>
+              <a:t>All outputs labeled as AI recommendations, never autonomous denials</a:t>
             </a:r>
             <a:endParaRPr lang="en-US" sz="1150" dirty="0"/>
           </a:p>
@@ -12004,21 +12229,21 @@
       </p:sp>
       <p:pic>
         <p:nvPicPr>
-          <p:cNvPr id="12" name="Image 4" descr="preencoded.png">    </p:cNvPr>
+          <p:cNvPr id="8" name="Image 2" descr="preencoded.png"/>
           <p:cNvPicPr>
             <a:picLocks noChangeAspect="1"/>
           </p:cNvPicPr>
           <p:nvPr/>
         </p:nvPicPr>
         <p:blipFill>
-          <a:blip r:embed="rId5"/>
+          <a:blip r:embed="rId3"/>
           <a:stretch>
             <a:fillRect/>
           </a:stretch>
         </p:blipFill>
         <p:spPr>
           <a:xfrm>
-            <a:off x="457200" y="3282696"/>
+            <a:off x="457200" y="2295144"/>
             <a:ext cx="237744" cy="237744"/>
           </a:xfrm>
           <a:prstGeom prst="rect">
@@ -12028,13 +12253,13 @@
       </p:pic>
       <p:sp>
         <p:nvSpPr>
-          <p:cNvPr id="13" name="Text 6"/>
-          <p:cNvSpPr/>
-          <p:nvPr/>
-        </p:nvSpPr>
-        <p:spPr>
-          <a:xfrm>
-            <a:off x="786384" y="3255264"/>
+          <p:cNvPr id="9" name="Text 4"/>
+          <p:cNvSpPr/>
+          <p:nvPr/>
+        </p:nvSpPr>
+        <p:spPr>
+          <a:xfrm>
+            <a:off x="786384" y="2267712"/>
             <a:ext cx="3657600" cy="402336"/>
           </a:xfrm>
           <a:prstGeom prst="rect">
@@ -12047,7 +12272,7 @@
           <a:bodyPr wrap="square" lIns="0" tIns="0" rIns="0" bIns="0" rtlCol="0" anchor="ctr"/>
           <a:lstStyle/>
           <a:p>
-            <a:pPr indent="0" marL="0">
+            <a:pPr marL="0" indent="0">
               <a:lnSpc>
                 <a:spcPct val="120000"/>
               </a:lnSpc>
@@ -12062,7 +12287,7 @@
                 <a:ea typeface="Calibri" pitchFamily="34" charset="-122"/>
                 <a:cs typeface="Calibri" pitchFamily="34" charset="-120"/>
               </a:rPr>
-              <a:t>Evaluation harness scores system against labeled ground-truth claims</a:t>
+              <a:t>Synthetic data only — no real PHI used at any stage</a:t>
             </a:r>
             <a:endParaRPr lang="en-US" sz="1150" dirty="0"/>
           </a:p>
@@ -12070,21 +12295,21 @@
       </p:sp>
       <p:pic>
         <p:nvPicPr>
-          <p:cNvPr id="14" name="Image 5" descr="preencoded.png">    </p:cNvPr>
+          <p:cNvPr id="10" name="Image 3" descr="preencoded.png"/>
           <p:cNvPicPr>
             <a:picLocks noChangeAspect="1"/>
           </p:cNvPicPr>
           <p:nvPr/>
         </p:nvPicPr>
         <p:blipFill>
-          <a:blip r:embed="rId6"/>
+          <a:blip r:embed="rId3"/>
           <a:stretch>
             <a:fillRect/>
           </a:stretch>
         </p:blipFill>
         <p:spPr>
           <a:xfrm>
-            <a:off x="457200" y="3776472"/>
+            <a:off x="457200" y="2788920"/>
             <a:ext cx="237744" cy="237744"/>
           </a:xfrm>
           <a:prstGeom prst="rect">
@@ -12094,13 +12319,13 @@
       </p:pic>
       <p:sp>
         <p:nvSpPr>
-          <p:cNvPr id="15" name="Text 7"/>
-          <p:cNvSpPr/>
-          <p:nvPr/>
-        </p:nvSpPr>
-        <p:spPr>
-          <a:xfrm>
-            <a:off x="786384" y="3749040"/>
+          <p:cNvPr id="11" name="Text 5"/>
+          <p:cNvSpPr/>
+          <p:nvPr/>
+        </p:nvSpPr>
+        <p:spPr>
+          <a:xfrm>
+            <a:off x="786384" y="2761488"/>
             <a:ext cx="3657600" cy="402336"/>
           </a:xfrm>
           <a:prstGeom prst="rect">
@@ -12113,7 +12338,7 @@
           <a:bodyPr wrap="square" lIns="0" tIns="0" rIns="0" bIns="0" rtlCol="0" anchor="ctr"/>
           <a:lstStyle/>
           <a:p>
-            <a:pPr indent="0" marL="0">
+            <a:pPr marL="0" indent="0">
               <a:lnSpc>
                 <a:spcPct val="120000"/>
               </a:lnSpc>
@@ -12128,7 +12353,7 @@
                 <a:ea typeface="Calibri" pitchFamily="34" charset="-122"/>
                 <a:cs typeface="Calibri" pitchFamily="34" charset="-120"/>
               </a:rPr>
-              <a:t>Confidence calibration guide prevents overconfident outputs</a:t>
+              <a:t>GOVERNANCE.md documents all controls and production requirements</a:t>
             </a:r>
             <a:endParaRPr lang="en-US" sz="1150" dirty="0"/>
           </a:p>
@@ -12136,21 +12361,21 @@
       </p:sp>
       <p:pic>
         <p:nvPicPr>
-          <p:cNvPr id="16" name="Image 6" descr="preencoded.png">    </p:cNvPr>
+          <p:cNvPr id="12" name="Image 4" descr="preencoded.png"/>
           <p:cNvPicPr>
             <a:picLocks noChangeAspect="1"/>
           </p:cNvPicPr>
           <p:nvPr/>
         </p:nvPicPr>
         <p:blipFill>
-          <a:blip r:embed="rId7"/>
+          <a:blip r:embed="rId3"/>
           <a:stretch>
             <a:fillRect/>
           </a:stretch>
         </p:blipFill>
         <p:spPr>
           <a:xfrm>
-            <a:off x="457200" y="4270248"/>
+            <a:off x="457200" y="3282696"/>
             <a:ext cx="237744" cy="237744"/>
           </a:xfrm>
           <a:prstGeom prst="rect">
@@ -12160,13 +12385,13 @@
       </p:pic>
       <p:sp>
         <p:nvSpPr>
-          <p:cNvPr id="17" name="Text 8"/>
-          <p:cNvSpPr/>
-          <p:nvPr/>
-        </p:nvSpPr>
-        <p:spPr>
-          <a:xfrm>
-            <a:off x="786384" y="4242816"/>
+          <p:cNvPr id="13" name="Text 6"/>
+          <p:cNvSpPr/>
+          <p:nvPr/>
+        </p:nvSpPr>
+        <p:spPr>
+          <a:xfrm>
+            <a:off x="786384" y="3255264"/>
             <a:ext cx="3657600" cy="402336"/>
           </a:xfrm>
           <a:prstGeom prst="rect">
@@ -12179,7 +12404,7 @@
           <a:bodyPr wrap="square" lIns="0" tIns="0" rIns="0" bIns="0" rtlCol="0" anchor="ctr"/>
           <a:lstStyle/>
           <a:p>
-            <a:pPr indent="0" marL="0">
+            <a:pPr marL="0" indent="0">
               <a:lnSpc>
                 <a:spcPct val="120000"/>
               </a:lnSpc>
@@ -12194,6 +12419,138 @@
                 <a:ea typeface="Calibri" pitchFamily="34" charset="-122"/>
                 <a:cs typeface="Calibri" pitchFamily="34" charset="-120"/>
               </a:rPr>
+              <a:t>Evaluation harness scores system against labeled ground-truth claims</a:t>
+            </a:r>
+            <a:endParaRPr lang="en-US" sz="1150" dirty="0"/>
+          </a:p>
+        </p:txBody>
+      </p:sp>
+      <p:pic>
+        <p:nvPicPr>
+          <p:cNvPr id="14" name="Image 5" descr="preencoded.png"/>
+          <p:cNvPicPr>
+            <a:picLocks noChangeAspect="1"/>
+          </p:cNvPicPr>
+          <p:nvPr/>
+        </p:nvPicPr>
+        <p:blipFill>
+          <a:blip r:embed="rId3"/>
+          <a:stretch>
+            <a:fillRect/>
+          </a:stretch>
+        </p:blipFill>
+        <p:spPr>
+          <a:xfrm>
+            <a:off x="457200" y="3776472"/>
+            <a:ext cx="237744" cy="237744"/>
+          </a:xfrm>
+          <a:prstGeom prst="rect">
+            <a:avLst/>
+          </a:prstGeom>
+        </p:spPr>
+      </p:pic>
+      <p:sp>
+        <p:nvSpPr>
+          <p:cNvPr id="15" name="Text 7"/>
+          <p:cNvSpPr/>
+          <p:nvPr/>
+        </p:nvSpPr>
+        <p:spPr>
+          <a:xfrm>
+            <a:off x="786384" y="3749040"/>
+            <a:ext cx="3657600" cy="402336"/>
+          </a:xfrm>
+          <a:prstGeom prst="rect">
+            <a:avLst/>
+          </a:prstGeom>
+          <a:noFill/>
+          <a:ln/>
+        </p:spPr>
+        <p:txBody>
+          <a:bodyPr wrap="square" lIns="0" tIns="0" rIns="0" bIns="0" rtlCol="0" anchor="ctr"/>
+          <a:lstStyle/>
+          <a:p>
+            <a:pPr marL="0" indent="0">
+              <a:lnSpc>
+                <a:spcPct val="120000"/>
+              </a:lnSpc>
+              <a:buNone/>
+            </a:pPr>
+            <a:r>
+              <a:rPr lang="en-US" sz="1150" dirty="0">
+                <a:solidFill>
+                  <a:srgbClr val="374151"/>
+                </a:solidFill>
+                <a:latin typeface="Calibri" pitchFamily="34" charset="0"/>
+                <a:ea typeface="Calibri" pitchFamily="34" charset="-122"/>
+                <a:cs typeface="Calibri" pitchFamily="34" charset="-120"/>
+              </a:rPr>
+              <a:t>Confidence calibration guide prevents overconfident outputs</a:t>
+            </a:r>
+            <a:endParaRPr lang="en-US" sz="1150" dirty="0"/>
+          </a:p>
+        </p:txBody>
+      </p:sp>
+      <p:pic>
+        <p:nvPicPr>
+          <p:cNvPr id="16" name="Image 6" descr="preencoded.png"/>
+          <p:cNvPicPr>
+            <a:picLocks noChangeAspect="1"/>
+          </p:cNvPicPr>
+          <p:nvPr/>
+        </p:nvPicPr>
+        <p:blipFill>
+          <a:blip r:embed="rId3"/>
+          <a:stretch>
+            <a:fillRect/>
+          </a:stretch>
+        </p:blipFill>
+        <p:spPr>
+          <a:xfrm>
+            <a:off x="457200" y="4270248"/>
+            <a:ext cx="237744" cy="237744"/>
+          </a:xfrm>
+          <a:prstGeom prst="rect">
+            <a:avLst/>
+          </a:prstGeom>
+        </p:spPr>
+      </p:pic>
+      <p:sp>
+        <p:nvSpPr>
+          <p:cNvPr id="17" name="Text 8"/>
+          <p:cNvSpPr/>
+          <p:nvPr/>
+        </p:nvSpPr>
+        <p:spPr>
+          <a:xfrm>
+            <a:off x="786384" y="4242816"/>
+            <a:ext cx="3657600" cy="402336"/>
+          </a:xfrm>
+          <a:prstGeom prst="rect">
+            <a:avLst/>
+          </a:prstGeom>
+          <a:noFill/>
+          <a:ln/>
+        </p:spPr>
+        <p:txBody>
+          <a:bodyPr wrap="square" lIns="0" tIns="0" rIns="0" bIns="0" rtlCol="0" anchor="ctr"/>
+          <a:lstStyle/>
+          <a:p>
+            <a:pPr marL="0" indent="0">
+              <a:lnSpc>
+                <a:spcPct val="120000"/>
+              </a:lnSpc>
+              <a:buNone/>
+            </a:pPr>
+            <a:r>
+              <a:rPr lang="en-US" sz="1150" dirty="0">
+                <a:solidFill>
+                  <a:srgbClr val="374151"/>
+                </a:solidFill>
+                <a:latin typeface="Calibri" pitchFamily="34" charset="0"/>
+                <a:ea typeface="Calibri" pitchFamily="34" charset="-122"/>
+                <a:cs typeface="Calibri" pitchFamily="34" charset="-120"/>
+              </a:rPr>
               <a:t>Bias monitoring across provider specialties flagged as future requirement</a:t>
             </a:r>
             <a:endParaRPr lang="en-US" sz="1150" dirty="0"/>
@@ -12221,7 +12578,7 @@
           <a:bodyPr wrap="square" lIns="0" tIns="0" rIns="0" bIns="0" rtlCol="0" anchor="ctr"/>
           <a:lstStyle/>
           <a:p>
-            <a:pPr indent="0" marL="0">
+            <a:pPr marL="0" indent="0">
               <a:buNone/>
             </a:pPr>
             <a:r>
@@ -12260,6 +12617,13 @@
           </a:solidFill>
           <a:ln/>
         </p:spPr>
+        <p:txBody>
+          <a:bodyPr/>
+          <a:lstStyle/>
+          <a:p>
+            <a:endParaRPr lang="en-US"/>
+          </a:p>
+        </p:txBody>
       </p:sp>
       <p:sp>
         <p:nvSpPr>
@@ -12282,7 +12646,7 @@
           <a:bodyPr wrap="square" lIns="0" tIns="0" rIns="0" bIns="0" rtlCol="0" anchor="ctr"/>
           <a:lstStyle/>
           <a:p>
-            <a:pPr indent="0" marL="0">
+            <a:pPr marL="0" indent="0">
               <a:buNone/>
             </a:pPr>
             <a:r>
@@ -12321,7 +12685,7 @@
           <a:bodyPr wrap="square" lIns="0" tIns="0" rIns="0" bIns="0" rtlCol="0" anchor="ctr"/>
           <a:lstStyle/>
           <a:p>
-            <a:pPr indent="0" marL="0">
+            <a:pPr marL="0" indent="0">
               <a:buNone/>
             </a:pPr>
             <a:r>
@@ -12360,6 +12724,13 @@
           </a:solidFill>
           <a:ln/>
         </p:spPr>
+        <p:txBody>
+          <a:bodyPr/>
+          <a:lstStyle/>
+          <a:p>
+            <a:endParaRPr lang="en-US"/>
+          </a:p>
+        </p:txBody>
       </p:sp>
       <p:sp>
         <p:nvSpPr>
@@ -12382,7 +12753,7 @@
           <a:bodyPr wrap="square" lIns="0" tIns="0" rIns="0" bIns="0" rtlCol="0" anchor="ctr"/>
           <a:lstStyle/>
           <a:p>
-            <a:pPr indent="0" marL="0">
+            <a:pPr marL="0" indent="0">
               <a:buNone/>
             </a:pPr>
             <a:r>
@@ -12421,7 +12792,7 @@
           <a:bodyPr wrap="square" lIns="0" tIns="0" rIns="0" bIns="0" rtlCol="0" anchor="ctr"/>
           <a:lstStyle/>
           <a:p>
-            <a:pPr indent="0" marL="0">
+            <a:pPr marL="0" indent="0">
               <a:buNone/>
             </a:pPr>
             <a:r>
@@ -12460,6 +12831,13 @@
           </a:solidFill>
           <a:ln/>
         </p:spPr>
+        <p:txBody>
+          <a:bodyPr/>
+          <a:lstStyle/>
+          <a:p>
+            <a:endParaRPr lang="en-US"/>
+          </a:p>
+        </p:txBody>
       </p:sp>
       <p:sp>
         <p:nvSpPr>
@@ -12482,7 +12860,7 @@
           <a:bodyPr wrap="square" lIns="0" tIns="0" rIns="0" bIns="0" rtlCol="0" anchor="ctr"/>
           <a:lstStyle/>
           <a:p>
-            <a:pPr indent="0" marL="0">
+            <a:pPr marL="0" indent="0">
               <a:buNone/>
             </a:pPr>
             <a:r>
@@ -12521,7 +12899,7 @@
           <a:bodyPr wrap="square" lIns="0" tIns="0" rIns="0" bIns="0" rtlCol="0" anchor="ctr"/>
           <a:lstStyle/>
           <a:p>
-            <a:pPr indent="0" marL="0">
+            <a:pPr marL="0" indent="0">
               <a:buNone/>
             </a:pPr>
             <a:r>
@@ -12560,6 +12938,13 @@
           </a:solidFill>
           <a:ln/>
         </p:spPr>
+        <p:txBody>
+          <a:bodyPr/>
+          <a:lstStyle/>
+          <a:p>
+            <a:endParaRPr lang="en-US"/>
+          </a:p>
+        </p:txBody>
       </p:sp>
       <p:sp>
         <p:nvSpPr>
@@ -12582,7 +12967,7 @@
           <a:bodyPr wrap="square" lIns="0" tIns="0" rIns="0" bIns="0" rtlCol="0" anchor="ctr"/>
           <a:lstStyle/>
           <a:p>
-            <a:pPr indent="0" marL="0">
+            <a:pPr marL="0" indent="0">
               <a:buNone/>
             </a:pPr>
             <a:r>
@@ -12621,7 +13006,7 @@
           <a:bodyPr wrap="square" lIns="0" tIns="0" rIns="0" bIns="0" rtlCol="0" anchor="ctr"/>
           <a:lstStyle/>
           <a:p>
-            <a:pPr indent="0" marL="0">
+            <a:pPr marL="0" indent="0">
               <a:buNone/>
             </a:pPr>
             <a:r>
@@ -12660,6 +13045,13 @@
           </a:solidFill>
           <a:ln/>
         </p:spPr>
+        <p:txBody>
+          <a:bodyPr/>
+          <a:lstStyle/>
+          <a:p>
+            <a:endParaRPr lang="en-US"/>
+          </a:p>
+        </p:txBody>
       </p:sp>
       <p:sp>
         <p:nvSpPr>
@@ -12682,7 +13074,7 @@
           <a:bodyPr wrap="square" lIns="0" tIns="0" rIns="0" bIns="0" rtlCol="0" anchor="ctr"/>
           <a:lstStyle/>
           <a:p>
-            <a:pPr indent="0" marL="0">
+            <a:pPr marL="0" indent="0">
               <a:buNone/>
             </a:pPr>
             <a:r>
@@ -12721,7 +13113,7 @@
           <a:bodyPr wrap="square" lIns="0" tIns="0" rIns="0" bIns="0" rtlCol="0" anchor="ctr"/>
           <a:lstStyle/>
           <a:p>
-            <a:pPr indent="0" marL="0">
+            <a:pPr marL="0" indent="0">
               <a:buNone/>
             </a:pPr>
             <a:r>
@@ -12760,6 +13152,13 @@
           </a:solidFill>
           <a:ln/>
         </p:spPr>
+        <p:txBody>
+          <a:bodyPr/>
+          <a:lstStyle/>
+          <a:p>
+            <a:endParaRPr lang="en-US"/>
+          </a:p>
+        </p:txBody>
       </p:sp>
       <p:sp>
         <p:nvSpPr>
@@ -12782,7 +13181,7 @@
           <a:bodyPr wrap="square" lIns="0" tIns="0" rIns="0" bIns="0" rtlCol="0" anchor="ctr"/>
           <a:lstStyle/>
           <a:p>
-            <a:pPr indent="0" marL="0">
+            <a:pPr marL="0" indent="0">
               <a:buNone/>
             </a:pPr>
             <a:r>
@@ -12821,7 +13220,7 @@
           <a:bodyPr wrap="square" lIns="0" tIns="0" rIns="0" bIns="0" rtlCol="0" anchor="ctr"/>
           <a:lstStyle/>
           <a:p>
-            <a:pPr indent="0" marL="0">
+            <a:pPr marL="0" indent="0">
               <a:buNone/>
             </a:pPr>
             <a:r>
@@ -12860,6 +13259,13 @@
           </a:solidFill>
           <a:ln/>
         </p:spPr>
+        <p:txBody>
+          <a:bodyPr/>
+          <a:lstStyle/>
+          <a:p>
+            <a:endParaRPr lang="en-US"/>
+          </a:p>
+        </p:txBody>
       </p:sp>
       <p:sp>
         <p:nvSpPr>
@@ -12882,7 +13288,7 @@
           <a:bodyPr wrap="square" lIns="0" tIns="0" rIns="0" bIns="0" rtlCol="0" anchor="ctr"/>
           <a:lstStyle/>
           <a:p>
-            <a:pPr indent="0" marL="0">
+            <a:pPr marL="0" indent="0">
               <a:buNone/>
             </a:pPr>
             <a:r>
@@ -12921,7 +13327,7 @@
           <a:bodyPr wrap="square" lIns="0" tIns="0" rIns="0" bIns="0" rtlCol="0" anchor="ctr"/>
           <a:lstStyle/>
           <a:p>
-            <a:pPr indent="0" marL="0">
+            <a:pPr marL="0" indent="0">
               <a:buNone/>
             </a:pPr>
             <a:r>
@@ -12960,6 +13366,13 @@
           </a:solidFill>
           <a:ln/>
         </p:spPr>
+        <p:txBody>
+          <a:bodyPr/>
+          <a:lstStyle/>
+          <a:p>
+            <a:endParaRPr lang="en-US"/>
+          </a:p>
+        </p:txBody>
       </p:sp>
       <p:sp>
         <p:nvSpPr>
@@ -12982,7 +13395,7 @@
           <a:bodyPr wrap="square" lIns="0" tIns="0" rIns="0" bIns="0" rtlCol="0" anchor="ctr"/>
           <a:lstStyle/>
           <a:p>
-            <a:pPr indent="0" marL="0">
+            <a:pPr marL="0" indent="0">
               <a:buNone/>
             </a:pPr>
             <a:r>
@@ -13021,7 +13434,7 @@
           <a:bodyPr wrap="square" lIns="0" tIns="0" rIns="0" bIns="0" rtlCol="0" anchor="ctr"/>
           <a:lstStyle/>
           <a:p>
-            <a:pPr indent="0" marL="0">
+            <a:pPr marL="0" indent="0">
               <a:buNone/>
             </a:pPr>
             <a:r>
@@ -13340,4 +13753,319 @@
     </a:ext>
   </a:extLst>
 </a:theme>
+</file>
+
+<file path=ppt/theme/theme2.xml><?xml version="1.0" encoding="utf-8"?>
+<a:theme xmlns:a="http://schemas.openxmlformats.org/drawingml/2006/main" name="Office Theme">
+  <a:themeElements>
+    <a:clrScheme name="Office">
+      <a:dk1>
+        <a:sysClr val="windowText" lastClr="000000"/>
+      </a:dk1>
+      <a:lt1>
+        <a:sysClr val="window" lastClr="FFFFFF"/>
+      </a:lt1>
+      <a:dk2>
+        <a:srgbClr val="0E2841"/>
+      </a:dk2>
+      <a:lt2>
+        <a:srgbClr val="E8E8E8"/>
+      </a:lt2>
+      <a:accent1>
+        <a:srgbClr val="156082"/>
+      </a:accent1>
+      <a:accent2>
+        <a:srgbClr val="E97132"/>
+      </a:accent2>
+      <a:accent3>
+        <a:srgbClr val="196B24"/>
+      </a:accent3>
+      <a:accent4>
+        <a:srgbClr val="0F9ED5"/>
+      </a:accent4>
+      <a:accent5>
+        <a:srgbClr val="A02B93"/>
+      </a:accent5>
+      <a:accent6>
+        <a:srgbClr val="4EA72E"/>
+      </a:accent6>
+      <a:hlink>
+        <a:srgbClr val="467886"/>
+      </a:hlink>
+      <a:folHlink>
+        <a:srgbClr val="96607D"/>
+      </a:folHlink>
+    </a:clrScheme>
+    <a:fontScheme name="Office">
+      <a:majorFont>
+        <a:latin typeface="Aptos Display" panose="02110004020202020204"/>
+        <a:ea typeface=""/>
+        <a:cs typeface=""/>
+        <a:font script="Jpan" typeface="游ゴシック Light"/>
+        <a:font script="Hang" typeface="맑은 고딕"/>
+        <a:font script="Hans" typeface="等线 Light"/>
+        <a:font script="Hant" typeface="新細明體"/>
+        <a:font script="Arab" typeface="Times New Roman"/>
+        <a:font script="Hebr" typeface="Times New Roman"/>
+        <a:font script="Thai" typeface="Angsana New"/>
+        <a:font script="Ethi" typeface="Nyala"/>
+        <a:font script="Beng" typeface="Vrinda"/>
+        <a:font script="Gujr" typeface="Shruti"/>
+        <a:font script="Khmr" typeface="MoolBoran"/>
+        <a:font script="Knda" typeface="Tunga"/>
+        <a:font script="Guru" typeface="Raavi"/>
+        <a:font script="Cans" typeface="Euphemia"/>
+        <a:font script="Cher" typeface="Plantagenet Cherokee"/>
+        <a:font script="Yiii" typeface="Microsoft Yi Baiti"/>
+        <a:font script="Tibt" typeface="Microsoft Himalaya"/>
+        <a:font script="Thaa" typeface="MV Boli"/>
+        <a:font script="Deva" typeface="Mangal"/>
+        <a:font script="Telu" typeface="Gautami"/>
+        <a:font script="Taml" typeface="Latha"/>
+        <a:font script="Syrc" typeface="Estrangelo Edessa"/>
+        <a:font script="Orya" typeface="Kalinga"/>
+        <a:font script="Mlym" typeface="Kartika"/>
+        <a:font script="Laoo" typeface="DokChampa"/>
+        <a:font script="Sinh" typeface="Iskoola Pota"/>
+        <a:font script="Mong" typeface="Mongolian Baiti"/>
+        <a:font script="Viet" typeface="Times New Roman"/>
+        <a:font script="Uigh" typeface="Microsoft Uighur"/>
+        <a:font script="Geor" typeface="Sylfaen"/>
+        <a:font script="Armn" typeface="Arial"/>
+        <a:font script="Bugi" typeface="Leelawadee UI"/>
+        <a:font script="Bopo" typeface="Microsoft JhengHei"/>
+        <a:font script="Java" typeface="Javanese Text"/>
+        <a:font script="Lisu" typeface="Segoe UI"/>
+        <a:font script="Mymr" typeface="Myanmar Text"/>
+        <a:font script="Nkoo" typeface="Ebrima"/>
+        <a:font script="Olck" typeface="Nirmala UI"/>
+        <a:font script="Osma" typeface="Ebrima"/>
+        <a:font script="Phag" typeface="Phagspa"/>
+        <a:font script="Syrn" typeface="Estrangelo Edessa"/>
+        <a:font script="Syrj" typeface="Estrangelo Edessa"/>
+        <a:font script="Syre" typeface="Estrangelo Edessa"/>
+        <a:font script="Sora" typeface="Nirmala UI"/>
+        <a:font script="Tale" typeface="Microsoft Tai Le"/>
+        <a:font script="Talu" typeface="Microsoft New Tai Lue"/>
+        <a:font script="Tfng" typeface="Ebrima"/>
+      </a:majorFont>
+      <a:minorFont>
+        <a:latin typeface="Aptos" panose="02110004020202020204"/>
+        <a:ea typeface=""/>
+        <a:cs typeface=""/>
+        <a:font script="Jpan" typeface="游ゴシック"/>
+        <a:font script="Hang" typeface="맑은 고딕"/>
+        <a:font script="Hans" typeface="等线"/>
+        <a:font script="Hant" typeface="新細明體"/>
+        <a:font script="Arab" typeface="Arial"/>
+        <a:font script="Hebr" typeface="Arial"/>
+        <a:font script="Thai" typeface="Cordia New"/>
+        <a:font script="Ethi" typeface="Nyala"/>
+        <a:font script="Beng" typeface="Vrinda"/>
+        <a:font script="Gujr" typeface="Shruti"/>
+        <a:font script="Khmr" typeface="DaunPenh"/>
+        <a:font script="Knda" typeface="Tunga"/>
+        <a:font script="Guru" typeface="Raavi"/>
+        <a:font script="Cans" typeface="Euphemia"/>
+        <a:font script="Cher" typeface="Plantagenet Cherokee"/>
+        <a:font script="Yiii" typeface="Microsoft Yi Baiti"/>
+        <a:font script="Tibt" typeface="Microsoft Himalaya"/>
+        <a:font script="Thaa" typeface="MV Boli"/>
+        <a:font script="Deva" typeface="Mangal"/>
+        <a:font script="Telu" typeface="Gautami"/>
+        <a:font script="Taml" typeface="Latha"/>
+        <a:font script="Syrc" typeface="Estrangelo Edessa"/>
+        <a:font script="Orya" typeface="Kalinga"/>
+        <a:font script="Mlym" typeface="Kartika"/>
+        <a:font script="Laoo" typeface="DokChampa"/>
+        <a:font script="Sinh" typeface="Iskoola Pota"/>
+        <a:font script="Mong" typeface="Mongolian Baiti"/>
+        <a:font script="Viet" typeface="Arial"/>
+        <a:font script="Uigh" typeface="Microsoft Uighur"/>
+        <a:font script="Geor" typeface="Sylfaen"/>
+        <a:font script="Armn" typeface="Arial"/>
+        <a:font script="Bugi" typeface="Leelawadee UI"/>
+        <a:font script="Bopo" typeface="Microsoft JhengHei"/>
+        <a:font script="Java" typeface="Javanese Text"/>
+        <a:font script="Lisu" typeface="Segoe UI"/>
+        <a:font script="Mymr" typeface="Myanmar Text"/>
+        <a:font script="Nkoo" typeface="Ebrima"/>
+        <a:font script="Olck" typeface="Nirmala UI"/>
+        <a:font script="Osma" typeface="Ebrima"/>
+        <a:font script="Phag" typeface="Phagspa"/>
+        <a:font script="Syrn" typeface="Estrangelo Edessa"/>
+        <a:font script="Syrj" typeface="Estrangelo Edessa"/>
+        <a:font script="Syre" typeface="Estrangelo Edessa"/>
+        <a:font script="Sora" typeface="Nirmala UI"/>
+        <a:font script="Tale" typeface="Microsoft Tai Le"/>
+        <a:font script="Talu" typeface="Microsoft New Tai Lue"/>
+        <a:font script="Tfng" typeface="Ebrima"/>
+      </a:minorFont>
+    </a:fontScheme>
+    <a:fmtScheme name="Office">
+      <a:fillStyleLst>
+        <a:solidFill>
+          <a:schemeClr val="phClr"/>
+        </a:solidFill>
+        <a:gradFill rotWithShape="1">
+          <a:gsLst>
+            <a:gs pos="0">
+              <a:schemeClr val="phClr">
+                <a:lumMod val="110000"/>
+                <a:satMod val="105000"/>
+                <a:tint val="67000"/>
+              </a:schemeClr>
+            </a:gs>
+            <a:gs pos="50000">
+              <a:schemeClr val="phClr">
+                <a:lumMod val="105000"/>
+                <a:satMod val="103000"/>
+                <a:tint val="73000"/>
+              </a:schemeClr>
+            </a:gs>
+            <a:gs pos="100000">
+              <a:schemeClr val="phClr">
+                <a:lumMod val="105000"/>
+                <a:satMod val="109000"/>
+                <a:tint val="81000"/>
+              </a:schemeClr>
+            </a:gs>
+          </a:gsLst>
+          <a:lin ang="5400000" scaled="0"/>
+        </a:gradFill>
+        <a:gradFill rotWithShape="1">
+          <a:gsLst>
+            <a:gs pos="0">
+              <a:schemeClr val="phClr">
+                <a:satMod val="103000"/>
+                <a:lumMod val="102000"/>
+                <a:tint val="94000"/>
+              </a:schemeClr>
+            </a:gs>
+            <a:gs pos="50000">
+              <a:schemeClr val="phClr">
+                <a:satMod val="110000"/>
+                <a:lumMod val="100000"/>
+                <a:shade val="100000"/>
+              </a:schemeClr>
+            </a:gs>
+            <a:gs pos="100000">
+              <a:schemeClr val="phClr">
+                <a:lumMod val="99000"/>
+                <a:satMod val="120000"/>
+                <a:shade val="78000"/>
+              </a:schemeClr>
+            </a:gs>
+          </a:gsLst>
+          <a:lin ang="5400000" scaled="0"/>
+        </a:gradFill>
+      </a:fillStyleLst>
+      <a:lnStyleLst>
+        <a:ln w="12700" cap="flat" cmpd="sng" algn="ctr">
+          <a:solidFill>
+            <a:schemeClr val="phClr"/>
+          </a:solidFill>
+          <a:prstDash val="solid"/>
+          <a:miter lim="800000"/>
+        </a:ln>
+        <a:ln w="19050" cap="flat" cmpd="sng" algn="ctr">
+          <a:solidFill>
+            <a:schemeClr val="phClr"/>
+          </a:solidFill>
+          <a:prstDash val="solid"/>
+          <a:miter lim="800000"/>
+        </a:ln>
+        <a:ln w="25400" cap="flat" cmpd="sng" algn="ctr">
+          <a:solidFill>
+            <a:schemeClr val="phClr"/>
+          </a:solidFill>
+          <a:prstDash val="solid"/>
+          <a:miter lim="800000"/>
+        </a:ln>
+      </a:lnStyleLst>
+      <a:effectStyleLst>
+        <a:effectStyle>
+          <a:effectLst/>
+        </a:effectStyle>
+        <a:effectStyle>
+          <a:effectLst/>
+        </a:effectStyle>
+        <a:effectStyle>
+          <a:effectLst>
+            <a:outerShdw blurRad="57150" dist="19050" dir="5400000" algn="ctr" rotWithShape="0">
+              <a:srgbClr val="000000">
+                <a:alpha val="63000"/>
+              </a:srgbClr>
+            </a:outerShdw>
+          </a:effectLst>
+        </a:effectStyle>
+      </a:effectStyleLst>
+      <a:bgFillStyleLst>
+        <a:solidFill>
+          <a:schemeClr val="phClr"/>
+        </a:solidFill>
+        <a:solidFill>
+          <a:schemeClr val="phClr">
+            <a:tint val="95000"/>
+            <a:satMod val="170000"/>
+          </a:schemeClr>
+        </a:solidFill>
+        <a:gradFill rotWithShape="1">
+          <a:gsLst>
+            <a:gs pos="0">
+              <a:schemeClr val="phClr">
+                <a:tint val="93000"/>
+                <a:satMod val="150000"/>
+                <a:shade val="98000"/>
+                <a:lumMod val="102000"/>
+              </a:schemeClr>
+            </a:gs>
+            <a:gs pos="50000">
+              <a:schemeClr val="phClr">
+                <a:tint val="98000"/>
+                <a:satMod val="130000"/>
+                <a:shade val="90000"/>
+                <a:lumMod val="103000"/>
+              </a:schemeClr>
+            </a:gs>
+            <a:gs pos="100000">
+              <a:schemeClr val="phClr">
+                <a:shade val="63000"/>
+                <a:satMod val="120000"/>
+              </a:schemeClr>
+            </a:gs>
+          </a:gsLst>
+          <a:lin ang="5400000" scaled="0"/>
+        </a:gradFill>
+      </a:bgFillStyleLst>
+    </a:fmtScheme>
+  </a:themeElements>
+  <a:objectDefaults>
+    <a:lnDef>
+      <a:spPr/>
+      <a:bodyPr/>
+      <a:lstStyle/>
+      <a:style>
+        <a:lnRef idx="2">
+          <a:schemeClr val="accent1"/>
+        </a:lnRef>
+        <a:fillRef idx="0">
+          <a:schemeClr val="accent1"/>
+        </a:fillRef>
+        <a:effectRef idx="1">
+          <a:schemeClr val="accent1"/>
+        </a:effectRef>
+        <a:fontRef idx="minor">
+          <a:schemeClr val="tx1"/>
+        </a:fontRef>
+      </a:style>
+    </a:lnDef>
+  </a:objectDefaults>
+  <a:extraClrSchemeLst/>
+  <a:extLst>
+    <a:ext uri="{05A4C25C-085E-4340-85A3-A5531E510DB2}">
+      <thm15:themeFamily xmlns:thm15="http://schemas.microsoft.com/office/thememl/2012/main" name="Office Theme" id="{2E142A2C-CD16-42D6-873A-C26D2A0506FA}" vid="{1BDDFF52-6CD6-40A5-AB3C-68EB2F1E4D0A}"/>
+    </a:ext>
+  </a:extLst>
+</a:theme>
 </file>